--- a/GeoPulse_Presentation_Fixed.pptx
+++ b/GeoPulse_Presentation_Fixed.pptx
@@ -4331,7 +4331,7 @@
               </a:defRPr>
             </a:pPr>
             <a:r>
-              <a:t>02 / SOLUTION &amp; FEATURES</a:t>
+              <a:t>02 / ACADEMIC &amp; TECHNICAL SCOPE</a:t>
             </a:r>
           </a:p>
           <a:p>
@@ -4347,7 +4347,7 @@
               </a:defRPr>
             </a:pPr>
             <a:r>
-              <a:t>Project Objective &amp; Solution Overview</a:t>
+              <a:t>Project Objectives &amp; Architectural Goals</a:t>
             </a:r>
           </a:p>
           <a:p>
@@ -4363,7 +4363,7 @@
               </a:defRPr>
             </a:pPr>
             <a:r>
-              <a:t>GeoPulse bridges the gap between stranded victims, field rescue squads, and relief hubs.</a:t>
+              <a:t>Engineered specifically to fulfill CSE494 Course Outcomes (CO1-CO6) using pure MongoDB capabilities.</a:t>
             </a:r>
           </a:p>
         </p:txBody>
@@ -4377,7 +4377,7 @@
         <p:spPr>
           <a:xfrm>
             <a:off x="731520" y="1874519"/>
-            <a:ext cx="4389120" cy="4480560"/>
+            <a:ext cx="4663440" cy="4480560"/>
           </a:xfrm>
           <a:prstGeom prst="roundRect">
             <a:avLst/>
@@ -4421,8 +4421,8 @@
         </p:nvSpPr>
         <p:spPr>
           <a:xfrm>
-            <a:off x="1005840" y="2103120"/>
-            <a:ext cx="3840480" cy="4023360"/>
+            <a:off x="960120" y="2057400"/>
+            <a:ext cx="4206240" cy="4114800"/>
           </a:xfrm>
           <a:prstGeom prst="rect">
             <a:avLst/>
@@ -4444,7 +4444,23 @@
               </a:defRPr>
             </a:pPr>
             <a:r>
-              <a:t>PRIMARY PROJECT OBJECTIVE</a:t>
+              <a:t>CORE PROJECT OBJECTIVES</a:t>
+            </a:r>
+          </a:p>
+          <a:p>
+            <a:pPr>
+              <a:spcBef>
+                <a:spcPts val="600"/>
+              </a:spcBef>
+              <a:defRPr sz="1200" b="1">
+                <a:solidFill>
+                  <a:srgbClr val="FFFFFF"/>
+                </a:solidFill>
+                <a:latin typeface="Segoe UI"/>
+              </a:defRPr>
+            </a:pPr>
+            <a:r>
+              <a:t>To engineer an intelligent, event-driven disaster response system that uses MongoDB's native 2dsphere indexing and aggregation pipelines to eliminate dispatch latency during critical first-hour calamity rescue operations.</a:t>
             </a:r>
           </a:p>
           <a:p>
@@ -4452,23 +4468,7 @@
               <a:spcBef>
                 <a:spcPts val="800"/>
               </a:spcBef>
-              <a:defRPr sz="1350" b="1">
-                <a:solidFill>
-                  <a:srgbClr val="FFFFFF"/>
-                </a:solidFill>
-                <a:latin typeface="Segoe UI"/>
-              </a:defRPr>
-            </a:pPr>
-            <a:r>
-              <a:t>To engineer an intelligent, event-driven disaster response system that uses MongoDB's native geospatial indexing and change streams to dynamically pair emergency SOS requests with nearest shelters and volunteers in milliseconds.</a:t>
-            </a:r>
-          </a:p>
-          <a:p>
-            <a:pPr>
-              <a:spcBef>
-                <a:spcPts val="1200"/>
-              </a:spcBef>
-              <a:defRPr sz="1150" b="1">
+              <a:defRPr sz="1050" b="1">
                 <a:solidFill>
                   <a:srgbClr val="38BDF8"/>
                 </a:solidFill>
@@ -4476,7 +4476,7 @@
               </a:defRPr>
             </a:pPr>
             <a:r>
-              <a:t>Key Architectural Pillars:</a:t>
+              <a:t>Specific Technical Objectives (Syllabus Mapped):</a:t>
             </a:r>
           </a:p>
           <a:p>
@@ -4484,7 +4484,7 @@
               <a:spcBef>
                 <a:spcPts val="400"/>
               </a:spcBef>
-              <a:defRPr sz="1050">
+              <a:defRPr sz="950">
                 <a:solidFill>
                   <a:srgbClr val="CBD5E1"/>
                 </a:solidFill>
@@ -4492,7 +4492,7 @@
               </a:defRPr>
             </a:pPr>
             <a:r>
-              <a:t>• Eliminates external message brokers (No Redis or Kafka needed).</a:t>
+              <a:t>• 1. Sub-100ms $geoNear Matching: Native spherical distance computation over Earth's curvature (Unit IV).</a:t>
             </a:r>
           </a:p>
           <a:p>
@@ -4500,7 +4500,7 @@
               <a:spcBef>
                 <a:spcPts val="400"/>
               </a:spcBef>
-              <a:defRPr sz="1050">
+              <a:defRPr sz="950">
                 <a:solidFill>
                   <a:srgbClr val="CBD5E1"/>
                 </a:solidFill>
@@ -4508,7 +4508,7 @@
               </a:defRPr>
             </a:pPr>
             <a:r>
-              <a:t>• Executes spherical curvature distance queries directly inside MongoDB.</a:t>
+              <a:t>• 2. Multi-Stage Aggregation Triage: Dynamic scoring combining severity, casualty count, and proximity (Unit IV).</a:t>
             </a:r>
           </a:p>
           <a:p>
@@ -4516,7 +4516,7 @@
               <a:spcBef>
                 <a:spcPts val="400"/>
               </a:spcBef>
-              <a:defRPr sz="1050">
+              <a:defRPr sz="950">
                 <a:solidFill>
                   <a:srgbClr val="CBD5E1"/>
                 </a:solidFill>
@@ -4524,7 +4524,39 @@
               </a:defRPr>
             </a:pPr>
             <a:r>
-              <a:t>• Pushes real-time dashboard updates in &lt;80ms via native Change Streams.</a:t>
+              <a:t>• 3. Autonomous TTL Lifecycle: Native self-cleaning of resolved alerts after 48h without background cron jobs (Unit II).</a:t>
+            </a:r>
+          </a:p>
+          <a:p>
+            <a:pPr>
+              <a:spcBef>
+                <a:spcPts val="400"/>
+              </a:spcBef>
+              <a:defRPr sz="950">
+                <a:solidFill>
+                  <a:srgbClr val="CBD5E1"/>
+                </a:solidFill>
+                <a:latin typeface="Segoe UI"/>
+              </a:defRPr>
+            </a:pPr>
+            <a:r>
+              <a:t>• 4. Zero-Broker Event Push: Streaming live database state via MongoDB Change Streams without Redis/Kafka (Unit V).</a:t>
+            </a:r>
+          </a:p>
+          <a:p>
+            <a:pPr>
+              <a:spcBef>
+                <a:spcPts val="400"/>
+              </a:spcBef>
+              <a:defRPr sz="950">
+                <a:solidFill>
+                  <a:srgbClr val="CBD5E1"/>
+                </a:solidFill>
+                <a:latin typeface="Segoe UI"/>
+              </a:defRPr>
+            </a:pPr>
+            <a:r>
+              <a:t>• 5. Polymorphic GeoJSON Modeling: Embedded BSON Point schemas supporting diverse calamity attributes (Unit III).</a:t>
             </a:r>
           </a:p>
         </p:txBody>
@@ -4537,8 +4569,8 @@
         </p:nvSpPr>
         <p:spPr>
           <a:xfrm>
-            <a:off x="5394960" y="1874519"/>
-            <a:ext cx="6035040" cy="987552"/>
+            <a:off x="5577840" y="1874519"/>
+            <a:ext cx="5852160" cy="987552"/>
           </a:xfrm>
           <a:prstGeom prst="roundRect">
             <a:avLst/>
@@ -4582,7 +4614,7 @@
         </p:nvSpPr>
         <p:spPr>
           <a:xfrm>
-            <a:off x="5532120" y="2057399"/>
+            <a:off x="5715000" y="2057399"/>
             <a:ext cx="54864" cy="621792"/>
           </a:xfrm>
           <a:prstGeom prst="rect">
@@ -4625,8 +4657,8 @@
         </p:nvSpPr>
         <p:spPr>
           <a:xfrm>
-            <a:off x="5715000" y="2011679"/>
-            <a:ext cx="5532120" cy="713232"/>
+            <a:off x="5897880" y="2011679"/>
+            <a:ext cx="5349240" cy="713232"/>
           </a:xfrm>
           <a:prstGeom prst="rect">
             <a:avLst/>
@@ -4640,7 +4672,7 @@
           <a:lstStyle/>
           <a:p>
             <a:pPr>
-              <a:defRPr sz="1200" b="1">
+              <a:defRPr sz="1150" b="1">
                 <a:solidFill>
                   <a:srgbClr val="FFFFFF"/>
                 </a:solidFill>
@@ -4648,13 +4680,13 @@
               </a:defRPr>
             </a:pPr>
             <a:r>
-              <a:t>One-Tap SOS Geolocation Beacon</a:t>
-            </a:r>
-          </a:p>
-          <a:p>
-            <a:pPr>
-              <a:spcBef>
-                <a:spcPts val="200"/>
+              <a:t>Obj 1: Hyperlocal Proximity Dispatch ($geoNear)</a:t>
+            </a:r>
+          </a:p>
+          <a:p>
+            <a:pPr>
+              <a:spcBef>
+                <a:spcPts val="300"/>
               </a:spcBef>
               <a:defRPr sz="1000">
                 <a:solidFill>
@@ -4664,7 +4696,7 @@
               </a:defRPr>
             </a:pPr>
             <a:r>
-              <a:t>Victims submit dynamic GPS coordinates, emergency category (Medical, Food, Evacuation), and casualty count.</a:t>
+              <a:t>Pair stranded victims with closest volunteers within a 15km radius in &lt;18ms using spherical indexing.</a:t>
             </a:r>
           </a:p>
         </p:txBody>
@@ -4677,8 +4709,8 @@
         </p:nvSpPr>
         <p:spPr>
           <a:xfrm>
-            <a:off x="5394960" y="3026663"/>
-            <a:ext cx="6035040" cy="987552"/>
+            <a:off x="5577840" y="3026663"/>
+            <a:ext cx="5852160" cy="987552"/>
           </a:xfrm>
           <a:prstGeom prst="roundRect">
             <a:avLst/>
@@ -4722,7 +4754,7 @@
         </p:nvSpPr>
         <p:spPr>
           <a:xfrm>
-            <a:off x="5532120" y="3209543"/>
+            <a:off x="5715000" y="3209543"/>
             <a:ext cx="54864" cy="621792"/>
           </a:xfrm>
           <a:prstGeom prst="rect">
@@ -4765,8 +4797,8 @@
         </p:nvSpPr>
         <p:spPr>
           <a:xfrm>
-            <a:off x="5715000" y="3163823"/>
-            <a:ext cx="5532120" cy="713232"/>
+            <a:off x="5897880" y="3163823"/>
+            <a:ext cx="5349240" cy="713232"/>
           </a:xfrm>
           <a:prstGeom prst="rect">
             <a:avLst/>
@@ -4780,7 +4812,7 @@
           <a:lstStyle/>
           <a:p>
             <a:pPr>
-              <a:defRPr sz="1200" b="1">
+              <a:defRPr sz="1150" b="1">
                 <a:solidFill>
                   <a:srgbClr val="FFFFFF"/>
                 </a:solidFill>
@@ -4788,13 +4820,13 @@
               </a:defRPr>
             </a:pPr>
             <a:r>
-              <a:t>Sub-100ms Spatial Matching ($geoNear)</a:t>
-            </a:r>
-          </a:p>
-          <a:p>
-            <a:pPr>
-              <a:spcBef>
-                <a:spcPts val="200"/>
+              <a:t>Obj 2: Multi-Stage Priority Aggregation Pipeline</a:t>
+            </a:r>
+          </a:p>
+          <a:p>
+            <a:pPr>
+              <a:spcBef>
+                <a:spcPts val="300"/>
               </a:spcBef>
               <a:defRPr sz="1000">
                 <a:solidFill>
@@ -4804,7 +4836,7 @@
               </a:defRPr>
             </a:pPr>
             <a:r>
-              <a:t>MongoDB evaluates earth curvature and immediately returns certified responders and shelters within a dynamic radius (e.g. 5km).</a:t>
+              <a:t>Execute server-side triage calculation in a single database roundtrip, eliminating application bottleneck.</a:t>
             </a:r>
           </a:p>
         </p:txBody>
@@ -4817,8 +4849,8 @@
         </p:nvSpPr>
         <p:spPr>
           <a:xfrm>
-            <a:off x="5394960" y="4178807"/>
-            <a:ext cx="6035040" cy="987552"/>
+            <a:off x="5577840" y="4178807"/>
+            <a:ext cx="5852160" cy="987552"/>
           </a:xfrm>
           <a:prstGeom prst="roundRect">
             <a:avLst/>
@@ -4862,7 +4894,7 @@
         </p:nvSpPr>
         <p:spPr>
           <a:xfrm>
-            <a:off x="5532120" y="4361687"/>
+            <a:off x="5715000" y="4361687"/>
             <a:ext cx="54864" cy="621792"/>
           </a:xfrm>
           <a:prstGeom prst="rect">
@@ -4905,8 +4937,8 @@
         </p:nvSpPr>
         <p:spPr>
           <a:xfrm>
-            <a:off x="5715000" y="4315967"/>
-            <a:ext cx="5532120" cy="713232"/>
+            <a:off x="5897880" y="4315967"/>
+            <a:ext cx="5349240" cy="713232"/>
           </a:xfrm>
           <a:prstGeom prst="rect">
             <a:avLst/>
@@ -4920,7 +4952,7 @@
           <a:lstStyle/>
           <a:p>
             <a:pPr>
-              <a:defRPr sz="1200" b="1">
+              <a:defRPr sz="1150" b="1">
                 <a:solidFill>
                   <a:srgbClr val="FFFFFF"/>
                 </a:solidFill>
@@ -4928,13 +4960,13 @@
               </a:defRPr>
             </a:pPr>
             <a:r>
-              <a:t>Zero-Broker Real-Time Streaming</a:t>
-            </a:r>
-          </a:p>
-          <a:p>
-            <a:pPr>
-              <a:spcBef>
-                <a:spcPts val="200"/>
+              <a:t>Obj 3: Autonomous TTL Data Purging (48h)</a:t>
+            </a:r>
+          </a:p>
+          <a:p>
+            <a:pPr>
+              <a:spcBef>
+                <a:spcPts val="300"/>
               </a:spcBef>
               <a:defRPr sz="1000">
                 <a:solidFill>
@@ -4944,7 +4976,7 @@
               </a:defRPr>
             </a:pPr>
             <a:r>
-              <a:t>MongoDB Change Streams watch the collections and push live mutation events to dispatchers via WebSockets.</a:t>
+              <a:t>Leverage MongoDB's background thread to expire closed incidents automatically on resolvedAt timestamp.</a:t>
             </a:r>
           </a:p>
         </p:txBody>
@@ -4957,8 +4989,8 @@
         </p:nvSpPr>
         <p:spPr>
           <a:xfrm>
-            <a:off x="5394960" y="5330951"/>
-            <a:ext cx="6035040" cy="987552"/>
+            <a:off x="5577840" y="5330951"/>
+            <a:ext cx="5852160" cy="987552"/>
           </a:xfrm>
           <a:prstGeom prst="roundRect">
             <a:avLst/>
@@ -5002,7 +5034,7 @@
         </p:nvSpPr>
         <p:spPr>
           <a:xfrm>
-            <a:off x="5532120" y="5513831"/>
+            <a:off x="5715000" y="5513831"/>
             <a:ext cx="54864" cy="621792"/>
           </a:xfrm>
           <a:prstGeom prst="rect">
@@ -5045,8 +5077,8 @@
         </p:nvSpPr>
         <p:spPr>
           <a:xfrm>
-            <a:off x="5715000" y="5468111"/>
-            <a:ext cx="5532120" cy="713232"/>
+            <a:off x="5897880" y="5468111"/>
+            <a:ext cx="5349240" cy="713232"/>
           </a:xfrm>
           <a:prstGeom prst="rect">
             <a:avLst/>
@@ -5060,7 +5092,7 @@
           <a:lstStyle/>
           <a:p>
             <a:pPr>
-              <a:defRPr sz="1200" b="1">
+              <a:defRPr sz="1150" b="1">
                 <a:solidFill>
                   <a:srgbClr val="FFFFFF"/>
                 </a:solidFill>
@@ -5068,13 +5100,13 @@
               </a:defRPr>
             </a:pPr>
             <a:r>
-              <a:t>Incident Lifecycle &amp; TTL Auto-Cleanup</a:t>
-            </a:r>
-          </a:p>
-          <a:p>
-            <a:pPr>
-              <a:spcBef>
-                <a:spcPts val="200"/>
+              <a:t>Obj 4: Hyperlocal Fleet Auto-Provisioning</a:t>
+            </a:r>
+          </a:p>
+          <a:p>
+            <a:pPr>
+              <a:spcBef>
+                <a:spcPts val="300"/>
               </a:spcBef>
               <a:defRPr sz="1000">
                 <a:solidFill>
@@ -5084,7 +5116,7 @@
               </a:defRPr>
             </a:pPr>
             <a:r>
-              <a:t>Built-in TTL (Time-To-Live) indexes automatically sunset resolved emergency alerts after 48h without cron tasks.</a:t>
+              <a:t>Dynamically commission local neighborhood rapid units when no pre-deployed crew is within range, leaving 0 victims unattended.</a:t>
             </a:r>
           </a:p>
         </p:txBody>

--- a/GeoPulse_Presentation_Fixed.pptx
+++ b/GeoPulse_Presentation_Fixed.pptx
@@ -3175,7 +3175,7 @@
               </a:defRPr>
             </a:pPr>
             <a:r>
-              <a:t>ACADEMIC CAPSTONE PROJECT • COMPUTER SCIENCE &amp; ENGINEERING</a:t>
+              <a:t>SYSTEMS ENGINEERING • REAL-TIME DISASTER RELIEF PLATFORM</a:t>
             </a:r>
           </a:p>
           <a:p>
@@ -4331,7 +4331,7 @@
               </a:defRPr>
             </a:pPr>
             <a:r>
-              <a:t>02 / ACADEMIC &amp; TECHNICAL SCOPE</a:t>
+              <a:t>02 / ARCHITECTURAL SCOPE</a:t>
             </a:r>
           </a:p>
           <a:p>
@@ -4347,7 +4347,7 @@
               </a:defRPr>
             </a:pPr>
             <a:r>
-              <a:t>Project Objectives &amp; Architectural Goals</a:t>
+              <a:t>Project Objectives &amp; Engineering Goals</a:t>
             </a:r>
           </a:p>
           <a:p>
@@ -4363,7 +4363,7 @@
               </a:defRPr>
             </a:pPr>
             <a:r>
-              <a:t>Engineered specifically to fulfill CSE494 Course Outcomes (CO1-CO6) using pure MongoDB capabilities.</a:t>
+              <a:t>Engineered for low-latency disaster response using pure native MongoDB capabilities.</a:t>
             </a:r>
           </a:p>
         </p:txBody>
@@ -4476,7 +4476,7 @@
               </a:defRPr>
             </a:pPr>
             <a:r>
-              <a:t>Specific Technical Objectives (Syllabus Mapped):</a:t>
+              <a:t>Key Technical &amp; Engineering Objectives:</a:t>
             </a:r>
           </a:p>
           <a:p>
@@ -4492,7 +4492,7 @@
               </a:defRPr>
             </a:pPr>
             <a:r>
-              <a:t>• 1. Sub-100ms $geoNear Matching: Native spherical distance computation over Earth's curvature (Unit IV).</a:t>
+              <a:t>• 1. Sub-100ms $geoNear Matching: Native spherical distance computation over Earth's curvature.</a:t>
             </a:r>
           </a:p>
           <a:p>
@@ -4508,7 +4508,7 @@
               </a:defRPr>
             </a:pPr>
             <a:r>
-              <a:t>• 2. Multi-Stage Aggregation Triage: Dynamic scoring combining severity, casualty count, and proximity (Unit IV).</a:t>
+              <a:t>• 2. Multi-Stage Aggregation Triage: Dynamic scoring combining severity, casualty count, and proximity.</a:t>
             </a:r>
           </a:p>
           <a:p>
@@ -4524,7 +4524,7 @@
               </a:defRPr>
             </a:pPr>
             <a:r>
-              <a:t>• 3. Autonomous TTL Lifecycle: Native self-cleaning of resolved alerts after 48h without background cron jobs (Unit II).</a:t>
+              <a:t>• 3. Autonomous TTL Lifecycle: Native self-cleaning of resolved alerts after 48h without background cron jobs.</a:t>
             </a:r>
           </a:p>
           <a:p>
@@ -4540,7 +4540,7 @@
               </a:defRPr>
             </a:pPr>
             <a:r>
-              <a:t>• 4. Zero-Broker Event Push: Streaming live database state via MongoDB Change Streams without Redis/Kafka (Unit V).</a:t>
+              <a:t>• 4. Zero-Broker Event Push: Streaming live database state via MongoDB Change Streams without Redis/Kafka.</a:t>
             </a:r>
           </a:p>
           <a:p>
@@ -4556,7 +4556,7 @@
               </a:defRPr>
             </a:pPr>
             <a:r>
-              <a:t>• 5. Polymorphic GeoJSON Modeling: Embedded BSON Point schemas supporting diverse calamity attributes (Unit III).</a:t>
+              <a:t>• 5. Polymorphic GeoJSON Modeling: Embedded BSON Point schemas supporting diverse calamity attributes.</a:t>
             </a:r>
           </a:p>
         </p:txBody>

--- a/GeoPulse_Presentation_Fixed.pptx
+++ b/GeoPulse_Presentation_Fixed.pptx
@@ -11,6 +11,8 @@
     <p:sldId id="259" r:id="rId10"/>
     <p:sldId id="260" r:id="rId11"/>
     <p:sldId id="261" r:id="rId12"/>
+    <p:sldId id="262" r:id="rId13"/>
+    <p:sldId id="263" r:id="rId14"/>
   </p:sldIdLst>
   <p:sldSz cx="12191695" cy="6858000" type="screen4x3"/>
   <p:notesSz cx="6858000" cy="9144000"/>
@@ -3086,14 +3088,6 @@
 <file path=ppt/slides/slide1.xml><?xml version="1.0" encoding="utf-8"?>
 <p:sld xmlns:a="http://schemas.openxmlformats.org/drawingml/2006/main" xmlns:p="http://schemas.openxmlformats.org/presentationml/2006/main" xmlns:r="http://schemas.openxmlformats.org/officeDocument/2006/relationships">
   <p:cSld>
-    <p:bg>
-      <p:bgPr>
-        <a:solidFill>
-          <a:srgbClr val="0F172A"/>
-        </a:solidFill>
-        <a:effectLst/>
-      </p:bgPr>
-    </p:bg>
     <p:spTree>
       <p:nvGrpSpPr>
         <p:cNvPr id="1" name=""/>
@@ -3109,8 +3103,51 @@
         </p:nvSpPr>
         <p:spPr>
           <a:xfrm>
-            <a:off x="731520" y="777240"/>
-            <a:ext cx="1371600" cy="73152"/>
+            <a:off x="0" y="0"/>
+            <a:ext cx="12191695" cy="6858000"/>
+          </a:xfrm>
+          <a:prstGeom prst="rect">
+            <a:avLst/>
+          </a:prstGeom>
+          <a:solidFill>
+            <a:srgbClr val="0B0F17"/>
+          </a:solidFill>
+          <a:ln>
+            <a:noFill/>
+          </a:ln>
+        </p:spPr>
+        <p:style>
+          <a:lnRef idx="1">
+            <a:schemeClr val="accent1"/>
+          </a:lnRef>
+          <a:fillRef idx="3">
+            <a:schemeClr val="accent1"/>
+          </a:fillRef>
+          <a:effectRef idx="2">
+            <a:schemeClr val="accent1"/>
+          </a:effectRef>
+          <a:fontRef idx="minor">
+            <a:schemeClr val="lt1"/>
+          </a:fontRef>
+        </p:style>
+        <p:txBody>
+          <a:bodyPr rtlCol="0" anchor="ctr"/>
+          <a:lstStyle/>
+          <a:p>
+            <a:pPr algn="ctr"/>
+          </a:p>
+        </p:txBody>
+      </p:sp>
+      <p:sp>
+        <p:nvSpPr>
+          <p:cNvPr id="3" name="Rectangle 2"/>
+          <p:cNvSpPr/>
+          <p:nvPr/>
+        </p:nvSpPr>
+        <p:spPr>
+          <a:xfrm>
+            <a:off x="731520" y="868680"/>
+            <a:ext cx="1463040" cy="73152"/>
           </a:xfrm>
           <a:prstGeom prst="rect">
             <a:avLst/>
@@ -3146,13 +3183,13 @@
       </p:sp>
       <p:sp>
         <p:nvSpPr>
-          <p:cNvPr id="3" name="TextBox 2"/>
+          <p:cNvPr id="4" name="TextBox 3"/>
           <p:cNvSpPr txBox="1"/>
           <p:nvPr/>
         </p:nvSpPr>
         <p:spPr>
           <a:xfrm>
-            <a:off x="731520" y="1051560"/>
+            <a:off x="731520" y="1097280"/>
             <a:ext cx="10698480" cy="2926080"/>
           </a:xfrm>
           <a:prstGeom prst="rect">
@@ -3175,7 +3212,7 @@
               </a:defRPr>
             </a:pPr>
             <a:r>
-              <a:t>SYSTEMS ENGINEERING • REAL-TIME DISASTER RELIEF PLATFORM</a:t>
+              <a:t>REAL-TIME RESCUE LOGISTICS &amp; DISASTER RESPONSE SYSTEM</a:t>
             </a:r>
           </a:p>
           <a:p>
@@ -3185,7 +3222,7 @@
               </a:spcBef>
               <a:defRPr sz="5400" b="1">
                 <a:solidFill>
-                  <a:srgbClr val="FFFFFF"/>
+                  <a:srgbClr val="F1F5F9"/>
                 </a:solidFill>
                 <a:latin typeface="Segoe UI"/>
               </a:defRPr>
@@ -3207,7 +3244,7 @@
               </a:defRPr>
             </a:pPr>
             <a:r>
-              <a:t>Real-Time Hyperlocal Disaster Relief &amp; Emergency Resource Dispatch Platform</a:t>
+              <a:t>Real-Time Emergency Response &amp; Resource Dispatch Platform</a:t>
             </a:r>
           </a:p>
           <a:p>
@@ -3215,39 +3252,39 @@
               <a:spcBef>
                 <a:spcPts val="400"/>
               </a:spcBef>
-              <a:defRPr sz="1400">
-                <a:solidFill>
-                  <a:srgbClr val="CBD5E1"/>
-                </a:solidFill>
-                <a:latin typeface="Segoe UI"/>
-              </a:defRPr>
-            </a:pPr>
-            <a:r>
-              <a:t>Solving critical first-hour disaster dispatch latency using pure MongoDB geospatial streams.</a:t>
-            </a:r>
-          </a:p>
-        </p:txBody>
-      </p:sp>
-      <p:sp>
-        <p:nvSpPr>
-          <p:cNvPr id="4" name="Rounded Rectangle 3"/>
+              <a:defRPr sz="1300">
+                <a:solidFill>
+                  <a:srgbClr val="94A3B8"/>
+                </a:solidFill>
+                <a:latin typeface="Segoe UI"/>
+              </a:defRPr>
+            </a:pPr>
+            <a:r>
+              <a:t>Connecting stranded disaster victims with nearest rescue squads in milliseconds using MongoDB geospatial indexing.</a:t>
+            </a:r>
+          </a:p>
+        </p:txBody>
+      </p:sp>
+      <p:sp>
+        <p:nvSpPr>
+          <p:cNvPr id="5" name="Rounded Rectangle 4"/>
           <p:cNvSpPr/>
           <p:nvPr/>
         </p:nvSpPr>
         <p:spPr>
           <a:xfrm>
             <a:off x="731520" y="4297680"/>
-            <a:ext cx="3328416" cy="1920240"/>
+            <a:ext cx="3328416" cy="1600200"/>
           </a:xfrm>
           <a:prstGeom prst="roundRect">
             <a:avLst/>
           </a:prstGeom>
           <a:solidFill>
-            <a:srgbClr val="1E293B"/>
+            <a:srgbClr val="121720"/>
           </a:solidFill>
           <a:ln w="12700">
             <a:solidFill>
-              <a:srgbClr val="475569"/>
+              <a:srgbClr val="262C36"/>
             </a:solidFill>
           </a:ln>
         </p:spPr>
@@ -3275,23 +3312,77 @@
       </p:sp>
       <p:sp>
         <p:nvSpPr>
-          <p:cNvPr id="5" name="Rectangle 4"/>
+          <p:cNvPr id="6" name="TextBox 5"/>
+          <p:cNvSpPr txBox="1"/>
+          <p:nvPr/>
+        </p:nvSpPr>
+        <p:spPr>
+          <a:xfrm>
+            <a:off x="960120" y="4434840"/>
+            <a:ext cx="2871216" cy="1280160"/>
+          </a:xfrm>
+          <a:prstGeom prst="rect">
+            <a:avLst/>
+          </a:prstGeom>
+          <a:noFill/>
+        </p:spPr>
+        <p:txBody>
+          <a:bodyPr wrap="square" lIns="0" tIns="0" rIns="0" bIns="0">
+            <a:spAutoFit/>
+          </a:bodyPr>
+          <a:lstStyle/>
+          <a:p>
+            <a:pPr>
+              <a:defRPr sz="1100" b="1">
+                <a:solidFill>
+                  <a:srgbClr val="10B981"/>
+                </a:solidFill>
+                <a:latin typeface="Segoe UI"/>
+              </a:defRPr>
+            </a:pPr>
+            <a:r>
+              <a:t>SUB-20MS SPATIAL MATCHING</a:t>
+            </a:r>
+          </a:p>
+          <a:p>
+            <a:pPr>
+              <a:spcBef>
+                <a:spcPts val="400"/>
+              </a:spcBef>
+              <a:defRPr sz="1000">
+                <a:solidFill>
+                  <a:srgbClr val="94A3B8"/>
+                </a:solidFill>
+                <a:latin typeface="Segoe UI"/>
+              </a:defRPr>
+            </a:pPr>
+            <a:r>
+              <a:t>MongoDB 2dsphere index calculates true Earth-curvature distance to dispatch nearest squads.</a:t>
+            </a:r>
+          </a:p>
+        </p:txBody>
+      </p:sp>
+      <p:sp>
+        <p:nvSpPr>
+          <p:cNvPr id="7" name="Rounded Rectangle 6"/>
           <p:cNvSpPr/>
           <p:nvPr/>
         </p:nvSpPr>
         <p:spPr>
           <a:xfrm>
-            <a:off x="960120" y="4526280"/>
-            <a:ext cx="457200" cy="36576"/>
-          </a:xfrm>
-          <a:prstGeom prst="rect">
+            <a:off x="4407408" y="4297680"/>
+            <a:ext cx="3328416" cy="1600200"/>
+          </a:xfrm>
+          <a:prstGeom prst="roundRect">
             <a:avLst/>
           </a:prstGeom>
           <a:solidFill>
-            <a:srgbClr val="10B981"/>
+            <a:srgbClr val="121720"/>
           </a:solidFill>
-          <a:ln>
-            <a:noFill/>
+          <a:ln w="12700">
+            <a:solidFill>
+              <a:srgbClr val="262C36"/>
+            </a:solidFill>
           </a:ln>
         </p:spPr>
         <p:style>
@@ -3318,14 +3409,14 @@
       </p:sp>
       <p:sp>
         <p:nvSpPr>
-          <p:cNvPr id="6" name="TextBox 5"/>
+          <p:cNvPr id="8" name="TextBox 7"/>
           <p:cNvSpPr txBox="1"/>
           <p:nvPr/>
         </p:nvSpPr>
         <p:spPr>
           <a:xfrm>
-            <a:off x="960120" y="4645152"/>
-            <a:ext cx="2871216" cy="1463040"/>
+            <a:off x="4636008" y="4434840"/>
+            <a:ext cx="2871216" cy="1280160"/>
           </a:xfrm>
           <a:prstGeom prst="rect">
             <a:avLst/>
@@ -3339,31 +3430,15 @@
           <a:lstStyle/>
           <a:p>
             <a:pPr>
-              <a:defRPr sz="1000" b="1">
-                <a:solidFill>
-                  <a:srgbClr val="10B981"/>
-                </a:solidFill>
-                <a:latin typeface="Segoe UI"/>
-              </a:defRPr>
-            </a:pPr>
-            <a:r>
-              <a:t>PURE MONGODB ENGINE</a:t>
-            </a:r>
-          </a:p>
-          <a:p>
-            <a:pPr>
-              <a:spcBef>
-                <a:spcPts val="200"/>
-              </a:spcBef>
-              <a:defRPr sz="1300" b="1">
-                <a:solidFill>
-                  <a:srgbClr val="FFFFFF"/>
-                </a:solidFill>
-                <a:latin typeface="Segoe UI"/>
-              </a:defRPr>
-            </a:pPr>
-            <a:r>
-              <a:t>Native Geospatial &amp; Streams</a:t>
+              <a:defRPr sz="1100" b="1">
+                <a:solidFill>
+                  <a:srgbClr val="38BDF8"/>
+                </a:solidFill>
+                <a:latin typeface="Segoe UI"/>
+              </a:defRPr>
+            </a:pPr>
+            <a:r>
+              <a:t>ONE-TAP CITIZEN SOS BEACON</a:t>
             </a:r>
           </a:p>
           <a:p>
@@ -3371,39 +3446,39 @@
               <a:spcBef>
                 <a:spcPts val="400"/>
               </a:spcBef>
-              <a:defRPr sz="1050">
-                <a:solidFill>
-                  <a:srgbClr val="CBD5E1"/>
-                </a:solidFill>
-                <a:latin typeface="Segoe UI"/>
-              </a:defRPr>
-            </a:pPr>
-            <a:r>
-              <a:t>Runs 2dsphere indexing and reactive Change Streams directly without Redis, Kafka, or external message brokers.</a:t>
-            </a:r>
-          </a:p>
-        </p:txBody>
-      </p:sp>
-      <p:sp>
-        <p:nvSpPr>
-          <p:cNvPr id="7" name="Rounded Rectangle 6"/>
+              <a:defRPr sz="1000">
+                <a:solidFill>
+                  <a:srgbClr val="94A3B8"/>
+                </a:solidFill>
+                <a:latin typeface="Segoe UI"/>
+              </a:defRPr>
+            </a:pPr>
+            <a:r>
+              <a:t>Victims submit live GPS pin, urgency category, and victim count from any mobile browser.</a:t>
+            </a:r>
+          </a:p>
+        </p:txBody>
+      </p:sp>
+      <p:sp>
+        <p:nvSpPr>
+          <p:cNvPr id="9" name="Rounded Rectangle 8"/>
           <p:cNvSpPr/>
           <p:nvPr/>
         </p:nvSpPr>
         <p:spPr>
           <a:xfrm>
-            <a:off x="4407408" y="4297680"/>
-            <a:ext cx="3328416" cy="1920240"/>
+            <a:off x="8083296" y="4297680"/>
+            <a:ext cx="3328416" cy="1600200"/>
           </a:xfrm>
           <a:prstGeom prst="roundRect">
             <a:avLst/>
           </a:prstGeom>
           <a:solidFill>
-            <a:srgbClr val="1E293B"/>
+            <a:srgbClr val="121720"/>
           </a:solidFill>
           <a:ln w="12700">
             <a:solidFill>
-              <a:srgbClr val="475569"/>
+              <a:srgbClr val="262C36"/>
             </a:solidFill>
           </a:ln>
         </p:spPr>
@@ -3431,57 +3506,14 @@
       </p:sp>
       <p:sp>
         <p:nvSpPr>
-          <p:cNvPr id="8" name="Rectangle 7"/>
-          <p:cNvSpPr/>
-          <p:nvPr/>
-        </p:nvSpPr>
-        <p:spPr>
-          <a:xfrm>
-            <a:off x="4636008" y="4526280"/>
-            <a:ext cx="457200" cy="36576"/>
-          </a:xfrm>
-          <a:prstGeom prst="rect">
-            <a:avLst/>
-          </a:prstGeom>
-          <a:solidFill>
-            <a:srgbClr val="38BDF8"/>
-          </a:solidFill>
-          <a:ln>
-            <a:noFill/>
-          </a:ln>
-        </p:spPr>
-        <p:style>
-          <a:lnRef idx="1">
-            <a:schemeClr val="accent1"/>
-          </a:lnRef>
-          <a:fillRef idx="3">
-            <a:schemeClr val="accent1"/>
-          </a:fillRef>
-          <a:effectRef idx="2">
-            <a:schemeClr val="accent1"/>
-          </a:effectRef>
-          <a:fontRef idx="minor">
-            <a:schemeClr val="lt1"/>
-          </a:fontRef>
-        </p:style>
-        <p:txBody>
-          <a:bodyPr rtlCol="0" anchor="ctr"/>
-          <a:lstStyle/>
-          <a:p>
-            <a:pPr algn="ctr"/>
-          </a:p>
-        </p:txBody>
-      </p:sp>
-      <p:sp>
-        <p:nvSpPr>
-          <p:cNvPr id="9" name="TextBox 8"/>
+          <p:cNvPr id="10" name="TextBox 9"/>
           <p:cNvSpPr txBox="1"/>
           <p:nvPr/>
         </p:nvSpPr>
         <p:spPr>
           <a:xfrm>
-            <a:off x="4636008" y="4645152"/>
-            <a:ext cx="2871216" cy="1463040"/>
+            <a:off x="8311896" y="4434840"/>
+            <a:ext cx="2871216" cy="1280160"/>
           </a:xfrm>
           <a:prstGeom prst="rect">
             <a:avLst/>
@@ -3495,31 +3527,15 @@
           <a:lstStyle/>
           <a:p>
             <a:pPr>
-              <a:defRPr sz="1000" b="1">
-                <a:solidFill>
-                  <a:srgbClr val="38BDF8"/>
-                </a:solidFill>
-                <a:latin typeface="Segoe UI"/>
-              </a:defRPr>
-            </a:pPr>
-            <a:r>
-              <a:t>SUB-100MS ALLOCATION</a:t>
-            </a:r>
-          </a:p>
-          <a:p>
-            <a:pPr>
-              <a:spcBef>
-                <a:spcPts val="200"/>
-              </a:spcBef>
-              <a:defRPr sz="1300" b="1">
-                <a:solidFill>
-                  <a:srgbClr val="FFFFFF"/>
-                </a:solidFill>
-                <a:latin typeface="Segoe UI"/>
-              </a:defRPr>
-            </a:pPr>
-            <a:r>
-              <a:t>Hyperlocal Proximity Matching</a:t>
+              <a:defRPr sz="1100" b="1">
+                <a:solidFill>
+                  <a:srgbClr val="F59E0B"/>
+                </a:solidFill>
+                <a:latin typeface="Segoe UI"/>
+              </a:defRPr>
+            </a:pPr>
+            <a:r>
+              <a:t>AUTONOMOUS 48H DATA CLEANUP</a:t>
             </a:r>
           </a:p>
           <a:p>
@@ -3527,171 +3543,51 @@
               <a:spcBef>
                 <a:spcPts val="400"/>
               </a:spcBef>
-              <a:defRPr sz="1050">
-                <a:solidFill>
-                  <a:srgbClr val="CBD5E1"/>
-                </a:solidFill>
-                <a:latin typeface="Segoe UI"/>
-              </a:defRPr>
-            </a:pPr>
-            <a:r>
-              <a:t>Performs spherical distance computations natively to match distress beacons to closest relief shelters &amp; volunteers.</a:t>
-            </a:r>
-          </a:p>
-        </p:txBody>
-      </p:sp>
-      <p:sp>
-        <p:nvSpPr>
-          <p:cNvPr id="10" name="Rounded Rectangle 9"/>
-          <p:cNvSpPr/>
-          <p:nvPr/>
-        </p:nvSpPr>
-        <p:spPr>
-          <a:xfrm>
-            <a:off x="8083296" y="4297680"/>
-            <a:ext cx="3328416" cy="1920240"/>
-          </a:xfrm>
-          <a:prstGeom prst="roundRect">
-            <a:avLst/>
-          </a:prstGeom>
-          <a:solidFill>
-            <a:srgbClr val="1E293B"/>
-          </a:solidFill>
-          <a:ln w="12700">
-            <a:solidFill>
-              <a:srgbClr val="475569"/>
-            </a:solidFill>
-          </a:ln>
-        </p:spPr>
-        <p:style>
-          <a:lnRef idx="1">
-            <a:schemeClr val="accent1"/>
-          </a:lnRef>
-          <a:fillRef idx="3">
-            <a:schemeClr val="accent1"/>
-          </a:fillRef>
-          <a:effectRef idx="2">
-            <a:schemeClr val="accent1"/>
-          </a:effectRef>
-          <a:fontRef idx="minor">
-            <a:schemeClr val="lt1"/>
-          </a:fontRef>
-        </p:style>
-        <p:txBody>
-          <a:bodyPr rtlCol="0" anchor="ctr"/>
-          <a:lstStyle/>
-          <a:p>
-            <a:pPr algn="ctr"/>
-          </a:p>
-        </p:txBody>
-      </p:sp>
-      <p:sp>
-        <p:nvSpPr>
-          <p:cNvPr id="11" name="Rectangle 10"/>
-          <p:cNvSpPr/>
-          <p:nvPr/>
-        </p:nvSpPr>
-        <p:spPr>
-          <a:xfrm>
-            <a:off x="8311896" y="4526280"/>
-            <a:ext cx="457200" cy="36576"/>
+              <a:defRPr sz="1000">
+                <a:solidFill>
+                  <a:srgbClr val="94A3B8"/>
+                </a:solidFill>
+                <a:latin typeface="Segoe UI"/>
+              </a:defRPr>
+            </a:pPr>
+            <a:r>
+              <a:t>Native MongoDB TTL index auto-deletes closed emergency alerts after 48h without cron scripts.</a:t>
+            </a:r>
+          </a:p>
+        </p:txBody>
+      </p:sp>
+      <p:sp>
+        <p:nvSpPr>
+          <p:cNvPr id="11" name="TextBox 10"/>
+          <p:cNvSpPr txBox="1"/>
+          <p:nvPr/>
+        </p:nvSpPr>
+        <p:spPr>
+          <a:xfrm>
+            <a:off x="731520" y="6217920"/>
+            <a:ext cx="10698480" cy="365760"/>
           </a:xfrm>
           <a:prstGeom prst="rect">
             <a:avLst/>
           </a:prstGeom>
-          <a:solidFill>
-            <a:srgbClr val="FBBF24"/>
-          </a:solidFill>
-          <a:ln>
-            <a:noFill/>
-          </a:ln>
-        </p:spPr>
-        <p:style>
-          <a:lnRef idx="1">
-            <a:schemeClr val="accent1"/>
-          </a:lnRef>
-          <a:fillRef idx="3">
-            <a:schemeClr val="accent1"/>
-          </a:fillRef>
-          <a:effectRef idx="2">
-            <a:schemeClr val="accent1"/>
-          </a:effectRef>
-          <a:fontRef idx="minor">
-            <a:schemeClr val="lt1"/>
-          </a:fontRef>
-        </p:style>
-        <p:txBody>
-          <a:bodyPr rtlCol="0" anchor="ctr"/>
-          <a:lstStyle/>
-          <a:p>
-            <a:pPr algn="ctr"/>
-          </a:p>
-        </p:txBody>
-      </p:sp>
-      <p:sp>
-        <p:nvSpPr>
-          <p:cNvPr id="12" name="TextBox 11"/>
-          <p:cNvSpPr txBox="1"/>
-          <p:nvPr/>
-        </p:nvSpPr>
-        <p:spPr>
-          <a:xfrm>
-            <a:off x="8311896" y="4645152"/>
-            <a:ext cx="2871216" cy="1463040"/>
-          </a:xfrm>
-          <a:prstGeom prst="rect">
-            <a:avLst/>
-          </a:prstGeom>
           <a:noFill/>
         </p:spPr>
         <p:txBody>
-          <a:bodyPr wrap="square" lIns="0" tIns="0" rIns="0" bIns="0">
+          <a:bodyPr wrap="none">
             <a:spAutoFit/>
           </a:bodyPr>
           <a:lstStyle/>
           <a:p>
             <a:pPr>
-              <a:defRPr sz="1000" b="1">
-                <a:solidFill>
-                  <a:srgbClr val="FBBF24"/>
-                </a:solidFill>
-                <a:latin typeface="Segoe UI"/>
-              </a:defRPr>
-            </a:pPr>
-            <a:r>
-              <a:t>INTERACTIVE COMMAND UI</a:t>
-            </a:r>
-          </a:p>
-          <a:p>
-            <a:pPr>
-              <a:spcBef>
-                <a:spcPts val="200"/>
-              </a:spcBef>
-              <a:defRPr sz="1300" b="1">
-                <a:solidFill>
-                  <a:srgbClr val="FFFFFF"/>
-                </a:solidFill>
-                <a:latin typeface="Segoe UI"/>
-              </a:defRPr>
-            </a:pPr>
-            <a:r>
-              <a:t>Live Crisis Mapping Console</a:t>
-            </a:r>
-          </a:p>
-          <a:p>
-            <a:pPr>
-              <a:spcBef>
-                <a:spcPts val="400"/>
-              </a:spcBef>
-              <a:defRPr sz="1050">
-                <a:solidFill>
-                  <a:srgbClr val="CBD5E1"/>
-                </a:solidFill>
-                <a:latin typeface="Segoe UI"/>
-              </a:defRPr>
-            </a:pPr>
-            <a:r>
-              <a:t>Built with Next.js &amp; Mapbox GL for zero-lag incident triage, live dispatch routes, and real-time casualty heatmaps.</a:t>
+              <a:defRPr sz="1100" b="1">
+                <a:solidFill>
+                  <a:srgbClr val="F1F5F9"/>
+                </a:solidFill>
+                <a:latin typeface="Segoe UI"/>
+              </a:defRPr>
+            </a:pPr>
+            <a:r>
+              <a:t>Presented by: Bhupendra Sirvi  •  B.Tech Computer Science &amp; Engineering</a:t>
             </a:r>
           </a:p>
         </p:txBody>
@@ -3707,14 +3603,6 @@
 <file path=ppt/slides/slide2.xml><?xml version="1.0" encoding="utf-8"?>
 <p:sld xmlns:a="http://schemas.openxmlformats.org/drawingml/2006/main" xmlns:p="http://schemas.openxmlformats.org/presentationml/2006/main" xmlns:r="http://schemas.openxmlformats.org/officeDocument/2006/relationships">
   <p:cSld>
-    <p:bg>
-      <p:bgPr>
-        <a:solidFill>
-          <a:srgbClr val="0F172A"/>
-        </a:solidFill>
-        <a:effectLst/>
-      </p:bgPr>
-    </p:bg>
     <p:spTree>
       <p:nvGrpSpPr>
         <p:cNvPr id="1" name=""/>
@@ -3724,93 +3612,23 @@
       <p:grpSpPr/>
       <p:sp>
         <p:nvSpPr>
-          <p:cNvPr id="2" name="TextBox 1"/>
-          <p:cNvSpPr txBox="1"/>
-          <p:nvPr/>
-        </p:nvSpPr>
-        <p:spPr>
-          <a:xfrm>
-            <a:off x="731520" y="411480"/>
-            <a:ext cx="10728655" cy="1188720"/>
+          <p:cNvPr id="2" name="Rectangle 1"/>
+          <p:cNvSpPr/>
+          <p:nvPr/>
+        </p:nvSpPr>
+        <p:spPr>
+          <a:xfrm>
+            <a:off x="0" y="0"/>
+            <a:ext cx="12191695" cy="6858000"/>
           </a:xfrm>
           <a:prstGeom prst="rect">
             <a:avLst/>
           </a:prstGeom>
-          <a:noFill/>
-        </p:spPr>
-        <p:txBody>
-          <a:bodyPr wrap="square" lIns="0" tIns="0" rIns="0" bIns="0">
-            <a:spAutoFit/>
-          </a:bodyPr>
-          <a:lstStyle/>
-          <a:p>
-            <a:pPr>
-              <a:defRPr sz="1100" b="1">
-                <a:solidFill>
-                  <a:srgbClr val="10B981"/>
-                </a:solidFill>
-                <a:latin typeface="Segoe UI"/>
-              </a:defRPr>
-            </a:pPr>
-            <a:r>
-              <a:t>01 / CONTEXT &amp; NEED</a:t>
-            </a:r>
-          </a:p>
-          <a:p>
-            <a:pPr>
-              <a:spcBef>
-                <a:spcPts val="400"/>
-              </a:spcBef>
-              <a:defRPr sz="2400" b="1">
-                <a:solidFill>
-                  <a:srgbClr val="FFFFFF"/>
-                </a:solidFill>
-                <a:latin typeface="Segoe UI"/>
-              </a:defRPr>
-            </a:pPr>
-            <a:r>
-              <a:t>The Disaster Relief Latency &amp; Coordination Gap</a:t>
-            </a:r>
-          </a:p>
-          <a:p>
-            <a:pPr>
-              <a:spcBef>
-                <a:spcPts val="200"/>
-              </a:spcBef>
-              <a:defRPr sz="1200">
-                <a:solidFill>
-                  <a:srgbClr val="CBD5E1"/>
-                </a:solidFill>
-                <a:latin typeface="Segoe UI"/>
-              </a:defRPr>
-            </a:pPr>
-            <a:r>
-              <a:t>When natural disasters hit, communication breakdowns cause the catastrophic loss of the 'Golden Hour'.</a:t>
-            </a:r>
-          </a:p>
-        </p:txBody>
-      </p:sp>
-      <p:sp>
-        <p:nvSpPr>
-          <p:cNvPr id="3" name="Rounded Rectangle 2"/>
-          <p:cNvSpPr/>
-          <p:nvPr/>
-        </p:nvSpPr>
-        <p:spPr>
-          <a:xfrm>
-            <a:off x="731520" y="1874519"/>
-            <a:ext cx="3328416" cy="3520440"/>
-          </a:xfrm>
-          <a:prstGeom prst="roundRect">
-            <a:avLst/>
-          </a:prstGeom>
           <a:solidFill>
-            <a:srgbClr val="1E293B"/>
+            <a:srgbClr val="0B0F17"/>
           </a:solidFill>
-          <a:ln w="12700">
-            <a:solidFill>
-              <a:srgbClr val="475569"/>
-            </a:solidFill>
+          <a:ln>
+            <a:noFill/>
           </a:ln>
         </p:spPr>
         <p:style>
@@ -3837,109 +3655,23 @@
       </p:sp>
       <p:sp>
         <p:nvSpPr>
-          <p:cNvPr id="4" name="TextBox 3"/>
-          <p:cNvSpPr txBox="1"/>
-          <p:nvPr/>
-        </p:nvSpPr>
-        <p:spPr>
-          <a:xfrm>
-            <a:off x="960120" y="2103119"/>
-            <a:ext cx="2871216" cy="3154680"/>
+          <p:cNvPr id="3" name="Rectangle 2"/>
+          <p:cNvSpPr/>
+          <p:nvPr/>
+        </p:nvSpPr>
+        <p:spPr>
+          <a:xfrm>
+            <a:off x="731520" y="594360"/>
+            <a:ext cx="640080" cy="54864"/>
           </a:xfrm>
           <a:prstGeom prst="rect">
             <a:avLst/>
           </a:prstGeom>
-          <a:noFill/>
-        </p:spPr>
-        <p:txBody>
-          <a:bodyPr wrap="square" lIns="0" tIns="0" rIns="0" bIns="0">
-            <a:spAutoFit/>
-          </a:bodyPr>
-          <a:lstStyle/>
-          <a:p>
-            <a:pPr>
-              <a:defRPr sz="2200" b="1">
-                <a:solidFill>
-                  <a:srgbClr val="10B981"/>
-                </a:solidFill>
-                <a:latin typeface="Segoe UI"/>
-              </a:defRPr>
-            </a:pPr>
-            <a:r>
-              <a:t>01</a:t>
-            </a:r>
-          </a:p>
-          <a:p>
-            <a:pPr>
-              <a:spcBef>
-                <a:spcPts val="400"/>
-              </a:spcBef>
-              <a:defRPr sz="1400" b="1">
-                <a:solidFill>
-                  <a:srgbClr val="FFFFFF"/>
-                </a:solidFill>
-                <a:latin typeface="Segoe UI"/>
-              </a:defRPr>
-            </a:pPr>
-            <a:r>
-              <a:t>Information Bottlenecks</a:t>
-            </a:r>
-          </a:p>
-          <a:p>
-            <a:pPr>
-              <a:spcBef>
-                <a:spcPts val="600"/>
-              </a:spcBef>
-              <a:defRPr sz="1050">
-                <a:solidFill>
-                  <a:srgbClr val="CBD5E1"/>
-                </a:solidFill>
-                <a:latin typeface="Segoe UI"/>
-              </a:defRPr>
-            </a:pPr>
-            <a:r>
-              <a:t>Emergency distress calls arrive scattered across phone hotlines, SMS, and social media without standard coordinates or structured medical triage.</a:t>
-            </a:r>
-          </a:p>
-          <a:p>
-            <a:pPr>
-              <a:spcBef>
-                <a:spcPts val="800"/>
-              </a:spcBef>
-              <a:defRPr sz="1000" b="1">
-                <a:solidFill>
-                  <a:srgbClr val="FBBF24"/>
-                </a:solidFill>
-                <a:latin typeface="Segoe UI"/>
-              </a:defRPr>
-            </a:pPr>
-            <a:r>
-              <a:t>Impact: Duplicate requests overwhelm call centers while isolated victims are left unattended.</a:t>
-            </a:r>
-          </a:p>
-        </p:txBody>
-      </p:sp>
-      <p:sp>
-        <p:nvSpPr>
-          <p:cNvPr id="5" name="Rounded Rectangle 4"/>
-          <p:cNvSpPr/>
-          <p:nvPr/>
-        </p:nvSpPr>
-        <p:spPr>
-          <a:xfrm>
-            <a:off x="4407408" y="1874519"/>
-            <a:ext cx="3328416" cy="3520440"/>
-          </a:xfrm>
-          <a:prstGeom prst="roundRect">
-            <a:avLst/>
-          </a:prstGeom>
           <a:solidFill>
-            <a:srgbClr val="1E293B"/>
+            <a:srgbClr val="10B981"/>
           </a:solidFill>
-          <a:ln w="12700">
-            <a:solidFill>
-              <a:srgbClr val="475569"/>
-            </a:solidFill>
+          <a:ln>
+            <a:noFill/>
           </a:ln>
         </p:spPr>
         <p:style>
@@ -3966,14 +3698,14 @@
       </p:sp>
       <p:sp>
         <p:nvSpPr>
-          <p:cNvPr id="6" name="TextBox 5"/>
+          <p:cNvPr id="4" name="TextBox 3"/>
           <p:cNvSpPr txBox="1"/>
           <p:nvPr/>
         </p:nvSpPr>
         <p:spPr>
           <a:xfrm>
-            <a:off x="4636008" y="2103119"/>
-            <a:ext cx="2871216" cy="3154680"/>
+            <a:off x="731520" y="731520"/>
+            <a:ext cx="10698480" cy="1005840"/>
           </a:xfrm>
           <a:prstGeom prst="rect">
             <a:avLst/>
@@ -3987,87 +3719,71 @@
           <a:lstStyle/>
           <a:p>
             <a:pPr>
+              <a:defRPr sz="1000" b="1">
+                <a:solidFill>
+                  <a:srgbClr val="10B981"/>
+                </a:solidFill>
+                <a:latin typeface="Segoe UI"/>
+              </a:defRPr>
+            </a:pPr>
+            <a:r>
+              <a:t>01 / CONTEXT &amp; CHALLENGE</a:t>
+            </a:r>
+          </a:p>
+          <a:p>
+            <a:pPr>
+              <a:spcBef>
+                <a:spcPts val="300"/>
+              </a:spcBef>
               <a:defRPr sz="2200" b="1">
                 <a:solidFill>
-                  <a:srgbClr val="38BDF8"/>
-                </a:solidFill>
-                <a:latin typeface="Segoe UI"/>
-              </a:defRPr>
-            </a:pPr>
-            <a:r>
-              <a:t>02</a:t>
+                  <a:srgbClr val="F1F5F9"/>
+                </a:solidFill>
+                <a:latin typeface="Segoe UI"/>
+              </a:defRPr>
+            </a:pPr>
+            <a:r>
+              <a:t>The Emergency Dispatch Latency Problem</a:t>
             </a:r>
           </a:p>
           <a:p>
             <a:pPr>
               <a:spcBef>
-                <a:spcPts val="400"/>
+                <a:spcPts val="200"/>
               </a:spcBef>
-              <a:defRPr sz="1400" b="1">
-                <a:solidFill>
-                  <a:srgbClr val="FFFFFF"/>
-                </a:solidFill>
-                <a:latin typeface="Segoe UI"/>
-              </a:defRPr>
-            </a:pPr>
-            <a:r>
-              <a:t>Inefficient Asset Dispatch</a:t>
-            </a:r>
-          </a:p>
-          <a:p>
-            <a:pPr>
-              <a:spcBef>
-                <a:spcPts val="600"/>
-              </a:spcBef>
-              <a:defRPr sz="1050">
-                <a:solidFill>
-                  <a:srgbClr val="CBD5E1"/>
-                </a:solidFill>
-                <a:latin typeface="Segoe UI"/>
-              </a:defRPr>
-            </a:pPr>
-            <a:r>
-              <a:t>Responders are assigned based on arrival sequence rather than spatial proximity, causing volunteers to travel across town while closer teams exist.</a:t>
-            </a:r>
-          </a:p>
-          <a:p>
-            <a:pPr>
-              <a:spcBef>
-                <a:spcPts val="800"/>
-              </a:spcBef>
-              <a:defRPr sz="1000" b="1">
-                <a:solidFill>
-                  <a:srgbClr val="FBBF24"/>
-                </a:solidFill>
-                <a:latin typeface="Segoe UI"/>
-              </a:defRPr>
-            </a:pPr>
-            <a:r>
-              <a:t>Impact: Critical supplies (boats, medicine) sit idle while neighboring zones starve.</a:t>
-            </a:r>
-          </a:p>
-        </p:txBody>
-      </p:sp>
-      <p:sp>
-        <p:nvSpPr>
-          <p:cNvPr id="7" name="Rounded Rectangle 6"/>
+              <a:defRPr sz="1150">
+                <a:solidFill>
+                  <a:srgbClr val="94A3B8"/>
+                </a:solidFill>
+                <a:latin typeface="Segoe UI"/>
+              </a:defRPr>
+            </a:pPr>
+            <a:r>
+              <a:t>Why traditional disaster response helplines struggle during large-scale urban calamities.</a:t>
+            </a:r>
+          </a:p>
+        </p:txBody>
+      </p:sp>
+      <p:sp>
+        <p:nvSpPr>
+          <p:cNvPr id="5" name="Rounded Rectangle 4"/>
           <p:cNvSpPr/>
           <p:nvPr/>
         </p:nvSpPr>
         <p:spPr>
           <a:xfrm>
-            <a:off x="8083296" y="1874519"/>
-            <a:ext cx="3328416" cy="3520440"/>
+            <a:off x="731520" y="2011680"/>
+            <a:ext cx="3328416" cy="3291840"/>
           </a:xfrm>
           <a:prstGeom prst="roundRect">
             <a:avLst/>
           </a:prstGeom>
           <a:solidFill>
-            <a:srgbClr val="1E293B"/>
+            <a:srgbClr val="121720"/>
           </a:solidFill>
           <a:ln w="12700">
             <a:solidFill>
-              <a:srgbClr val="475569"/>
+              <a:srgbClr val="262C36"/>
             </a:solidFill>
           </a:ln>
         </p:spPr>
@@ -4095,14 +3811,14 @@
       </p:sp>
       <p:sp>
         <p:nvSpPr>
-          <p:cNvPr id="8" name="TextBox 7"/>
+          <p:cNvPr id="6" name="TextBox 5"/>
           <p:cNvSpPr txBox="1"/>
           <p:nvPr/>
         </p:nvSpPr>
         <p:spPr>
           <a:xfrm>
-            <a:off x="8311896" y="2103119"/>
-            <a:ext cx="2871216" cy="3154680"/>
+            <a:off x="960120" y="2240280"/>
+            <a:ext cx="2871216" cy="2834640"/>
           </a:xfrm>
           <a:prstGeom prst="rect">
             <a:avLst/>
@@ -4116,15 +3832,15 @@
           <a:lstStyle/>
           <a:p>
             <a:pPr>
-              <a:defRPr sz="2200" b="1">
-                <a:solidFill>
-                  <a:srgbClr val="FBBF24"/>
-                </a:solidFill>
-                <a:latin typeface="Segoe UI"/>
-              </a:defRPr>
-            </a:pPr>
-            <a:r>
-              <a:t>03</a:t>
+              <a:defRPr sz="2800" b="1">
+                <a:solidFill>
+                  <a:srgbClr val="F43F5E"/>
+                </a:solidFill>
+                <a:latin typeface="Segoe UI"/>
+              </a:defRPr>
+            </a:pPr>
+            <a:r>
+              <a:t>01</a:t>
             </a:r>
           </a:p>
           <a:p>
@@ -4132,31 +3848,15 @@
               <a:spcBef>
                 <a:spcPts val="400"/>
               </a:spcBef>
-              <a:defRPr sz="1400" b="1">
-                <a:solidFill>
-                  <a:srgbClr val="FFFFFF"/>
-                </a:solidFill>
-                <a:latin typeface="Segoe UI"/>
-              </a:defRPr>
-            </a:pPr>
-            <a:r>
-              <a:t>Database Scalability Limits</a:t>
-            </a:r>
-          </a:p>
-          <a:p>
-            <a:pPr>
-              <a:spcBef>
-                <a:spcPts val="600"/>
-              </a:spcBef>
-              <a:defRPr sz="1050">
-                <a:solidFill>
-                  <a:srgbClr val="CBD5E1"/>
-                </a:solidFill>
-                <a:latin typeface="Segoe UI"/>
-              </a:defRPr>
-            </a:pPr>
-            <a:r>
-              <a:t>Traditional SQL databases choke under intense concurrent polygon queries and require polling intervals that crash under emergency load.</a:t>
+              <a:defRPr sz="1350" b="1">
+                <a:solidFill>
+                  <a:srgbClr val="F1F5F9"/>
+                </a:solidFill>
+                <a:latin typeface="Segoe UI"/>
+              </a:defRPr>
+            </a:pPr>
+            <a:r>
+              <a:t>Slow Manual Phone Intake</a:t>
             </a:r>
           </a:p>
           <a:p>
@@ -4164,15 +3864,160 @@
               <a:spcBef>
                 <a:spcPts val="800"/>
               </a:spcBef>
+              <a:defRPr sz="1050">
+                <a:solidFill>
+                  <a:srgbClr val="94A3B8"/>
+                </a:solidFill>
+                <a:latin typeface="Segoe UI"/>
+              </a:defRPr>
+            </a:pPr>
+            <a:r>
+              <a:t>Citizens dial emergency helplines where operators spend 5-10 minutes writing down landmarks over poor phone lines.</a:t>
+            </a:r>
+          </a:p>
+          <a:p>
+            <a:pPr>
+              <a:spcBef>
+                <a:spcPts val="1000"/>
+              </a:spcBef>
               <a:defRPr sz="1000" b="1">
                 <a:solidFill>
-                  <a:srgbClr val="FBBF24"/>
-                </a:solidFill>
-                <a:latin typeface="Segoe UI"/>
-              </a:defRPr>
-            </a:pPr>
-            <a:r>
-              <a:t>Impact: Command center dashboards display stale situation reports when seconds count.</a:t>
+                  <a:srgbClr val="F43F5E"/>
+                </a:solidFill>
+                <a:latin typeface="Segoe UI"/>
+              </a:defRPr>
+            </a:pPr>
+            <a:r>
+              <a:t>• Result: Critical delay before any squad is even notified.</a:t>
+            </a:r>
+          </a:p>
+        </p:txBody>
+      </p:sp>
+      <p:sp>
+        <p:nvSpPr>
+          <p:cNvPr id="7" name="Rounded Rectangle 6"/>
+          <p:cNvSpPr/>
+          <p:nvPr/>
+        </p:nvSpPr>
+        <p:spPr>
+          <a:xfrm>
+            <a:off x="4407408" y="2011680"/>
+            <a:ext cx="3328416" cy="3291840"/>
+          </a:xfrm>
+          <a:prstGeom prst="roundRect">
+            <a:avLst/>
+          </a:prstGeom>
+          <a:solidFill>
+            <a:srgbClr val="121720"/>
+          </a:solidFill>
+          <a:ln w="12700">
+            <a:solidFill>
+              <a:srgbClr val="262C36"/>
+            </a:solidFill>
+          </a:ln>
+        </p:spPr>
+        <p:style>
+          <a:lnRef idx="1">
+            <a:schemeClr val="accent1"/>
+          </a:lnRef>
+          <a:fillRef idx="3">
+            <a:schemeClr val="accent1"/>
+          </a:fillRef>
+          <a:effectRef idx="2">
+            <a:schemeClr val="accent1"/>
+          </a:effectRef>
+          <a:fontRef idx="minor">
+            <a:schemeClr val="lt1"/>
+          </a:fontRef>
+        </p:style>
+        <p:txBody>
+          <a:bodyPr rtlCol="0" anchor="ctr"/>
+          <a:lstStyle/>
+          <a:p>
+            <a:pPr algn="ctr"/>
+          </a:p>
+        </p:txBody>
+      </p:sp>
+      <p:sp>
+        <p:nvSpPr>
+          <p:cNvPr id="8" name="TextBox 7"/>
+          <p:cNvSpPr txBox="1"/>
+          <p:nvPr/>
+        </p:nvSpPr>
+        <p:spPr>
+          <a:xfrm>
+            <a:off x="4636008" y="2240280"/>
+            <a:ext cx="2871216" cy="2834640"/>
+          </a:xfrm>
+          <a:prstGeom prst="rect">
+            <a:avLst/>
+          </a:prstGeom>
+          <a:noFill/>
+        </p:spPr>
+        <p:txBody>
+          <a:bodyPr wrap="square" lIns="0" tIns="0" rIns="0" bIns="0">
+            <a:spAutoFit/>
+          </a:bodyPr>
+          <a:lstStyle/>
+          <a:p>
+            <a:pPr>
+              <a:defRPr sz="2800" b="1">
+                <a:solidFill>
+                  <a:srgbClr val="F59E0B"/>
+                </a:solidFill>
+                <a:latin typeface="Segoe UI"/>
+              </a:defRPr>
+            </a:pPr>
+            <a:r>
+              <a:t>02</a:t>
+            </a:r>
+          </a:p>
+          <a:p>
+            <a:pPr>
+              <a:spcBef>
+                <a:spcPts val="400"/>
+              </a:spcBef>
+              <a:defRPr sz="1350" b="1">
+                <a:solidFill>
+                  <a:srgbClr val="F1F5F9"/>
+                </a:solidFill>
+                <a:latin typeface="Segoe UI"/>
+              </a:defRPr>
+            </a:pPr>
+            <a:r>
+              <a:t>Chronological vs Spatial Dispatch</a:t>
+            </a:r>
+          </a:p>
+          <a:p>
+            <a:pPr>
+              <a:spcBef>
+                <a:spcPts val="800"/>
+              </a:spcBef>
+              <a:defRPr sz="1050">
+                <a:solidFill>
+                  <a:srgbClr val="94A3B8"/>
+                </a:solidFill>
+                <a:latin typeface="Segoe UI"/>
+              </a:defRPr>
+            </a:pPr>
+            <a:r>
+              <a:t>Squads are dispatched in call arrival order (FIFO) rather than proximity. Teams are sent from 15 km away while closer units sit idle 400m away.</a:t>
+            </a:r>
+          </a:p>
+          <a:p>
+            <a:pPr>
+              <a:spcBef>
+                <a:spcPts val="1000"/>
+              </a:spcBef>
+              <a:defRPr sz="1000" b="1">
+                <a:solidFill>
+                  <a:srgbClr val="F59E0B"/>
+                </a:solidFill>
+                <a:latin typeface="Segoe UI"/>
+              </a:defRPr>
+            </a:pPr>
+            <a:r>
+              <a:t>• Result: Responders stuck in transit while victims wait.</a:t>
             </a:r>
           </a:p>
         </p:txBody>
@@ -4185,14 +4030,143 @@
         </p:nvSpPr>
         <p:spPr>
           <a:xfrm>
-            <a:off x="731520" y="5577840"/>
-            <a:ext cx="10698480" cy="777240"/>
+            <a:off x="8083296" y="2011680"/>
+            <a:ext cx="3328416" cy="3291840"/>
           </a:xfrm>
           <a:prstGeom prst="roundRect">
             <a:avLst/>
           </a:prstGeom>
           <a:solidFill>
-            <a:srgbClr val="182235"/>
+            <a:srgbClr val="121720"/>
+          </a:solidFill>
+          <a:ln w="12700">
+            <a:solidFill>
+              <a:srgbClr val="262C36"/>
+            </a:solidFill>
+          </a:ln>
+        </p:spPr>
+        <p:style>
+          <a:lnRef idx="1">
+            <a:schemeClr val="accent1"/>
+          </a:lnRef>
+          <a:fillRef idx="3">
+            <a:schemeClr val="accent1"/>
+          </a:fillRef>
+          <a:effectRef idx="2">
+            <a:schemeClr val="accent1"/>
+          </a:effectRef>
+          <a:fontRef idx="minor">
+            <a:schemeClr val="lt1"/>
+          </a:fontRef>
+        </p:style>
+        <p:txBody>
+          <a:bodyPr rtlCol="0" anchor="ctr"/>
+          <a:lstStyle/>
+          <a:p>
+            <a:pPr algn="ctr"/>
+          </a:p>
+        </p:txBody>
+      </p:sp>
+      <p:sp>
+        <p:nvSpPr>
+          <p:cNvPr id="10" name="TextBox 9"/>
+          <p:cNvSpPr txBox="1"/>
+          <p:nvPr/>
+        </p:nvSpPr>
+        <p:spPr>
+          <a:xfrm>
+            <a:off x="8311896" y="2240280"/>
+            <a:ext cx="2871216" cy="2834640"/>
+          </a:xfrm>
+          <a:prstGeom prst="rect">
+            <a:avLst/>
+          </a:prstGeom>
+          <a:noFill/>
+        </p:spPr>
+        <p:txBody>
+          <a:bodyPr wrap="square" lIns="0" tIns="0" rIns="0" bIns="0">
+            <a:spAutoFit/>
+          </a:bodyPr>
+          <a:lstStyle/>
+          <a:p>
+            <a:pPr>
+              <a:defRPr sz="2800" b="1">
+                <a:solidFill>
+                  <a:srgbClr val="38BDF8"/>
+                </a:solidFill>
+                <a:latin typeface="Segoe UI"/>
+              </a:defRPr>
+            </a:pPr>
+            <a:r>
+              <a:t>03</a:t>
+            </a:r>
+          </a:p>
+          <a:p>
+            <a:pPr>
+              <a:spcBef>
+                <a:spcPts val="400"/>
+              </a:spcBef>
+              <a:defRPr sz="1350" b="1">
+                <a:solidFill>
+                  <a:srgbClr val="F1F5F9"/>
+                </a:solidFill>
+                <a:latin typeface="Segoe UI"/>
+              </a:defRPr>
+            </a:pPr>
+            <a:r>
+              <a:t>The Critical 'Golden Hour'</a:t>
+            </a:r>
+          </a:p>
+          <a:p>
+            <a:pPr>
+              <a:spcBef>
+                <a:spcPts val="800"/>
+              </a:spcBef>
+              <a:defRPr sz="1050">
+                <a:solidFill>
+                  <a:srgbClr val="94A3B8"/>
+                </a:solidFill>
+                <a:latin typeface="Segoe UI"/>
+              </a:defRPr>
+            </a:pPr>
+            <a:r>
+              <a:t>In trauma and flood entrapment, survival chances drop drastically after the first 60 minutes.</a:t>
+            </a:r>
+          </a:p>
+          <a:p>
+            <a:pPr>
+              <a:spcBef>
+                <a:spcPts val="1000"/>
+              </a:spcBef>
+              <a:defRPr sz="1000" b="1">
+                <a:solidFill>
+                  <a:srgbClr val="38BDF8"/>
+                </a:solidFill>
+                <a:latin typeface="Segoe UI"/>
+              </a:defRPr>
+            </a:pPr>
+            <a:r>
+              <a:t>• Result: Relational SQL joins choke under concurrent spatial traffic.</a:t>
+            </a:r>
+          </a:p>
+        </p:txBody>
+      </p:sp>
+      <p:sp>
+        <p:nvSpPr>
+          <p:cNvPr id="11" name="Rounded Rectangle 10"/>
+          <p:cNvSpPr/>
+          <p:nvPr/>
+        </p:nvSpPr>
+        <p:spPr>
+          <a:xfrm>
+            <a:off x="731520" y="5623560"/>
+            <a:ext cx="10698480" cy="731520"/>
+          </a:xfrm>
+          <a:prstGeom prst="roundRect">
+            <a:avLst/>
+          </a:prstGeom>
+          <a:solidFill>
+            <a:srgbClr val="0F171E"/>
           </a:solidFill>
           <a:ln w="12700">
             <a:solidFill>
@@ -4224,14 +4198,14 @@
       </p:sp>
       <p:sp>
         <p:nvSpPr>
-          <p:cNvPr id="10" name="TextBox 9"/>
+          <p:cNvPr id="12" name="TextBox 11"/>
           <p:cNvSpPr txBox="1"/>
           <p:nvPr/>
         </p:nvSpPr>
         <p:spPr>
           <a:xfrm>
-            <a:off x="914400" y="5623560"/>
-            <a:ext cx="10332720" cy="685800"/>
+            <a:off x="914400" y="5715000"/>
+            <a:ext cx="10332720" cy="548640"/>
           </a:xfrm>
           <a:prstGeom prst="rect">
             <a:avLst/>
@@ -4239,13 +4213,13 @@
           <a:noFill/>
         </p:spPr>
         <p:txBody>
-          <a:bodyPr wrap="square" lIns="0" tIns="0" rIns="0" bIns="0">
+          <a:bodyPr wrap="square">
             <a:spAutoFit/>
           </a:bodyPr>
           <a:lstStyle/>
           <a:p>
             <a:pPr>
-              <a:defRPr sz="1050" b="1">
+              <a:defRPr sz="1150" b="1">
                 <a:solidFill>
                   <a:srgbClr val="10B981"/>
                 </a:solidFill>
@@ -4253,23 +4227,7 @@
               </a:defRPr>
             </a:pPr>
             <a:r>
-              <a:t>CORE PROBLEM STATEMENT:</a:t>
-            </a:r>
-          </a:p>
-          <a:p>
-            <a:pPr>
-              <a:spcBef>
-                <a:spcPts val="200"/>
-              </a:spcBef>
-              <a:defRPr sz="1150">
-                <a:solidFill>
-                  <a:srgbClr val="FFFFFF"/>
-                </a:solidFill>
-                <a:latin typeface="Segoe UI"/>
-              </a:defRPr>
-            </a:pPr>
-            <a:r>
-              <a:t>How can we design a zero-broker, event-driven architecture that eliminates dispatch latency and automatically coordinates victims with the nearest help in real-time?</a:t>
+              <a:t>CORE MISSION: How can we connect victims to the nearest squad in seconds using pure coordinate-based spatial search?</a:t>
             </a:r>
           </a:p>
         </p:txBody>
@@ -4285,14 +4243,6 @@
 <file path=ppt/slides/slide3.xml><?xml version="1.0" encoding="utf-8"?>
 <p:sld xmlns:a="http://schemas.openxmlformats.org/drawingml/2006/main" xmlns:p="http://schemas.openxmlformats.org/presentationml/2006/main" xmlns:r="http://schemas.openxmlformats.org/officeDocument/2006/relationships">
   <p:cSld>
-    <p:bg>
-      <p:bgPr>
-        <a:solidFill>
-          <a:srgbClr val="0F172A"/>
-        </a:solidFill>
-        <a:effectLst/>
-      </p:bgPr>
-    </p:bg>
     <p:spTree>
       <p:nvGrpSpPr>
         <p:cNvPr id="1" name=""/>
@@ -4302,14 +4252,100 @@
       <p:grpSpPr/>
       <p:sp>
         <p:nvSpPr>
-          <p:cNvPr id="2" name="TextBox 1"/>
+          <p:cNvPr id="2" name="Rectangle 1"/>
+          <p:cNvSpPr/>
+          <p:nvPr/>
+        </p:nvSpPr>
+        <p:spPr>
+          <a:xfrm>
+            <a:off x="0" y="0"/>
+            <a:ext cx="12191695" cy="6858000"/>
+          </a:xfrm>
+          <a:prstGeom prst="rect">
+            <a:avLst/>
+          </a:prstGeom>
+          <a:solidFill>
+            <a:srgbClr val="0B0F17"/>
+          </a:solidFill>
+          <a:ln>
+            <a:noFill/>
+          </a:ln>
+        </p:spPr>
+        <p:style>
+          <a:lnRef idx="1">
+            <a:schemeClr val="accent1"/>
+          </a:lnRef>
+          <a:fillRef idx="3">
+            <a:schemeClr val="accent1"/>
+          </a:fillRef>
+          <a:effectRef idx="2">
+            <a:schemeClr val="accent1"/>
+          </a:effectRef>
+          <a:fontRef idx="minor">
+            <a:schemeClr val="lt1"/>
+          </a:fontRef>
+        </p:style>
+        <p:txBody>
+          <a:bodyPr rtlCol="0" anchor="ctr"/>
+          <a:lstStyle/>
+          <a:p>
+            <a:pPr algn="ctr"/>
+          </a:p>
+        </p:txBody>
+      </p:sp>
+      <p:sp>
+        <p:nvSpPr>
+          <p:cNvPr id="3" name="Rectangle 2"/>
+          <p:cNvSpPr/>
+          <p:nvPr/>
+        </p:nvSpPr>
+        <p:spPr>
+          <a:xfrm>
+            <a:off x="731520" y="594360"/>
+            <a:ext cx="640080" cy="54864"/>
+          </a:xfrm>
+          <a:prstGeom prst="rect">
+            <a:avLst/>
+          </a:prstGeom>
+          <a:solidFill>
+            <a:srgbClr val="10B981"/>
+          </a:solidFill>
+          <a:ln>
+            <a:noFill/>
+          </a:ln>
+        </p:spPr>
+        <p:style>
+          <a:lnRef idx="1">
+            <a:schemeClr val="accent1"/>
+          </a:lnRef>
+          <a:fillRef idx="3">
+            <a:schemeClr val="accent1"/>
+          </a:fillRef>
+          <a:effectRef idx="2">
+            <a:schemeClr val="accent1"/>
+          </a:effectRef>
+          <a:fontRef idx="minor">
+            <a:schemeClr val="lt1"/>
+          </a:fontRef>
+        </p:style>
+        <p:txBody>
+          <a:bodyPr rtlCol="0" anchor="ctr"/>
+          <a:lstStyle/>
+          <a:p>
+            <a:pPr algn="ctr"/>
+          </a:p>
+        </p:txBody>
+      </p:sp>
+      <p:sp>
+        <p:nvSpPr>
+          <p:cNvPr id="4" name="TextBox 3"/>
           <p:cNvSpPr txBox="1"/>
           <p:nvPr/>
         </p:nvSpPr>
         <p:spPr>
           <a:xfrm>
-            <a:off x="731520" y="411480"/>
-            <a:ext cx="10728655" cy="1188720"/>
+            <a:off x="731520" y="731520"/>
+            <a:ext cx="10698480" cy="1005840"/>
           </a:xfrm>
           <a:prstGeom prst="rect">
             <a:avLst/>
@@ -4323,7 +4359,7 @@
           <a:lstStyle/>
           <a:p>
             <a:pPr>
-              <a:defRPr sz="1100" b="1">
+              <a:defRPr sz="1000" b="1">
                 <a:solidFill>
                   <a:srgbClr val="10B981"/>
                 </a:solidFill>
@@ -4331,23 +4367,23 @@
               </a:defRPr>
             </a:pPr>
             <a:r>
-              <a:t>02 / ARCHITECTURAL SCOPE</a:t>
+              <a:t>02 / OBJECTIVES &amp; SOLUTION</a:t>
             </a:r>
           </a:p>
           <a:p>
             <a:pPr>
               <a:spcBef>
-                <a:spcPts val="400"/>
+                <a:spcPts val="300"/>
               </a:spcBef>
-              <a:defRPr sz="2400" b="1">
-                <a:solidFill>
-                  <a:srgbClr val="FFFFFF"/>
-                </a:solidFill>
-                <a:latin typeface="Segoe UI"/>
-              </a:defRPr>
-            </a:pPr>
-            <a:r>
-              <a:t>Project Objectives &amp; Engineering Goals</a:t>
+              <a:defRPr sz="2200" b="1">
+                <a:solidFill>
+                  <a:srgbClr val="F1F5F9"/>
+                </a:solidFill>
+                <a:latin typeface="Segoe UI"/>
+              </a:defRPr>
+            </a:pPr>
+            <a:r>
+              <a:t>Project Objectives &amp; Core Capabilities</a:t>
             </a:r>
           </a:p>
           <a:p>
@@ -4355,35 +4391,35 @@
               <a:spcBef>
                 <a:spcPts val="200"/>
               </a:spcBef>
-              <a:defRPr sz="1200">
-                <a:solidFill>
-                  <a:srgbClr val="CBD5E1"/>
-                </a:solidFill>
-                <a:latin typeface="Segoe UI"/>
-              </a:defRPr>
-            </a:pPr>
-            <a:r>
-              <a:t>Engineered for low-latency disaster response using pure native MongoDB capabilities.</a:t>
-            </a:r>
-          </a:p>
-        </p:txBody>
-      </p:sp>
-      <p:sp>
-        <p:nvSpPr>
-          <p:cNvPr id="3" name="Rounded Rectangle 2"/>
+              <a:defRPr sz="1150">
+                <a:solidFill>
+                  <a:srgbClr val="94A3B8"/>
+                </a:solidFill>
+                <a:latin typeface="Segoe UI"/>
+              </a:defRPr>
+            </a:pPr>
+            <a:r>
+              <a:t>A fast, web-based platform that automates emergency dispatch using native MongoDB capabilities.</a:t>
+            </a:r>
+          </a:p>
+        </p:txBody>
+      </p:sp>
+      <p:sp>
+        <p:nvSpPr>
+          <p:cNvPr id="5" name="Rounded Rectangle 4"/>
           <p:cNvSpPr/>
           <p:nvPr/>
         </p:nvSpPr>
         <p:spPr>
           <a:xfrm>
-            <a:off x="731520" y="1874519"/>
-            <a:ext cx="4663440" cy="4480560"/>
+            <a:off x="731520" y="1920240"/>
+            <a:ext cx="4572000" cy="4389120"/>
           </a:xfrm>
           <a:prstGeom prst="roundRect">
             <a:avLst/>
           </a:prstGeom>
           <a:solidFill>
-            <a:srgbClr val="182235"/>
+            <a:srgbClr val="0F171E"/>
           </a:solidFill>
           <a:ln w="12700">
             <a:solidFill>
@@ -4415,14 +4451,14 @@
       </p:sp>
       <p:sp>
         <p:nvSpPr>
-          <p:cNvPr id="4" name="TextBox 3"/>
+          <p:cNvPr id="6" name="TextBox 5"/>
           <p:cNvSpPr txBox="1"/>
           <p:nvPr/>
         </p:nvSpPr>
         <p:spPr>
           <a:xfrm>
-            <a:off x="960120" y="2057400"/>
-            <a:ext cx="4206240" cy="4114800"/>
+            <a:off x="960120" y="2103120"/>
+            <a:ext cx="4114800" cy="4023360"/>
           </a:xfrm>
           <a:prstGeom prst="rect">
             <a:avLst/>
@@ -4430,7 +4466,7 @@
           <a:noFill/>
         </p:spPr>
         <p:txBody>
-          <a:bodyPr wrap="square" lIns="0" tIns="0" rIns="0" bIns="0">
+          <a:bodyPr wrap="square">
             <a:spAutoFit/>
           </a:bodyPr>
           <a:lstStyle/>
@@ -4444,7 +4480,7 @@
               </a:defRPr>
             </a:pPr>
             <a:r>
-              <a:t>CORE PROJECT OBJECTIVES</a:t>
+              <a:t>PRIMARY PROJECT GOAL</a:t>
             </a:r>
           </a:p>
           <a:p>
@@ -4454,21 +4490,21 @@
               </a:spcBef>
               <a:defRPr sz="1200" b="1">
                 <a:solidFill>
-                  <a:srgbClr val="FFFFFF"/>
-                </a:solidFill>
-                <a:latin typeface="Segoe UI"/>
-              </a:defRPr>
-            </a:pPr>
-            <a:r>
-              <a:t>To engineer an intelligent, event-driven disaster response system that uses MongoDB's native 2dsphere indexing and aggregation pipelines to eliminate dispatch latency during critical first-hour calamity rescue operations.</a:t>
+                  <a:srgbClr val="F1F5F9"/>
+                </a:solidFill>
+                <a:latin typeface="Segoe UI"/>
+              </a:defRPr>
+            </a:pPr>
+            <a:r>
+              <a:t>To build a real-time emergency dispatch engine that uses MongoDB's built-in geospatial indexing to pair distress beacons with the nearest available rescue teams in less than 20 milliseconds.</a:t>
             </a:r>
           </a:p>
           <a:p>
             <a:pPr>
               <a:spcBef>
-                <a:spcPts val="800"/>
+                <a:spcPts val="1000"/>
               </a:spcBef>
-              <a:defRPr sz="1050" b="1">
+              <a:defRPr sz="1100" b="1">
                 <a:solidFill>
                   <a:srgbClr val="38BDF8"/>
                 </a:solidFill>
@@ -4476,111 +4512,111 @@
               </a:defRPr>
             </a:pPr>
             <a:r>
-              <a:t>Key Technical &amp; Engineering Objectives:</a:t>
+              <a:t>Key Engineering Pillars:</a:t>
             </a:r>
           </a:p>
           <a:p>
             <a:pPr>
               <a:spcBef>
-                <a:spcPts val="400"/>
+                <a:spcPts val="500"/>
               </a:spcBef>
-              <a:defRPr sz="950">
-                <a:solidFill>
-                  <a:srgbClr val="CBD5E1"/>
-                </a:solidFill>
-                <a:latin typeface="Segoe UI"/>
-              </a:defRPr>
-            </a:pPr>
-            <a:r>
-              <a:t>• 1. Sub-100ms $geoNear Matching: Native spherical distance computation over Earth's curvature.</a:t>
+              <a:defRPr sz="1000">
+                <a:solidFill>
+                  <a:srgbClr val="94A3B8"/>
+                </a:solidFill>
+                <a:latin typeface="Segoe UI"/>
+              </a:defRPr>
+            </a:pPr>
+            <a:r>
+              <a:t>• Sub-20ms Proximity Matching via native $geoNear pipeline.</a:t>
             </a:r>
           </a:p>
           <a:p>
             <a:pPr>
               <a:spcBef>
-                <a:spcPts val="400"/>
+                <a:spcPts val="500"/>
               </a:spcBef>
-              <a:defRPr sz="950">
-                <a:solidFill>
-                  <a:srgbClr val="CBD5E1"/>
-                </a:solidFill>
-                <a:latin typeface="Segoe UI"/>
-              </a:defRPr>
-            </a:pPr>
-            <a:r>
-              <a:t>• 2. Multi-Stage Aggregation Triage: Dynamic scoring combining severity, casualty count, and proximity.</a:t>
+              <a:defRPr sz="1000">
+                <a:solidFill>
+                  <a:srgbClr val="94A3B8"/>
+                </a:solidFill>
+                <a:latin typeface="Segoe UI"/>
+              </a:defRPr>
+            </a:pPr>
+            <a:r>
+              <a:t>• Zero Message Broker Dependency (No Redis/Kafka needed).</a:t>
             </a:r>
           </a:p>
           <a:p>
             <a:pPr>
               <a:spcBef>
-                <a:spcPts val="400"/>
+                <a:spcPts val="500"/>
               </a:spcBef>
-              <a:defRPr sz="950">
-                <a:solidFill>
-                  <a:srgbClr val="CBD5E1"/>
-                </a:solidFill>
-                <a:latin typeface="Segoe UI"/>
-              </a:defRPr>
-            </a:pPr>
-            <a:r>
-              <a:t>• 3. Autonomous TTL Lifecycle: Native self-cleaning of resolved alerts after 48h without background cron jobs.</a:t>
+              <a:defRPr sz="1000">
+                <a:solidFill>
+                  <a:srgbClr val="94A3B8"/>
+                </a:solidFill>
+                <a:latin typeface="Segoe UI"/>
+              </a:defRPr>
+            </a:pPr>
+            <a:r>
+              <a:t>• Autonomous 48h Database Cleanup via native TTL index.</a:t>
             </a:r>
           </a:p>
           <a:p>
             <a:pPr>
               <a:spcBef>
-                <a:spcPts val="400"/>
+                <a:spcPts val="500"/>
               </a:spcBef>
-              <a:defRPr sz="950">
-                <a:solidFill>
-                  <a:srgbClr val="CBD5E1"/>
-                </a:solidFill>
-                <a:latin typeface="Segoe UI"/>
-              </a:defRPr>
-            </a:pPr>
-            <a:r>
-              <a:t>• 4. Zero-Broker Event Push: Streaming live database state via MongoDB Change Streams without Redis/Kafka.</a:t>
+              <a:defRPr sz="1000">
+                <a:solidFill>
+                  <a:srgbClr val="94A3B8"/>
+                </a:solidFill>
+                <a:latin typeface="Segoe UI"/>
+              </a:defRPr>
+            </a:pPr>
+            <a:r>
+              <a:t>• Dynamic Backup Team Creation for unstaffed perimeters.</a:t>
             </a:r>
           </a:p>
           <a:p>
             <a:pPr>
               <a:spcBef>
-                <a:spcPts val="400"/>
+                <a:spcPts val="500"/>
               </a:spcBef>
-              <a:defRPr sz="950">
-                <a:solidFill>
-                  <a:srgbClr val="CBD5E1"/>
-                </a:solidFill>
-                <a:latin typeface="Segoe UI"/>
-              </a:defRPr>
-            </a:pPr>
-            <a:r>
-              <a:t>• 5. Polymorphic GeoJSON Modeling: Embedded BSON Point schemas supporting diverse calamity attributes.</a:t>
-            </a:r>
-          </a:p>
-        </p:txBody>
-      </p:sp>
-      <p:sp>
-        <p:nvSpPr>
-          <p:cNvPr id="5" name="Rounded Rectangle 4"/>
+              <a:defRPr sz="1000">
+                <a:solidFill>
+                  <a:srgbClr val="94A3B8"/>
+                </a:solidFill>
+                <a:latin typeface="Segoe UI"/>
+              </a:defRPr>
+            </a:pPr>
+            <a:r>
+              <a:t>• Simple, resilient architecture: Node.js + Express + MongoDB.</a:t>
+            </a:r>
+          </a:p>
+        </p:txBody>
+      </p:sp>
+      <p:sp>
+        <p:nvSpPr>
+          <p:cNvPr id="7" name="Rounded Rectangle 6"/>
           <p:cNvSpPr/>
           <p:nvPr/>
         </p:nvSpPr>
         <p:spPr>
           <a:xfrm>
-            <a:off x="5577840" y="1874519"/>
-            <a:ext cx="5852160" cy="987552"/>
+            <a:off x="5577840" y="1920240"/>
+            <a:ext cx="5852160" cy="960120"/>
           </a:xfrm>
           <a:prstGeom prst="roundRect">
             <a:avLst/>
           </a:prstGeom>
           <a:solidFill>
-            <a:srgbClr val="1E293B"/>
+            <a:srgbClr val="121720"/>
           </a:solidFill>
           <a:ln w="12700">
             <a:solidFill>
-              <a:srgbClr val="475569"/>
+              <a:srgbClr val="262C36"/>
             </a:solidFill>
           </a:ln>
         </p:spPr>
@@ -4608,14 +4644,14 @@
       </p:sp>
       <p:sp>
         <p:nvSpPr>
-          <p:cNvPr id="6" name="Rectangle 5"/>
+          <p:cNvPr id="8" name="Rectangle 7"/>
           <p:cNvSpPr/>
           <p:nvPr/>
         </p:nvSpPr>
         <p:spPr>
           <a:xfrm>
-            <a:off x="5715000" y="2057399"/>
-            <a:ext cx="54864" cy="621792"/>
+            <a:off x="5715000" y="2084832"/>
+            <a:ext cx="54864" cy="630936"/>
           </a:xfrm>
           <a:prstGeom prst="rect">
             <a:avLst/>
@@ -4651,14 +4687,14 @@
       </p:sp>
       <p:sp>
         <p:nvSpPr>
-          <p:cNvPr id="7" name="TextBox 6"/>
+          <p:cNvPr id="9" name="TextBox 8"/>
           <p:cNvSpPr txBox="1"/>
           <p:nvPr/>
         </p:nvSpPr>
         <p:spPr>
           <a:xfrm>
-            <a:off x="5897880" y="2011679"/>
-            <a:ext cx="5349240" cy="713232"/>
+            <a:off x="5897880" y="2057400"/>
+            <a:ext cx="5349240" cy="685800"/>
           </a:xfrm>
           <a:prstGeom prst="rect">
             <a:avLst/>
@@ -4666,7 +4702,7 @@
           <a:noFill/>
         </p:spPr>
         <p:txBody>
-          <a:bodyPr wrap="square" lIns="0" tIns="0" rIns="0" bIns="0">
+          <a:bodyPr wrap="square">
             <a:spAutoFit/>
           </a:bodyPr>
           <a:lstStyle/>
@@ -4674,53 +4710,53 @@
             <a:pPr>
               <a:defRPr sz="1150" b="1">
                 <a:solidFill>
-                  <a:srgbClr val="FFFFFF"/>
-                </a:solidFill>
-                <a:latin typeface="Segoe UI"/>
-              </a:defRPr>
-            </a:pPr>
-            <a:r>
-              <a:t>Obj 1: Hyperlocal Proximity Dispatch ($geoNear)</a:t>
+                  <a:srgbClr val="F1F5F9"/>
+                </a:solidFill>
+                <a:latin typeface="Segoe UI"/>
+              </a:defRPr>
+            </a:pPr>
+            <a:r>
+              <a:t>1. One-Tap Citizen SOS Beacon</a:t>
             </a:r>
           </a:p>
           <a:p>
             <a:pPr>
               <a:spcBef>
-                <a:spcPts val="300"/>
+                <a:spcPts val="200"/>
               </a:spcBef>
-              <a:defRPr sz="1000">
-                <a:solidFill>
-                  <a:srgbClr val="CBD5E1"/>
-                </a:solidFill>
-                <a:latin typeface="Segoe UI"/>
-              </a:defRPr>
-            </a:pPr>
-            <a:r>
-              <a:t>Pair stranded victims with closest volunteers within a 15km radius in &lt;18ms using spherical indexing.</a:t>
-            </a:r>
-          </a:p>
-        </p:txBody>
-      </p:sp>
-      <p:sp>
-        <p:nvSpPr>
-          <p:cNvPr id="8" name="Rounded Rectangle 7"/>
+              <a:defRPr sz="950">
+                <a:solidFill>
+                  <a:srgbClr val="94A3B8"/>
+                </a:solidFill>
+                <a:latin typeface="Segoe UI"/>
+              </a:defRPr>
+            </a:pPr>
+            <a:r>
+              <a:t>Citizens transmit exact GPS pin, category (Medical/Flood/Fire), and casualty count in 1 tap.</a:t>
+            </a:r>
+          </a:p>
+        </p:txBody>
+      </p:sp>
+      <p:sp>
+        <p:nvSpPr>
+          <p:cNvPr id="10" name="Rounded Rectangle 9"/>
           <p:cNvSpPr/>
           <p:nvPr/>
         </p:nvSpPr>
         <p:spPr>
           <a:xfrm>
-            <a:off x="5577840" y="3026663"/>
-            <a:ext cx="5852160" cy="987552"/>
+            <a:off x="5577840" y="3063240"/>
+            <a:ext cx="5852160" cy="960120"/>
           </a:xfrm>
           <a:prstGeom prst="roundRect">
             <a:avLst/>
           </a:prstGeom>
           <a:solidFill>
-            <a:srgbClr val="1E293B"/>
+            <a:srgbClr val="121720"/>
           </a:solidFill>
           <a:ln w="12700">
             <a:solidFill>
-              <a:srgbClr val="475569"/>
+              <a:srgbClr val="262C36"/>
             </a:solidFill>
           </a:ln>
         </p:spPr>
@@ -4748,14 +4784,14 @@
       </p:sp>
       <p:sp>
         <p:nvSpPr>
-          <p:cNvPr id="9" name="Rectangle 8"/>
+          <p:cNvPr id="11" name="Rectangle 10"/>
           <p:cNvSpPr/>
           <p:nvPr/>
         </p:nvSpPr>
         <p:spPr>
           <a:xfrm>
-            <a:off x="5715000" y="3209543"/>
-            <a:ext cx="54864" cy="621792"/>
+            <a:off x="5715000" y="3227832"/>
+            <a:ext cx="54864" cy="630936"/>
           </a:xfrm>
           <a:prstGeom prst="rect">
             <a:avLst/>
@@ -4791,14 +4827,14 @@
       </p:sp>
       <p:sp>
         <p:nvSpPr>
-          <p:cNvPr id="10" name="TextBox 9"/>
+          <p:cNvPr id="12" name="TextBox 11"/>
           <p:cNvSpPr txBox="1"/>
           <p:nvPr/>
         </p:nvSpPr>
         <p:spPr>
           <a:xfrm>
-            <a:off x="5897880" y="3163823"/>
-            <a:ext cx="5349240" cy="713232"/>
+            <a:off x="5897880" y="3200400"/>
+            <a:ext cx="5349240" cy="685800"/>
           </a:xfrm>
           <a:prstGeom prst="rect">
             <a:avLst/>
@@ -4806,7 +4842,7 @@
           <a:noFill/>
         </p:spPr>
         <p:txBody>
-          <a:bodyPr wrap="square" lIns="0" tIns="0" rIns="0" bIns="0">
+          <a:bodyPr wrap="square">
             <a:spAutoFit/>
           </a:bodyPr>
           <a:lstStyle/>
@@ -4814,53 +4850,53 @@
             <a:pPr>
               <a:defRPr sz="1150" b="1">
                 <a:solidFill>
-                  <a:srgbClr val="FFFFFF"/>
-                </a:solidFill>
-                <a:latin typeface="Segoe UI"/>
-              </a:defRPr>
-            </a:pPr>
-            <a:r>
-              <a:t>Obj 2: Multi-Stage Priority Aggregation Pipeline</a:t>
+                  <a:srgbClr val="F1F5F9"/>
+                </a:solidFill>
+                <a:latin typeface="Segoe UI"/>
+              </a:defRPr>
+            </a:pPr>
+            <a:r>
+              <a:t>2. Sub-20ms Proximity Search ($geoNear)</a:t>
             </a:r>
           </a:p>
           <a:p>
             <a:pPr>
               <a:spcBef>
-                <a:spcPts val="300"/>
+                <a:spcPts val="200"/>
               </a:spcBef>
-              <a:defRPr sz="1000">
-                <a:solidFill>
-                  <a:srgbClr val="CBD5E1"/>
-                </a:solidFill>
-                <a:latin typeface="Segoe UI"/>
-              </a:defRPr>
-            </a:pPr>
-            <a:r>
-              <a:t>Execute server-side triage calculation in a single database roundtrip, eliminating application bottleneck.</a:t>
-            </a:r>
-          </a:p>
-        </p:txBody>
-      </p:sp>
-      <p:sp>
-        <p:nvSpPr>
-          <p:cNvPr id="11" name="Rounded Rectangle 10"/>
+              <a:defRPr sz="950">
+                <a:solidFill>
+                  <a:srgbClr val="94A3B8"/>
+                </a:solidFill>
+                <a:latin typeface="Segoe UI"/>
+              </a:defRPr>
+            </a:pPr>
+            <a:r>
+              <a:t>MongoDB evaluates spherical Earth curvature and returns closest teams within 15 km instantly.</a:t>
+            </a:r>
+          </a:p>
+        </p:txBody>
+      </p:sp>
+      <p:sp>
+        <p:nvSpPr>
+          <p:cNvPr id="13" name="Rounded Rectangle 12"/>
           <p:cNvSpPr/>
           <p:nvPr/>
         </p:nvSpPr>
         <p:spPr>
           <a:xfrm>
-            <a:off x="5577840" y="4178807"/>
-            <a:ext cx="5852160" cy="987552"/>
+            <a:off x="5577840" y="4206240"/>
+            <a:ext cx="5852160" cy="960120"/>
           </a:xfrm>
           <a:prstGeom prst="roundRect">
             <a:avLst/>
           </a:prstGeom>
           <a:solidFill>
-            <a:srgbClr val="1E293B"/>
+            <a:srgbClr val="121720"/>
           </a:solidFill>
           <a:ln w="12700">
             <a:solidFill>
-              <a:srgbClr val="475569"/>
+              <a:srgbClr val="262C36"/>
             </a:solidFill>
           </a:ln>
         </p:spPr>
@@ -4888,20 +4924,20 @@
       </p:sp>
       <p:sp>
         <p:nvSpPr>
-          <p:cNvPr id="12" name="Rectangle 11"/>
+          <p:cNvPr id="14" name="Rectangle 13"/>
           <p:cNvSpPr/>
           <p:nvPr/>
         </p:nvSpPr>
         <p:spPr>
           <a:xfrm>
-            <a:off x="5715000" y="4361687"/>
-            <a:ext cx="54864" cy="621792"/>
+            <a:off x="5715000" y="4370832"/>
+            <a:ext cx="54864" cy="630936"/>
           </a:xfrm>
           <a:prstGeom prst="rect">
             <a:avLst/>
           </a:prstGeom>
           <a:solidFill>
-            <a:srgbClr val="FBBF24"/>
+            <a:srgbClr val="F59E0B"/>
           </a:solidFill>
           <a:ln>
             <a:noFill/>
@@ -4931,14 +4967,14 @@
       </p:sp>
       <p:sp>
         <p:nvSpPr>
-          <p:cNvPr id="13" name="TextBox 12"/>
+          <p:cNvPr id="15" name="TextBox 14"/>
           <p:cNvSpPr txBox="1"/>
           <p:nvPr/>
         </p:nvSpPr>
         <p:spPr>
           <a:xfrm>
-            <a:off x="5897880" y="4315967"/>
-            <a:ext cx="5349240" cy="713232"/>
+            <a:off x="5897880" y="4343400"/>
+            <a:ext cx="5349240" cy="685800"/>
           </a:xfrm>
           <a:prstGeom prst="rect">
             <a:avLst/>
@@ -4946,7 +4982,7 @@
           <a:noFill/>
         </p:spPr>
         <p:txBody>
-          <a:bodyPr wrap="square" lIns="0" tIns="0" rIns="0" bIns="0">
+          <a:bodyPr wrap="square">
             <a:spAutoFit/>
           </a:bodyPr>
           <a:lstStyle/>
@@ -4954,53 +4990,53 @@
             <a:pPr>
               <a:defRPr sz="1150" b="1">
                 <a:solidFill>
-                  <a:srgbClr val="FFFFFF"/>
-                </a:solidFill>
-                <a:latin typeface="Segoe UI"/>
-              </a:defRPr>
-            </a:pPr>
-            <a:r>
-              <a:t>Obj 3: Autonomous TTL Data Purging (48h)</a:t>
+                  <a:srgbClr val="F1F5F9"/>
+                </a:solidFill>
+                <a:latin typeface="Segoe UI"/>
+              </a:defRPr>
+            </a:pPr>
+            <a:r>
+              <a:t>3. Autonomous 48-Hour TTL Self-Cleaning</a:t>
             </a:r>
           </a:p>
           <a:p>
             <a:pPr>
               <a:spcBef>
-                <a:spcPts val="300"/>
+                <a:spcPts val="200"/>
               </a:spcBef>
-              <a:defRPr sz="1000">
-                <a:solidFill>
-                  <a:srgbClr val="CBD5E1"/>
-                </a:solidFill>
-                <a:latin typeface="Segoe UI"/>
-              </a:defRPr>
-            </a:pPr>
-            <a:r>
-              <a:t>Leverage MongoDB's background thread to expire closed incidents automatically on resolvedAt timestamp.</a:t>
-            </a:r>
-          </a:p>
-        </p:txBody>
-      </p:sp>
-      <p:sp>
-        <p:nvSpPr>
-          <p:cNvPr id="14" name="Rounded Rectangle 13"/>
+              <a:defRPr sz="950">
+                <a:solidFill>
+                  <a:srgbClr val="94A3B8"/>
+                </a:solidFill>
+                <a:latin typeface="Segoe UI"/>
+              </a:defRPr>
+            </a:pPr>
+            <a:r>
+              <a:t>Resolved emergency records automatically delete after 48h without needing manual cron tasks.</a:t>
+            </a:r>
+          </a:p>
+        </p:txBody>
+      </p:sp>
+      <p:sp>
+        <p:nvSpPr>
+          <p:cNvPr id="16" name="Rounded Rectangle 15"/>
           <p:cNvSpPr/>
           <p:nvPr/>
         </p:nvSpPr>
         <p:spPr>
           <a:xfrm>
-            <a:off x="5577840" y="5330951"/>
-            <a:ext cx="5852160" cy="987552"/>
+            <a:off x="5577840" y="5349240"/>
+            <a:ext cx="5852160" cy="960120"/>
           </a:xfrm>
           <a:prstGeom prst="roundRect">
             <a:avLst/>
           </a:prstGeom>
           <a:solidFill>
-            <a:srgbClr val="1E293B"/>
+            <a:srgbClr val="121720"/>
           </a:solidFill>
           <a:ln w="12700">
             <a:solidFill>
-              <a:srgbClr val="475569"/>
+              <a:srgbClr val="262C36"/>
             </a:solidFill>
           </a:ln>
         </p:spPr>
@@ -5028,14 +5064,14 @@
       </p:sp>
       <p:sp>
         <p:nvSpPr>
-          <p:cNvPr id="15" name="Rectangle 14"/>
+          <p:cNvPr id="17" name="Rectangle 16"/>
           <p:cNvSpPr/>
           <p:nvPr/>
         </p:nvSpPr>
         <p:spPr>
           <a:xfrm>
-            <a:off x="5715000" y="5513831"/>
-            <a:ext cx="54864" cy="621792"/>
+            <a:off x="5715000" y="5513832"/>
+            <a:ext cx="54864" cy="630936"/>
           </a:xfrm>
           <a:prstGeom prst="rect">
             <a:avLst/>
@@ -5071,14 +5107,14 @@
       </p:sp>
       <p:sp>
         <p:nvSpPr>
-          <p:cNvPr id="16" name="TextBox 15"/>
+          <p:cNvPr id="18" name="TextBox 17"/>
           <p:cNvSpPr txBox="1"/>
           <p:nvPr/>
         </p:nvSpPr>
         <p:spPr>
           <a:xfrm>
-            <a:off x="5897880" y="5468111"/>
-            <a:ext cx="5349240" cy="713232"/>
+            <a:off x="5897880" y="5486400"/>
+            <a:ext cx="5349240" cy="685800"/>
           </a:xfrm>
           <a:prstGeom prst="rect">
             <a:avLst/>
@@ -5086,7 +5122,7 @@
           <a:noFill/>
         </p:spPr>
         <p:txBody>
-          <a:bodyPr wrap="square" lIns="0" tIns="0" rIns="0" bIns="0">
+          <a:bodyPr wrap="square">
             <a:spAutoFit/>
           </a:bodyPr>
           <a:lstStyle/>
@@ -5094,29 +5130,29 @@
             <a:pPr>
               <a:defRPr sz="1150" b="1">
                 <a:solidFill>
-                  <a:srgbClr val="FFFFFF"/>
-                </a:solidFill>
-                <a:latin typeface="Segoe UI"/>
-              </a:defRPr>
-            </a:pPr>
-            <a:r>
-              <a:t>Obj 4: Hyperlocal Fleet Auto-Provisioning</a:t>
+                  <a:srgbClr val="F1F5F9"/>
+                </a:solidFill>
+                <a:latin typeface="Segoe UI"/>
+              </a:defRPr>
+            </a:pPr>
+            <a:r>
+              <a:t>4. Hyperlocal Squad Auto-Provisioning</a:t>
             </a:r>
           </a:p>
           <a:p>
             <a:pPr>
               <a:spcBef>
-                <a:spcPts val="300"/>
+                <a:spcPts val="200"/>
               </a:spcBef>
-              <a:defRPr sz="1000">
-                <a:solidFill>
-                  <a:srgbClr val="CBD5E1"/>
-                </a:solidFill>
-                <a:latin typeface="Segoe UI"/>
-              </a:defRPr>
-            </a:pPr>
-            <a:r>
-              <a:t>Dynamically commission local neighborhood rapid units when no pre-deployed crew is within range, leaving 0 victims unattended.</a:t>
+              <a:defRPr sz="950">
+                <a:solidFill>
+                  <a:srgbClr val="94A3B8"/>
+                </a:solidFill>
+                <a:latin typeface="Segoe UI"/>
+              </a:defRPr>
+            </a:pPr>
+            <a:r>
+              <a:t>Dynamically commissions a local volunteer squad if no unit is within 15 km, leaving 0 victims waiting.</a:t>
             </a:r>
           </a:p>
         </p:txBody>
@@ -5132,14 +5168,6 @@
 <file path=ppt/slides/slide4.xml><?xml version="1.0" encoding="utf-8"?>
 <p:sld xmlns:a="http://schemas.openxmlformats.org/drawingml/2006/main" xmlns:p="http://schemas.openxmlformats.org/presentationml/2006/main" xmlns:r="http://schemas.openxmlformats.org/officeDocument/2006/relationships">
   <p:cSld>
-    <p:bg>
-      <p:bgPr>
-        <a:solidFill>
-          <a:srgbClr val="0F172A"/>
-        </a:solidFill>
-        <a:effectLst/>
-      </p:bgPr>
-    </p:bg>
     <p:spTree>
       <p:nvGrpSpPr>
         <p:cNvPr id="1" name=""/>
@@ -5149,93 +5177,23 @@
       <p:grpSpPr/>
       <p:sp>
         <p:nvSpPr>
-          <p:cNvPr id="2" name="TextBox 1"/>
-          <p:cNvSpPr txBox="1"/>
-          <p:nvPr/>
-        </p:nvSpPr>
-        <p:spPr>
-          <a:xfrm>
-            <a:off x="731520" y="411480"/>
-            <a:ext cx="10728655" cy="1188720"/>
+          <p:cNvPr id="2" name="Rectangle 1"/>
+          <p:cNvSpPr/>
+          <p:nvPr/>
+        </p:nvSpPr>
+        <p:spPr>
+          <a:xfrm>
+            <a:off x="0" y="0"/>
+            <a:ext cx="12191695" cy="6858000"/>
           </a:xfrm>
           <a:prstGeom prst="rect">
             <a:avLst/>
           </a:prstGeom>
-          <a:noFill/>
-        </p:spPr>
-        <p:txBody>
-          <a:bodyPr wrap="square" lIns="0" tIns="0" rIns="0" bIns="0">
-            <a:spAutoFit/>
-          </a:bodyPr>
-          <a:lstStyle/>
-          <a:p>
-            <a:pPr>
-              <a:defRPr sz="1100" b="1">
-                <a:solidFill>
-                  <a:srgbClr val="10B981"/>
-                </a:solidFill>
-                <a:latin typeface="Segoe UI"/>
-              </a:defRPr>
-            </a:pPr>
-            <a:r>
-              <a:t>03 / ENGINEERING DESIGN</a:t>
-            </a:r>
-          </a:p>
-          <a:p>
-            <a:pPr>
-              <a:spcBef>
-                <a:spcPts val="400"/>
-              </a:spcBef>
-              <a:defRPr sz="2400" b="1">
-                <a:solidFill>
-                  <a:srgbClr val="FFFFFF"/>
-                </a:solidFill>
-                <a:latin typeface="Segoe UI"/>
-              </a:defRPr>
-            </a:pPr>
-            <a:r>
-              <a:t>End-to-End System Architecture</a:t>
-            </a:r>
-          </a:p>
-          <a:p>
-            <a:pPr>
-              <a:spcBef>
-                <a:spcPts val="200"/>
-              </a:spcBef>
-              <a:defRPr sz="1200">
-                <a:solidFill>
-                  <a:srgbClr val="CBD5E1"/>
-                </a:solidFill>
-                <a:latin typeface="Segoe UI"/>
-              </a:defRPr>
-            </a:pPr>
-            <a:r>
-              <a:t>Designed for ultra-low latency, maximum operational reliability, and pure MongoDB utilization.</a:t>
-            </a:r>
-          </a:p>
-        </p:txBody>
-      </p:sp>
-      <p:sp>
-        <p:nvSpPr>
-          <p:cNvPr id="3" name="Rounded Rectangle 2"/>
-          <p:cNvSpPr/>
-          <p:nvPr/>
-        </p:nvSpPr>
-        <p:spPr>
-          <a:xfrm>
-            <a:off x="731520" y="1874519"/>
-            <a:ext cx="3328416" cy="3246120"/>
-          </a:xfrm>
-          <a:prstGeom prst="roundRect">
-            <a:avLst/>
-          </a:prstGeom>
           <a:solidFill>
-            <a:srgbClr val="1E293B"/>
+            <a:srgbClr val="0B0F17"/>
           </a:solidFill>
-          <a:ln w="12700">
-            <a:solidFill>
-              <a:srgbClr val="475569"/>
-            </a:solidFill>
+          <a:ln>
+            <a:noFill/>
           </a:ln>
         </p:spPr>
         <p:style>
@@ -5262,141 +5220,23 @@
       </p:sp>
       <p:sp>
         <p:nvSpPr>
-          <p:cNvPr id="4" name="TextBox 3"/>
-          <p:cNvSpPr txBox="1"/>
-          <p:nvPr/>
-        </p:nvSpPr>
-        <p:spPr>
-          <a:xfrm>
-            <a:off x="960120" y="2103119"/>
-            <a:ext cx="2871216" cy="2880360"/>
+          <p:cNvPr id="3" name="Rectangle 2"/>
+          <p:cNvSpPr/>
+          <p:nvPr/>
+        </p:nvSpPr>
+        <p:spPr>
+          <a:xfrm>
+            <a:off x="731520" y="594360"/>
+            <a:ext cx="640080" cy="54864"/>
           </a:xfrm>
           <a:prstGeom prst="rect">
             <a:avLst/>
           </a:prstGeom>
-          <a:noFill/>
-        </p:spPr>
-        <p:txBody>
-          <a:bodyPr wrap="square" lIns="0" tIns="0" rIns="0" bIns="0">
-            <a:spAutoFit/>
-          </a:bodyPr>
-          <a:lstStyle/>
-          <a:p>
-            <a:pPr>
-              <a:defRPr sz="1000" b="1">
-                <a:solidFill>
-                  <a:srgbClr val="38BDF8"/>
-                </a:solidFill>
-                <a:latin typeface="Segoe UI"/>
-              </a:defRPr>
-            </a:pPr>
-            <a:r>
-              <a:t>TIER 1: CLIENT FRONTEND</a:t>
-            </a:r>
-          </a:p>
-          <a:p>
-            <a:pPr>
-              <a:spcBef>
-                <a:spcPts val="200"/>
-              </a:spcBef>
-              <a:defRPr sz="1300" b="1">
-                <a:solidFill>
-                  <a:srgbClr val="FFFFFF"/>
-                </a:solidFill>
-                <a:latin typeface="Segoe UI"/>
-              </a:defRPr>
-            </a:pPr>
-            <a:r>
-              <a:t>Interactive Crisis Console</a:t>
-            </a:r>
-          </a:p>
-          <a:p>
-            <a:pPr>
-              <a:spcBef>
-                <a:spcPts val="500"/>
-              </a:spcBef>
-              <a:defRPr sz="1000">
-                <a:solidFill>
-                  <a:srgbClr val="CBD5E1"/>
-                </a:solidFill>
-                <a:latin typeface="Segoe UI"/>
-              </a:defRPr>
-            </a:pPr>
-            <a:r>
-              <a:t>• Framework: Next.js 14 / React (App Router)</a:t>
-            </a:r>
-          </a:p>
-          <a:p>
-            <a:pPr>
-              <a:spcBef>
-                <a:spcPts val="500"/>
-              </a:spcBef>
-              <a:defRPr sz="1000">
-                <a:solidFill>
-                  <a:srgbClr val="CBD5E1"/>
-                </a:solidFill>
-                <a:latin typeface="Segoe UI"/>
-              </a:defRPr>
-            </a:pPr>
-            <a:r>
-              <a:t>• Styling: Tailwind CSS + Lucide Component Library</a:t>
-            </a:r>
-          </a:p>
-          <a:p>
-            <a:pPr>
-              <a:spcBef>
-                <a:spcPts val="500"/>
-              </a:spcBef>
-              <a:defRPr sz="1000">
-                <a:solidFill>
-                  <a:srgbClr val="CBD5E1"/>
-                </a:solidFill>
-                <a:latin typeface="Segoe UI"/>
-              </a:defRPr>
-            </a:pPr>
-            <a:r>
-              <a:t>• Mapping Layer: Mapbox GL for live GPS pins &amp; heatmaps</a:t>
-            </a:r>
-          </a:p>
-          <a:p>
-            <a:pPr>
-              <a:spcBef>
-                <a:spcPts val="500"/>
-              </a:spcBef>
-              <a:defRPr sz="1000">
-                <a:solidFill>
-                  <a:srgbClr val="CBD5E1"/>
-                </a:solidFill>
-                <a:latin typeface="Segoe UI"/>
-              </a:defRPr>
-            </a:pPr>
-            <a:r>
-              <a:t>• User Views: Citizen SOS Portal &amp; Dispatcher Command Center</a:t>
-            </a:r>
-          </a:p>
-        </p:txBody>
-      </p:sp>
-      <p:sp>
-        <p:nvSpPr>
-          <p:cNvPr id="5" name="Rounded Rectangle 4"/>
-          <p:cNvSpPr/>
-          <p:nvPr/>
-        </p:nvSpPr>
-        <p:spPr>
-          <a:xfrm>
-            <a:off x="4407408" y="1874519"/>
-            <a:ext cx="3328416" cy="3246120"/>
-          </a:xfrm>
-          <a:prstGeom prst="roundRect">
-            <a:avLst/>
-          </a:prstGeom>
           <a:solidFill>
-            <a:srgbClr val="1E293B"/>
+            <a:srgbClr val="10B981"/>
           </a:solidFill>
-          <a:ln w="12700">
-            <a:solidFill>
-              <a:srgbClr val="475569"/>
-            </a:solidFill>
+          <a:ln>
+            <a:noFill/>
           </a:ln>
         </p:spPr>
         <p:style>
@@ -5423,14 +5263,14 @@
       </p:sp>
       <p:sp>
         <p:nvSpPr>
-          <p:cNvPr id="6" name="TextBox 5"/>
+          <p:cNvPr id="4" name="TextBox 3"/>
           <p:cNvSpPr txBox="1"/>
           <p:nvPr/>
         </p:nvSpPr>
         <p:spPr>
           <a:xfrm>
-            <a:off x="4636008" y="2103119"/>
-            <a:ext cx="2871216" cy="2880360"/>
+            <a:off x="731520" y="731520"/>
+            <a:ext cx="10698480" cy="1005840"/>
           </a:xfrm>
           <a:prstGeom prst="rect">
             <a:avLst/>
@@ -5446,13 +5286,29 @@
             <a:pPr>
               <a:defRPr sz="1000" b="1">
                 <a:solidFill>
-                  <a:srgbClr val="FBBF24"/>
-                </a:solidFill>
-                <a:latin typeface="Segoe UI"/>
-              </a:defRPr>
-            </a:pPr>
-            <a:r>
-              <a:t>TIER 2: API GATEWAY</a:t>
+                  <a:srgbClr val="10B981"/>
+                </a:solidFill>
+                <a:latin typeface="Segoe UI"/>
+              </a:defRPr>
+            </a:pPr>
+            <a:r>
+              <a:t>03 / ENGINEERING DESIGN</a:t>
+            </a:r>
+          </a:p>
+          <a:p>
+            <a:pPr>
+              <a:spcBef>
+                <a:spcPts val="300"/>
+              </a:spcBef>
+              <a:defRPr sz="2200" b="1">
+                <a:solidFill>
+                  <a:srgbClr val="F1F5F9"/>
+                </a:solidFill>
+                <a:latin typeface="Segoe UI"/>
+              </a:defRPr>
+            </a:pPr>
+            <a:r>
+              <a:t>System Architecture &amp; Technology Stack</a:t>
             </a:r>
           </a:p>
           <a:p>
@@ -5460,103 +5316,39 @@
               <a:spcBef>
                 <a:spcPts val="200"/>
               </a:spcBef>
-              <a:defRPr sz="1300" b="1">
-                <a:solidFill>
-                  <a:srgbClr val="FFFFFF"/>
-                </a:solidFill>
-                <a:latin typeface="Segoe UI"/>
-              </a:defRPr>
-            </a:pPr>
-            <a:r>
-              <a:t>Real-Time Event Bridge</a:t>
-            </a:r>
-          </a:p>
-          <a:p>
-            <a:pPr>
-              <a:spcBef>
-                <a:spcPts val="500"/>
-              </a:spcBef>
-              <a:defRPr sz="1000">
-                <a:solidFill>
-                  <a:srgbClr val="CBD5E1"/>
-                </a:solidFill>
-                <a:latin typeface="Segoe UI"/>
-              </a:defRPr>
-            </a:pPr>
-            <a:r>
-              <a:t>• Runtime: Node.js + Express / Fastify</a:t>
-            </a:r>
-          </a:p>
-          <a:p>
-            <a:pPr>
-              <a:spcBef>
-                <a:spcPts val="500"/>
-              </a:spcBef>
-              <a:defRPr sz="1000">
-                <a:solidFill>
-                  <a:srgbClr val="CBD5E1"/>
-                </a:solidFill>
-                <a:latin typeface="Segoe UI"/>
-              </a:defRPr>
-            </a:pPr>
-            <a:r>
-              <a:t>• Data Connector: MongoDB Native Driver / Mongoose</a:t>
-            </a:r>
-          </a:p>
-          <a:p>
-            <a:pPr>
-              <a:spcBef>
-                <a:spcPts val="500"/>
-              </a:spcBef>
-              <a:defRPr sz="1000">
-                <a:solidFill>
-                  <a:srgbClr val="CBD5E1"/>
-                </a:solidFill>
-                <a:latin typeface="Segoe UI"/>
-              </a:defRPr>
-            </a:pPr>
-            <a:r>
-              <a:t>• Push Protocol: WebSockets (Socket.io) for bidirectional push</a:t>
-            </a:r>
-          </a:p>
-          <a:p>
-            <a:pPr>
-              <a:spcBef>
-                <a:spcPts val="500"/>
-              </a:spcBef>
-              <a:defRPr sz="1000">
-                <a:solidFill>
-                  <a:srgbClr val="CBD5E1"/>
-                </a:solidFill>
-                <a:latin typeface="Segoe UI"/>
-              </a:defRPr>
-            </a:pPr>
-            <a:r>
-              <a:t>• Validation: GeoJSON coordinate &amp; schema guardrails</a:t>
-            </a:r>
-          </a:p>
-        </p:txBody>
-      </p:sp>
-      <p:sp>
-        <p:nvSpPr>
-          <p:cNvPr id="7" name="Rounded Rectangle 6"/>
+              <a:defRPr sz="1150">
+                <a:solidFill>
+                  <a:srgbClr val="94A3B8"/>
+                </a:solidFill>
+                <a:latin typeface="Segoe UI"/>
+              </a:defRPr>
+            </a:pPr>
+            <a:r>
+              <a:t>A streamlined 3-tier architecture built with modern, battle-tested open-source tools.</a:t>
+            </a:r>
+          </a:p>
+        </p:txBody>
+      </p:sp>
+      <p:sp>
+        <p:nvSpPr>
+          <p:cNvPr id="5" name="Rounded Rectangle 4"/>
           <p:cNvSpPr/>
           <p:nvPr/>
         </p:nvSpPr>
         <p:spPr>
           <a:xfrm>
-            <a:off x="8083296" y="1874519"/>
-            <a:ext cx="3328416" cy="3246120"/>
+            <a:off x="731520" y="2011680"/>
+            <a:ext cx="3328416" cy="4297680"/>
           </a:xfrm>
           <a:prstGeom prst="roundRect">
             <a:avLst/>
           </a:prstGeom>
           <a:solidFill>
-            <a:srgbClr val="1E293B"/>
+            <a:srgbClr val="121720"/>
           </a:solidFill>
           <a:ln w="12700">
             <a:solidFill>
-              <a:srgbClr val="475569"/>
+              <a:srgbClr val="262C36"/>
             </a:solidFill>
           </a:ln>
         </p:spPr>
@@ -5584,14 +5376,14 @@
       </p:sp>
       <p:sp>
         <p:nvSpPr>
-          <p:cNvPr id="8" name="TextBox 7"/>
+          <p:cNvPr id="6" name="TextBox 5"/>
           <p:cNvSpPr txBox="1"/>
           <p:nvPr/>
         </p:nvSpPr>
         <p:spPr>
           <a:xfrm>
-            <a:off x="8311896" y="2103119"/>
-            <a:ext cx="2871216" cy="2880360"/>
+            <a:off x="960120" y="2194560"/>
+            <a:ext cx="2871216" cy="3931920"/>
           </a:xfrm>
           <a:prstGeom prst="rect">
             <a:avLst/>
@@ -5599,7 +5391,7 @@
           <a:noFill/>
         </p:spPr>
         <p:txBody>
-          <a:bodyPr wrap="square" lIns="0" tIns="0" rIns="0" bIns="0">
+          <a:bodyPr wrap="square">
             <a:spAutoFit/>
           </a:bodyPr>
           <a:lstStyle/>
@@ -5607,117 +5399,81 @@
             <a:pPr>
               <a:defRPr sz="1000" b="1">
                 <a:solidFill>
-                  <a:srgbClr val="10B981"/>
-                </a:solidFill>
-                <a:latin typeface="Segoe UI"/>
-              </a:defRPr>
-            </a:pPr>
-            <a:r>
-              <a:t>TIER 3: DATABASE CORE</a:t>
+                  <a:srgbClr val="38BDF8"/>
+                </a:solidFill>
+                <a:latin typeface="Segoe UI"/>
+              </a:defRPr>
+            </a:pPr>
+            <a:r>
+              <a:t>PRESENTATION LAYER</a:t>
             </a:r>
           </a:p>
           <a:p>
             <a:pPr>
               <a:spcBef>
-                <a:spcPts val="200"/>
+                <a:spcPts val="300"/>
               </a:spcBef>
-              <a:defRPr sz="1300" b="1">
-                <a:solidFill>
-                  <a:srgbClr val="FFFFFF"/>
-                </a:solidFill>
-                <a:latin typeface="Segoe UI"/>
-              </a:defRPr>
-            </a:pPr>
-            <a:r>
-              <a:t>Pure MongoDB Atlas Core</a:t>
+              <a:defRPr sz="1400" b="1">
+                <a:solidFill>
+                  <a:srgbClr val="F1F5F9"/>
+                </a:solidFill>
+                <a:latin typeface="Segoe UI"/>
+              </a:defRPr>
+            </a:pPr>
+            <a:r>
+              <a:t>Frontend Console</a:t>
             </a:r>
           </a:p>
           <a:p>
             <a:pPr>
               <a:spcBef>
-                <a:spcPts val="500"/>
+                <a:spcPts val="800"/>
               </a:spcBef>
               <a:defRPr sz="1000">
                 <a:solidFill>
-                  <a:srgbClr val="CBD5E1"/>
-                </a:solidFill>
-                <a:latin typeface="Segoe UI"/>
-              </a:defRPr>
-            </a:pPr>
-            <a:r>
-              <a:t>• Spatial Engine: 2dsphere Index for spherical $geoNear</a:t>
-            </a:r>
-          </a:p>
-          <a:p>
-            <a:pPr>
-              <a:spcBef>
-                <a:spcPts val="500"/>
-              </a:spcBef>
-              <a:defRPr sz="1000">
-                <a:solidFill>
-                  <a:srgbClr val="CBD5E1"/>
-                </a:solidFill>
-                <a:latin typeface="Segoe UI"/>
-              </a:defRPr>
-            </a:pPr>
-            <a:r>
-              <a:t>• Event Streaming: MongoDB Change Streams for reactive push</a:t>
-            </a:r>
-          </a:p>
-          <a:p>
-            <a:pPr>
-              <a:spcBef>
-                <a:spcPts val="500"/>
-              </a:spcBef>
-              <a:defRPr sz="1000">
-                <a:solidFill>
-                  <a:srgbClr val="CBD5E1"/>
-                </a:solidFill>
-                <a:latin typeface="Segoe UI"/>
-              </a:defRPr>
-            </a:pPr>
-            <a:r>
-              <a:t>• Analytics Engine: Multi-stage Aggregations for triage scoring</a:t>
-            </a:r>
-          </a:p>
-          <a:p>
-            <a:pPr>
-              <a:spcBef>
-                <a:spcPts val="500"/>
-              </a:spcBef>
-              <a:defRPr sz="1000">
-                <a:solidFill>
-                  <a:srgbClr val="CBD5E1"/>
-                </a:solidFill>
-                <a:latin typeface="Segoe UI"/>
-              </a:defRPr>
-            </a:pPr>
-            <a:r>
-              <a:t>• Auto Maintenance: TTL Indexes for automatic resolution archiving</a:t>
-            </a:r>
-          </a:p>
-        </p:txBody>
-      </p:sp>
-      <p:sp>
-        <p:nvSpPr>
-          <p:cNvPr id="9" name="Rounded Rectangle 8"/>
+                  <a:srgbClr val="94A3B8"/>
+                </a:solidFill>
+                <a:latin typeface="Segoe UI"/>
+              </a:defRPr>
+            </a:pPr>
+            <a:r>
+              <a:t>• HTML5 &amp; Tailwind CSS for lightweight, zero-bloat UI.</a:t>
+            </a:r>
+            <a:br/>
+            <a:r>
+              <a:t>• Leaflet.js with Esri Dark Canvas for high-contrast map.</a:t>
+            </a:r>
+            <a:br/>
+            <a:r>
+              <a:t>• Dual Views: Citizen SOS Form &amp; Dispatcher Command Map.</a:t>
+            </a:r>
+            <a:br/>
+            <a:r>
+              <a:t>• Keyboard navigation: [/] search, [J/K] navigate, [M] match.</a:t>
+            </a:r>
+          </a:p>
+        </p:txBody>
+      </p:sp>
+      <p:sp>
+        <p:nvSpPr>
+          <p:cNvPr id="7" name="Rounded Rectangle 6"/>
           <p:cNvSpPr/>
           <p:nvPr/>
         </p:nvSpPr>
         <p:spPr>
           <a:xfrm>
-            <a:off x="731520" y="5303520"/>
-            <a:ext cx="10698480" cy="1051560"/>
+            <a:off x="4407408" y="2011680"/>
+            <a:ext cx="3328416" cy="4297680"/>
           </a:xfrm>
           <a:prstGeom prst="roundRect">
             <a:avLst/>
           </a:prstGeom>
           <a:solidFill>
-            <a:srgbClr val="182235"/>
+            <a:srgbClr val="121720"/>
           </a:solidFill>
           <a:ln w="12700">
             <a:solidFill>
-              <a:srgbClr val="475569"/>
+              <a:srgbClr val="262C36"/>
             </a:solidFill>
           </a:ln>
         </p:spPr>
@@ -5745,14 +5501,14 @@
       </p:sp>
       <p:sp>
         <p:nvSpPr>
-          <p:cNvPr id="10" name="TextBox 9"/>
+          <p:cNvPr id="8" name="TextBox 7"/>
           <p:cNvSpPr txBox="1"/>
           <p:nvPr/>
         </p:nvSpPr>
         <p:spPr>
           <a:xfrm>
-            <a:off x="914400" y="5376672"/>
-            <a:ext cx="10332720" cy="868680"/>
+            <a:off x="4636008" y="2194560"/>
+            <a:ext cx="2871216" cy="3931920"/>
           </a:xfrm>
           <a:prstGeom prst="rect">
             <a:avLst/>
@@ -5760,13 +5516,13 @@
           <a:noFill/>
         </p:spPr>
         <p:txBody>
-          <a:bodyPr wrap="square" lIns="0" tIns="0" rIns="0" bIns="0">
+          <a:bodyPr wrap="square">
             <a:spAutoFit/>
           </a:bodyPr>
           <a:lstStyle/>
           <a:p>
             <a:pPr>
-              <a:defRPr sz="1050" b="1">
+              <a:defRPr sz="1000" b="1">
                 <a:solidFill>
                   <a:srgbClr val="10B981"/>
                 </a:solidFill>
@@ -5774,7 +5530,7 @@
               </a:defRPr>
             </a:pPr>
             <a:r>
-              <a:t>EVENT-DRIVEN DATA FLOW IN ACTION:</a:t>
+              <a:t>APPLICATION LAYER</a:t>
             </a:r>
           </a:p>
           <a:p>
@@ -5782,15 +5538,168 @@
               <a:spcBef>
                 <a:spcPts val="300"/>
               </a:spcBef>
-              <a:defRPr sz="1050">
-                <a:solidFill>
-                  <a:srgbClr val="FFFFFF"/>
-                </a:solidFill>
-                <a:latin typeface="Segoe UI"/>
-              </a:defRPr>
-            </a:pPr>
-            <a:r>
-              <a:t>1. Citizen Drops SOS [Lng, Lat]  ➔  2. Stored as GeoJSON in MongoDB  ➔  3. Change Stream detects insertion  ➔  4. WebSocket pushes incident to Map in &lt;80ms  ➔  5. $geoNear matches closest 3 available rescue squads.</a:t>
+              <a:defRPr sz="1400" b="1">
+                <a:solidFill>
+                  <a:srgbClr val="F1F5F9"/>
+                </a:solidFill>
+                <a:latin typeface="Segoe UI"/>
+              </a:defRPr>
+            </a:pPr>
+            <a:r>
+              <a:t>Node.js &amp; Express API</a:t>
+            </a:r>
+          </a:p>
+          <a:p>
+            <a:pPr>
+              <a:spcBef>
+                <a:spcPts val="800"/>
+              </a:spcBef>
+              <a:defRPr sz="1000">
+                <a:solidFill>
+                  <a:srgbClr val="94A3B8"/>
+                </a:solidFill>
+                <a:latin typeface="Segoe UI"/>
+              </a:defRPr>
+            </a:pPr>
+            <a:r>
+              <a:t>• Fast, asynchronous non-blocking REST API server on Port 5000.</a:t>
+            </a:r>
+            <a:br/>
+            <a:r>
+              <a:t>• Routes: /api/incidents, /api/responders, /api/match, /api/resolve.</a:t>
+            </a:r>
+            <a:br/>
+            <a:r>
+              <a:t>• Hosts static frontend assets directly (no Apache/Nginx required).</a:t>
+            </a:r>
+            <a:br/>
+            <a:r>
+              <a:t>• Connects directly to MongoDB via official native driver.</a:t>
+            </a:r>
+          </a:p>
+        </p:txBody>
+      </p:sp>
+      <p:sp>
+        <p:nvSpPr>
+          <p:cNvPr id="9" name="Rounded Rectangle 8"/>
+          <p:cNvSpPr/>
+          <p:nvPr/>
+        </p:nvSpPr>
+        <p:spPr>
+          <a:xfrm>
+            <a:off x="8083296" y="2011680"/>
+            <a:ext cx="3328416" cy="4297680"/>
+          </a:xfrm>
+          <a:prstGeom prst="roundRect">
+            <a:avLst/>
+          </a:prstGeom>
+          <a:solidFill>
+            <a:srgbClr val="121720"/>
+          </a:solidFill>
+          <a:ln w="12700">
+            <a:solidFill>
+              <a:srgbClr val="262C36"/>
+            </a:solidFill>
+          </a:ln>
+        </p:spPr>
+        <p:style>
+          <a:lnRef idx="1">
+            <a:schemeClr val="accent1"/>
+          </a:lnRef>
+          <a:fillRef idx="3">
+            <a:schemeClr val="accent1"/>
+          </a:fillRef>
+          <a:effectRef idx="2">
+            <a:schemeClr val="accent1"/>
+          </a:effectRef>
+          <a:fontRef idx="minor">
+            <a:schemeClr val="lt1"/>
+          </a:fontRef>
+        </p:style>
+        <p:txBody>
+          <a:bodyPr rtlCol="0" anchor="ctr"/>
+          <a:lstStyle/>
+          <a:p>
+            <a:pPr algn="ctr"/>
+          </a:p>
+        </p:txBody>
+      </p:sp>
+      <p:sp>
+        <p:nvSpPr>
+          <p:cNvPr id="10" name="TextBox 9"/>
+          <p:cNvSpPr txBox="1"/>
+          <p:nvPr/>
+        </p:nvSpPr>
+        <p:spPr>
+          <a:xfrm>
+            <a:off x="8311896" y="2194560"/>
+            <a:ext cx="2871216" cy="3931920"/>
+          </a:xfrm>
+          <a:prstGeom prst="rect">
+            <a:avLst/>
+          </a:prstGeom>
+          <a:noFill/>
+        </p:spPr>
+        <p:txBody>
+          <a:bodyPr wrap="square">
+            <a:spAutoFit/>
+          </a:bodyPr>
+          <a:lstStyle/>
+          <a:p>
+            <a:pPr>
+              <a:defRPr sz="1000" b="1">
+                <a:solidFill>
+                  <a:srgbClr val="F59E0B"/>
+                </a:solidFill>
+                <a:latin typeface="Segoe UI"/>
+              </a:defRPr>
+            </a:pPr>
+            <a:r>
+              <a:t>DATA &amp; GEOSPATIAL LAYER</a:t>
+            </a:r>
+          </a:p>
+          <a:p>
+            <a:pPr>
+              <a:spcBef>
+                <a:spcPts val="300"/>
+              </a:spcBef>
+              <a:defRPr sz="1400" b="1">
+                <a:solidFill>
+                  <a:srgbClr val="F1F5F9"/>
+                </a:solidFill>
+                <a:latin typeface="Segoe UI"/>
+              </a:defRPr>
+            </a:pPr>
+            <a:r>
+              <a:t>MongoDB NoSQL Engine</a:t>
+            </a:r>
+          </a:p>
+          <a:p>
+            <a:pPr>
+              <a:spcBef>
+                <a:spcPts val="800"/>
+              </a:spcBef>
+              <a:defRPr sz="1000">
+                <a:solidFill>
+                  <a:srgbClr val="94A3B8"/>
+                </a:solidFill>
+                <a:latin typeface="Segoe UI"/>
+              </a:defRPr>
+            </a:pPr>
+            <a:r>
+              <a:t>• Native 2dsphere indexes for coordinate storage and spatial search.</a:t>
+            </a:r>
+            <a:br/>
+            <a:r>
+              <a:t>• Aggregation Pipeline ($geoNear) computes distances in ~14ms.</a:t>
+            </a:r>
+            <a:br/>
+            <a:r>
+              <a:t>• Native TTL index automatically purges resolved records after 48h.</a:t>
+            </a:r>
+            <a:br/>
+            <a:r>
+              <a:t>• Flexible BSON documents: zero schema migrations during crises.</a:t>
             </a:r>
           </a:p>
         </p:txBody>
@@ -5806,14 +5715,6 @@
 <file path=ppt/slides/slide5.xml><?xml version="1.0" encoding="utf-8"?>
 <p:sld xmlns:a="http://schemas.openxmlformats.org/drawingml/2006/main" xmlns:p="http://schemas.openxmlformats.org/presentationml/2006/main" xmlns:r="http://schemas.openxmlformats.org/officeDocument/2006/relationships">
   <p:cSld>
-    <p:bg>
-      <p:bgPr>
-        <a:solidFill>
-          <a:srgbClr val="0F172A"/>
-        </a:solidFill>
-        <a:effectLst/>
-      </p:bgPr>
-    </p:bg>
     <p:spTree>
       <p:nvGrpSpPr>
         <p:cNvPr id="1" name=""/>
@@ -5823,93 +5724,23 @@
       <p:grpSpPr/>
       <p:sp>
         <p:nvSpPr>
-          <p:cNvPr id="2" name="TextBox 1"/>
-          <p:cNvSpPr txBox="1"/>
-          <p:nvPr/>
-        </p:nvSpPr>
-        <p:spPr>
-          <a:xfrm>
-            <a:off x="731520" y="411480"/>
-            <a:ext cx="10728655" cy="1188720"/>
+          <p:cNvPr id="2" name="Rectangle 1"/>
+          <p:cNvSpPr/>
+          <p:nvPr/>
+        </p:nvSpPr>
+        <p:spPr>
+          <a:xfrm>
+            <a:off x="0" y="0"/>
+            <a:ext cx="12191695" cy="6858000"/>
           </a:xfrm>
           <a:prstGeom prst="rect">
             <a:avLst/>
           </a:prstGeom>
-          <a:noFill/>
-        </p:spPr>
-        <p:txBody>
-          <a:bodyPr wrap="square" lIns="0" tIns="0" rIns="0" bIns="0">
-            <a:spAutoFit/>
-          </a:bodyPr>
-          <a:lstStyle/>
-          <a:p>
-            <a:pPr>
-              <a:defRPr sz="1100" b="1">
-                <a:solidFill>
-                  <a:srgbClr val="10B981"/>
-                </a:solidFill>
-                <a:latin typeface="Segoe UI"/>
-              </a:defRPr>
-            </a:pPr>
-            <a:r>
-              <a:t>04 / DATABASE CAPABILITIES</a:t>
-            </a:r>
-          </a:p>
-          <a:p>
-            <a:pPr>
-              <a:spcBef>
-                <a:spcPts val="400"/>
-              </a:spcBef>
-              <a:defRPr sz="2400" b="1">
-                <a:solidFill>
-                  <a:srgbClr val="FFFFFF"/>
-                </a:solidFill>
-                <a:latin typeface="Segoe UI"/>
-              </a:defRPr>
-            </a:pPr>
-            <a:r>
-              <a:t>Why MongoDB? Technical Deep-Dive</a:t>
-            </a:r>
-          </a:p>
-          <a:p>
-            <a:pPr>
-              <a:spcBef>
-                <a:spcPts val="200"/>
-              </a:spcBef>
-              <a:defRPr sz="1200">
-                <a:solidFill>
-                  <a:srgbClr val="CBD5E1"/>
-                </a:solidFill>
-                <a:latin typeface="Segoe UI"/>
-              </a:defRPr>
-            </a:pPr>
-            <a:r>
-              <a:t>Demonstrating why MongoDB's native features outperform traditional relational databases for this platform.</a:t>
-            </a:r>
-          </a:p>
-        </p:txBody>
-      </p:sp>
-      <p:sp>
-        <p:nvSpPr>
-          <p:cNvPr id="3" name="Rounded Rectangle 2"/>
-          <p:cNvSpPr/>
-          <p:nvPr/>
-        </p:nvSpPr>
-        <p:spPr>
-          <a:xfrm>
-            <a:off x="731520" y="1874519"/>
-            <a:ext cx="5166360" cy="2057400"/>
-          </a:xfrm>
-          <a:prstGeom prst="roundRect">
-            <a:avLst/>
-          </a:prstGeom>
           <a:solidFill>
-            <a:srgbClr val="1E293B"/>
+            <a:srgbClr val="0B0F17"/>
           </a:solidFill>
-          <a:ln w="12700">
-            <a:solidFill>
-              <a:srgbClr val="475569"/>
-            </a:solidFill>
+          <a:ln>
+            <a:noFill/>
           </a:ln>
         </p:spPr>
         <p:style>
@@ -5936,101 +5767,23 @@
       </p:sp>
       <p:sp>
         <p:nvSpPr>
-          <p:cNvPr id="4" name="TextBox 3"/>
-          <p:cNvSpPr txBox="1"/>
-          <p:nvPr/>
-        </p:nvSpPr>
-        <p:spPr>
-          <a:xfrm>
-            <a:off x="960120" y="2039111"/>
-            <a:ext cx="4709160" cy="1783080"/>
+          <p:cNvPr id="3" name="Rectangle 2"/>
+          <p:cNvSpPr/>
+          <p:nvPr/>
+        </p:nvSpPr>
+        <p:spPr>
+          <a:xfrm>
+            <a:off x="731520" y="594360"/>
+            <a:ext cx="640080" cy="54864"/>
           </a:xfrm>
           <a:prstGeom prst="rect">
             <a:avLst/>
           </a:prstGeom>
-          <a:noFill/>
-        </p:spPr>
-        <p:txBody>
-          <a:bodyPr wrap="square" lIns="0" tIns="0" rIns="0" bIns="0">
-            <a:spAutoFit/>
-          </a:bodyPr>
-          <a:lstStyle/>
-          <a:p>
-            <a:pPr>
-              <a:defRPr sz="1300" b="1">
-                <a:solidFill>
-                  <a:srgbClr val="10B981"/>
-                </a:solidFill>
-                <a:latin typeface="Segoe UI"/>
-              </a:defRPr>
-            </a:pPr>
-            <a:r>
-              <a:t>1. Geospatial 2dsphere Indexing</a:t>
-            </a:r>
-          </a:p>
-          <a:p>
-            <a:pPr>
-              <a:spcBef>
-                <a:spcPts val="200"/>
-              </a:spcBef>
-              <a:defRPr sz="1050" b="1">
-                <a:solidFill>
-                  <a:srgbClr val="FFFFFF"/>
-                </a:solidFill>
-                <a:latin typeface="Segoe UI"/>
-              </a:defRPr>
-            </a:pPr>
-            <a:r>
-              <a:t>Spherical distance calculations directly over Earth's curvature.</a:t>
-            </a:r>
-          </a:p>
-          <a:p>
-            <a:pPr>
-              <a:spcBef>
-                <a:spcPts val="400"/>
-              </a:spcBef>
-              <a:defRPr sz="950">
-                <a:solidFill>
-                  <a:srgbClr val="CBD5E1"/>
-                </a:solidFill>
-                <a:latin typeface="Segoe UI"/>
-              </a:defRPr>
-            </a:pPr>
-            <a:r>
-              <a:t>• Natively indexes standard GeoJSON objects (Point, Polygon, MultiPolygon).</a:t>
-            </a:r>
-            <a:br/>
-            <a:r>
-              <a:t>• Eliminates need for PostGIS extensions or external spatial engines.</a:t>
-            </a:r>
-            <a:br/>
-            <a:r>
-              <a:t>• Enables sub-millisecond $geoNear execution with $maxDistance constraints.</a:t>
-            </a:r>
-          </a:p>
-        </p:txBody>
-      </p:sp>
-      <p:sp>
-        <p:nvSpPr>
-          <p:cNvPr id="5" name="Rounded Rectangle 4"/>
-          <p:cNvSpPr/>
-          <p:nvPr/>
-        </p:nvSpPr>
-        <p:spPr>
-          <a:xfrm>
-            <a:off x="6263640" y="1874519"/>
-            <a:ext cx="5166360" cy="2057400"/>
-          </a:xfrm>
-          <a:prstGeom prst="roundRect">
-            <a:avLst/>
-          </a:prstGeom>
           <a:solidFill>
-            <a:srgbClr val="1E293B"/>
+            <a:srgbClr val="10B981"/>
           </a:solidFill>
-          <a:ln w="12700">
-            <a:solidFill>
-              <a:srgbClr val="475569"/>
-            </a:solidFill>
+          <a:ln>
+            <a:noFill/>
           </a:ln>
         </p:spPr>
         <p:style>
@@ -6057,14 +5810,14 @@
       </p:sp>
       <p:sp>
         <p:nvSpPr>
-          <p:cNvPr id="6" name="TextBox 5"/>
+          <p:cNvPr id="4" name="TextBox 3"/>
           <p:cNvSpPr txBox="1"/>
           <p:nvPr/>
         </p:nvSpPr>
         <p:spPr>
           <a:xfrm>
-            <a:off x="6492240" y="2039111"/>
-            <a:ext cx="4709160" cy="1783080"/>
+            <a:off x="731520" y="731520"/>
+            <a:ext cx="10698480" cy="1005840"/>
           </a:xfrm>
           <a:prstGeom prst="rect">
             <a:avLst/>
@@ -6078,15 +5831,31 @@
           <a:lstStyle/>
           <a:p>
             <a:pPr>
-              <a:defRPr sz="1300" b="1">
-                <a:solidFill>
-                  <a:srgbClr val="38BDF8"/>
-                </a:solidFill>
-                <a:latin typeface="Segoe UI"/>
-              </a:defRPr>
-            </a:pPr>
-            <a:r>
-              <a:t>2. Built-in Change Streams</a:t>
+              <a:defRPr sz="1000" b="1">
+                <a:solidFill>
+                  <a:srgbClr val="10B981"/>
+                </a:solidFill>
+                <a:latin typeface="Segoe UI"/>
+              </a:defRPr>
+            </a:pPr>
+            <a:r>
+              <a:t>04 / DATABASE DESIGN</a:t>
+            </a:r>
+          </a:p>
+          <a:p>
+            <a:pPr>
+              <a:spcBef>
+                <a:spcPts val="300"/>
+              </a:spcBef>
+              <a:defRPr sz="2200" b="1">
+                <a:solidFill>
+                  <a:srgbClr val="F1F5F9"/>
+                </a:solidFill>
+                <a:latin typeface="Segoe UI"/>
+              </a:defRPr>
+            </a:pPr>
+            <a:r>
+              <a:t>The 3 MongoDB Collections</a:t>
             </a:r>
           </a:p>
           <a:p>
@@ -6094,63 +5863,39 @@
               <a:spcBef>
                 <a:spcPts val="200"/>
               </a:spcBef>
-              <a:defRPr sz="1050" b="1">
-                <a:solidFill>
-                  <a:srgbClr val="FFFFFF"/>
-                </a:solidFill>
-                <a:latin typeface="Segoe UI"/>
-              </a:defRPr>
-            </a:pPr>
-            <a:r>
-              <a:t>Tailored directly on MongoDB's internal high-speed Oplog.</a:t>
-            </a:r>
-          </a:p>
-          <a:p>
-            <a:pPr>
-              <a:spcBef>
-                <a:spcPts val="400"/>
-              </a:spcBef>
-              <a:defRPr sz="950">
-                <a:solidFill>
-                  <a:srgbClr val="CBD5E1"/>
-                </a:solidFill>
-                <a:latin typeface="Segoe UI"/>
-              </a:defRPr>
-            </a:pPr>
-            <a:r>
-              <a:t>• Real-time database mutations pushed immediately to connected clients.</a:t>
-            </a:r>
-            <a:br/>
-            <a:r>
-              <a:t>• Replaces external Redis Pub/Sub, Kafka, or heavy socket polling.</a:t>
-            </a:r>
-            <a:br/>
-            <a:r>
-              <a:t>• Guarantees event ordering and automatic resume token recovery if disconnects occur.</a:t>
-            </a:r>
-          </a:p>
-        </p:txBody>
-      </p:sp>
-      <p:sp>
-        <p:nvSpPr>
-          <p:cNvPr id="7" name="Rounded Rectangle 6"/>
+              <a:defRPr sz="1150">
+                <a:solidFill>
+                  <a:srgbClr val="94A3B8"/>
+                </a:solidFill>
+                <a:latin typeface="Segoe UI"/>
+              </a:defRPr>
+            </a:pPr>
+            <a:r>
+              <a:t>Simple, flexible BSON documents that power real-time coordinate search and status tracking.</a:t>
+            </a:r>
+          </a:p>
+        </p:txBody>
+      </p:sp>
+      <p:sp>
+        <p:nvSpPr>
+          <p:cNvPr id="5" name="Rounded Rectangle 4"/>
           <p:cNvSpPr/>
           <p:nvPr/>
         </p:nvSpPr>
         <p:spPr>
           <a:xfrm>
-            <a:off x="731520" y="4206240"/>
-            <a:ext cx="5166360" cy="2057400"/>
+            <a:off x="731520" y="2011680"/>
+            <a:ext cx="3328416" cy="4297680"/>
           </a:xfrm>
           <a:prstGeom prst="roundRect">
             <a:avLst/>
           </a:prstGeom>
           <a:solidFill>
-            <a:srgbClr val="1E293B"/>
+            <a:srgbClr val="121720"/>
           </a:solidFill>
           <a:ln w="12700">
             <a:solidFill>
-              <a:srgbClr val="475569"/>
+              <a:srgbClr val="262C36"/>
             </a:solidFill>
           </a:ln>
         </p:spPr>
@@ -6178,14 +5923,14 @@
       </p:sp>
       <p:sp>
         <p:nvSpPr>
-          <p:cNvPr id="8" name="TextBox 7"/>
+          <p:cNvPr id="6" name="TextBox 5"/>
           <p:cNvSpPr txBox="1"/>
           <p:nvPr/>
         </p:nvSpPr>
         <p:spPr>
           <a:xfrm>
-            <a:off x="960120" y="4370832"/>
-            <a:ext cx="4709160" cy="1783080"/>
+            <a:off x="914400" y="2148840"/>
+            <a:ext cx="2962656" cy="4023360"/>
           </a:xfrm>
           <a:prstGeom prst="rect">
             <a:avLst/>
@@ -6193,7 +5938,7 @@
           <a:noFill/>
         </p:spPr>
         <p:txBody>
-          <a:bodyPr wrap="square" lIns="0" tIns="0" rIns="0" bIns="0">
+          <a:bodyPr wrap="square">
             <a:spAutoFit/>
           </a:bodyPr>
           <a:lstStyle/>
@@ -6201,13 +5946,13 @@
             <a:pPr>
               <a:defRPr sz="1300" b="1">
                 <a:solidFill>
-                  <a:srgbClr val="FBBF24"/>
-                </a:solidFill>
-                <a:latin typeface="Segoe UI"/>
-              </a:defRPr>
-            </a:pPr>
-            <a:r>
-              <a:t>3. Multi-Stage Aggregation Pipeline</a:t>
+                  <a:srgbClr val="F43F5E"/>
+                </a:solidFill>
+                <a:latin typeface="Consolas"/>
+              </a:defRPr>
+            </a:pPr>
+            <a:r>
+              <a:t>db.incidents</a:t>
             </a:r>
           </a:p>
           <a:p>
@@ -6215,67 +5960,112 @@
               <a:spcBef>
                 <a:spcPts val="200"/>
               </a:spcBef>
-              <a:defRPr sz="1050" b="1">
-                <a:solidFill>
-                  <a:srgbClr val="FFFFFF"/>
-                </a:solidFill>
-                <a:latin typeface="Segoe UI"/>
-              </a:defRPr>
-            </a:pPr>
-            <a:r>
-              <a:t>Complex spatial triage computed in a single database round-trip.</a:t>
+              <a:defRPr sz="1000">
+                <a:solidFill>
+                  <a:srgbClr val="F1F5F9"/>
+                </a:solidFill>
+                <a:latin typeface="Segoe UI"/>
+              </a:defRPr>
+            </a:pPr>
+            <a:r>
+              <a:t>Emergency Calls / Distress Beacons</a:t>
             </a:r>
           </a:p>
           <a:p>
             <a:pPr>
               <a:spcBef>
-                <a:spcPts val="400"/>
+                <a:spcPts val="600"/>
               </a:spcBef>
-              <a:defRPr sz="950">
-                <a:solidFill>
-                  <a:srgbClr val="CBD5E1"/>
-                </a:solidFill>
-                <a:latin typeface="Segoe UI"/>
-              </a:defRPr>
-            </a:pPr>
-            <a:r>
-              <a:t>• Stage 1 ($geoNear): Filter within 10 km radius.</a:t>
+              <a:defRPr sz="850">
+                <a:solidFill>
+                  <a:srgbClr val="94A3B8"/>
+                </a:solidFill>
+                <a:latin typeface="Consolas"/>
+              </a:defRPr>
+            </a:pPr>
+            <a:r>
+              <a:t>Stores citizen SOS reports with coordinates, urgency, casualty count, and status.</a:t>
             </a:r>
             <a:br/>
-            <a:r>
-              <a:t>• Stage 2 ($match): Status = 'Active' &amp; Category = 'Medical'.</a:t>
-            </a:r>
             <a:br/>
             <a:r>
-              <a:t>• Stage 3 ($addFields): Compute composite urgency score (Casualties × Wait Time).</a:t>
+              <a:t>Sample Document:</a:t>
             </a:r>
             <a:br/>
             <a:r>
-              <a:t>• Stage 4 ($sort): Rank by score descending.</a:t>
-            </a:r>
-          </a:p>
-        </p:txBody>
-      </p:sp>
-      <p:sp>
-        <p:nvSpPr>
-          <p:cNvPr id="9" name="Rounded Rectangle 8"/>
+              <a:t>{</a:t>
+            </a:r>
+            <a:br/>
+            <a:r>
+              <a:t>  id: 'SOS-104',</a:t>
+            </a:r>
+            <a:br/>
+            <a:r>
+              <a:t>  caller: 'Kavita Sharma',</a:t>
+            </a:r>
+            <a:br/>
+            <a:r>
+              <a:t>  category: 'Medical / Trauma',</a:t>
+            </a:r>
+            <a:br/>
+            <a:r>
+              <a:t>  severity: 'CRITICAL', victims: 2,</a:t>
+            </a:r>
+            <a:br/>
+            <a:r>
+              <a:t>  location: { type: 'Point', coordinates: [75.7050, 31.2555] },</a:t>
+            </a:r>
+            <a:br/>
+            <a:r>
+              <a:t>  status: 'OPEN', assignedTo: null,</a:t>
+            </a:r>
+            <a:br/>
+            <a:r>
+              <a:t>  resolvedAt: null</a:t>
+            </a:r>
+            <a:br/>
+            <a:r>
+              <a:t>}</a:t>
+            </a:r>
+          </a:p>
+          <a:p>
+            <a:pPr>
+              <a:spcBef>
+                <a:spcPts val="800"/>
+              </a:spcBef>
+              <a:defRPr sz="950" b="1">
+                <a:solidFill>
+                  <a:srgbClr val="F43F5E"/>
+                </a:solidFill>
+                <a:latin typeface="Segoe UI"/>
+              </a:defRPr>
+            </a:pPr>
+            <a:r>
+              <a:t>• Indexes: 2dsphere on location, TTL on resolvedAt (48h)</a:t>
+            </a:r>
+          </a:p>
+        </p:txBody>
+      </p:sp>
+      <p:sp>
+        <p:nvSpPr>
+          <p:cNvPr id="7" name="Rounded Rectangle 6"/>
           <p:cNvSpPr/>
           <p:nvPr/>
         </p:nvSpPr>
         <p:spPr>
           <a:xfrm>
-            <a:off x="6263640" y="4206240"/>
-            <a:ext cx="5166360" cy="2057400"/>
+            <a:off x="4407408" y="2011680"/>
+            <a:ext cx="3328416" cy="4297680"/>
           </a:xfrm>
           <a:prstGeom prst="roundRect">
             <a:avLst/>
           </a:prstGeom>
           <a:solidFill>
-            <a:srgbClr val="1E293B"/>
+            <a:srgbClr val="121720"/>
           </a:solidFill>
           <a:ln w="12700">
             <a:solidFill>
-              <a:srgbClr val="475569"/>
+              <a:srgbClr val="262C36"/>
             </a:solidFill>
           </a:ln>
         </p:spPr>
@@ -6303,14 +6093,14 @@
       </p:sp>
       <p:sp>
         <p:nvSpPr>
-          <p:cNvPr id="10" name="TextBox 9"/>
+          <p:cNvPr id="8" name="TextBox 7"/>
           <p:cNvSpPr txBox="1"/>
           <p:nvPr/>
         </p:nvSpPr>
         <p:spPr>
           <a:xfrm>
-            <a:off x="6492240" y="4370832"/>
-            <a:ext cx="4709160" cy="1783080"/>
+            <a:off x="4590288" y="2148840"/>
+            <a:ext cx="2962656" cy="4023360"/>
           </a:xfrm>
           <a:prstGeom prst="rect">
             <a:avLst/>
@@ -6318,7 +6108,7 @@
           <a:noFill/>
         </p:spPr>
         <p:txBody>
-          <a:bodyPr wrap="square" lIns="0" tIns="0" rIns="0" bIns="0">
+          <a:bodyPr wrap="square">
             <a:spAutoFit/>
           </a:bodyPr>
           <a:lstStyle/>
@@ -6326,13 +6116,13 @@
             <a:pPr>
               <a:defRPr sz="1300" b="1">
                 <a:solidFill>
-                  <a:srgbClr val="10B981"/>
-                </a:solidFill>
-                <a:latin typeface="Segoe UI"/>
-              </a:defRPr>
-            </a:pPr>
-            <a:r>
-              <a:t>4. Polymorphic Schema &amp; TTL Indexes</a:t>
+                  <a:srgbClr val="38BDF8"/>
+                </a:solidFill>
+                <a:latin typeface="Consolas"/>
+              </a:defRPr>
+            </a:pPr>
+            <a:r>
+              <a:t>db.responders</a:t>
             </a:r>
           </a:p>
           <a:p>
@@ -6340,39 +6130,246 @@
               <a:spcBef>
                 <a:spcPts val="200"/>
               </a:spcBef>
-              <a:defRPr sz="1050" b="1">
-                <a:solidFill>
-                  <a:srgbClr val="FFFFFF"/>
-                </a:solidFill>
-                <a:latin typeface="Segoe UI"/>
-              </a:defRPr>
-            </a:pPr>
-            <a:r>
-              <a:t>Unmatched flexibility for evolving disaster scenarios.</a:t>
+              <a:defRPr sz="1000">
+                <a:solidFill>
+                  <a:srgbClr val="F1F5F9"/>
+                </a:solidFill>
+                <a:latin typeface="Segoe UI"/>
+              </a:defRPr>
+            </a:pPr>
+            <a:r>
+              <a:t>Rescue Squads &amp; Mobile Fleet</a:t>
             </a:r>
           </a:p>
           <a:p>
             <a:pPr>
               <a:spcBef>
-                <a:spcPts val="400"/>
+                <a:spcPts val="600"/>
               </a:spcBef>
-              <a:defRPr sz="950">
-                <a:solidFill>
-                  <a:srgbClr val="CBD5E1"/>
-                </a:solidFill>
-                <a:latin typeface="Segoe UI"/>
-              </a:defRPr>
-            </a:pPr>
-            <a:r>
-              <a:t>• Diverse incident types (Floods, Fires, Earthquakes) store custom attributes with zero migrations.</a:t>
+              <a:defRPr sz="850">
+                <a:solidFill>
+                  <a:srgbClr val="94A3B8"/>
+                </a:solidFill>
+                <a:latin typeface="Consolas"/>
+              </a:defRPr>
+            </a:pPr>
+            <a:r>
+              <a:t>Stores active rescue units, ambulances, water boats, and NDRF teams.</a:t>
             </a:r>
             <a:br/>
-            <a:r>
-              <a:t>• TTL Indexes automatically expire and clean up resolved pins after 48 hours.</a:t>
-            </a:r>
             <a:br/>
             <a:r>
-              <a:t>• Native replica sets provide high availability during crisis infrastructure surges.</a:t>
+              <a:t>Sample Document:</a:t>
+            </a:r>
+            <a:br/>
+            <a:r>
+              <a:t>{</a:t>
+            </a:r>
+            <a:br/>
+            <a:r>
+              <a:t>  id: 'R-PB1',</a:t>
+            </a:r>
+            <a:br/>
+            <a:r>
+              <a:t>  name: 'LPU Quick Response Squad',</a:t>
+            </a:r>
+            <a:br/>
+            <a:r>
+              <a:t>  type: 'Rescue Team',</a:t>
+            </a:r>
+            <a:br/>
+            <a:r>
+              <a:t>  status: 'Available',</a:t>
+            </a:r>
+            <a:br/>
+            <a:r>
+              <a:t>  contact: '+91 98761-11001',</a:t>
+            </a:r>
+            <a:br/>
+            <a:r>
+              <a:t>  location: { type: 'Point', coordinates: [75.7045, 31.2560] }</a:t>
+            </a:r>
+            <a:br/>
+            <a:r>
+              <a:t>}</a:t>
+            </a:r>
+          </a:p>
+          <a:p>
+            <a:pPr>
+              <a:spcBef>
+                <a:spcPts val="800"/>
+              </a:spcBef>
+              <a:defRPr sz="950" b="1">
+                <a:solidFill>
+                  <a:srgbClr val="38BDF8"/>
+                </a:solidFill>
+                <a:latin typeface="Segoe UI"/>
+              </a:defRPr>
+            </a:pPr>
+            <a:r>
+              <a:t>• Index: 2dsphere on location (for $geoNear queries)</a:t>
+            </a:r>
+          </a:p>
+        </p:txBody>
+      </p:sp>
+      <p:sp>
+        <p:nvSpPr>
+          <p:cNvPr id="9" name="Rounded Rectangle 8"/>
+          <p:cNvSpPr/>
+          <p:nvPr/>
+        </p:nvSpPr>
+        <p:spPr>
+          <a:xfrm>
+            <a:off x="8083296" y="2011680"/>
+            <a:ext cx="3328416" cy="4297680"/>
+          </a:xfrm>
+          <a:prstGeom prst="roundRect">
+            <a:avLst/>
+          </a:prstGeom>
+          <a:solidFill>
+            <a:srgbClr val="121720"/>
+          </a:solidFill>
+          <a:ln w="12700">
+            <a:solidFill>
+              <a:srgbClr val="262C36"/>
+            </a:solidFill>
+          </a:ln>
+        </p:spPr>
+        <p:style>
+          <a:lnRef idx="1">
+            <a:schemeClr val="accent1"/>
+          </a:lnRef>
+          <a:fillRef idx="3">
+            <a:schemeClr val="accent1"/>
+          </a:fillRef>
+          <a:effectRef idx="2">
+            <a:schemeClr val="accent1"/>
+          </a:effectRef>
+          <a:fontRef idx="minor">
+            <a:schemeClr val="lt1"/>
+          </a:fontRef>
+        </p:style>
+        <p:txBody>
+          <a:bodyPr rtlCol="0" anchor="ctr"/>
+          <a:lstStyle/>
+          <a:p>
+            <a:pPr algn="ctr"/>
+          </a:p>
+        </p:txBody>
+      </p:sp>
+      <p:sp>
+        <p:nvSpPr>
+          <p:cNvPr id="10" name="TextBox 9"/>
+          <p:cNvSpPr txBox="1"/>
+          <p:nvPr/>
+        </p:nvSpPr>
+        <p:spPr>
+          <a:xfrm>
+            <a:off x="8266176" y="2148840"/>
+            <a:ext cx="2962656" cy="4023360"/>
+          </a:xfrm>
+          <a:prstGeom prst="rect">
+            <a:avLst/>
+          </a:prstGeom>
+          <a:noFill/>
+        </p:spPr>
+        <p:txBody>
+          <a:bodyPr wrap="square">
+            <a:spAutoFit/>
+          </a:bodyPr>
+          <a:lstStyle/>
+          <a:p>
+            <a:pPr>
+              <a:defRPr sz="1300" b="1">
+                <a:solidFill>
+                  <a:srgbClr val="10B981"/>
+                </a:solidFill>
+                <a:latin typeface="Consolas"/>
+              </a:defRPr>
+            </a:pPr>
+            <a:r>
+              <a:t>db.shelters</a:t>
+            </a:r>
+          </a:p>
+          <a:p>
+            <a:pPr>
+              <a:spcBef>
+                <a:spcPts val="200"/>
+              </a:spcBef>
+              <a:defRPr sz="1000">
+                <a:solidFill>
+                  <a:srgbClr val="F1F5F9"/>
+                </a:solidFill>
+                <a:latin typeface="Segoe UI"/>
+              </a:defRPr>
+            </a:pPr>
+            <a:r>
+              <a:t>Relief Centers &amp; Safe Hubs</a:t>
+            </a:r>
+          </a:p>
+          <a:p>
+            <a:pPr>
+              <a:spcBef>
+                <a:spcPts val="600"/>
+              </a:spcBef>
+              <a:defRPr sz="850">
+                <a:solidFill>
+                  <a:srgbClr val="94A3B8"/>
+                </a:solidFill>
+                <a:latin typeface="Consolas"/>
+              </a:defRPr>
+            </a:pPr>
+            <a:r>
+              <a:t>Stores evacuation centers, indoor stadiums, and hospital triage tents.</a:t>
+            </a:r>
+            <a:br/>
+            <a:br/>
+            <a:r>
+              <a:t>Sample Document:</a:t>
+            </a:r>
+            <a:br/>
+            <a:r>
+              <a:t>{</a:t>
+            </a:r>
+            <a:br/>
+            <a:r>
+              <a:t>  id: 'S-PB1',</a:t>
+            </a:r>
+            <a:br/>
+            <a:r>
+              <a:t>  name: 'LPU Stadium Relief Center',</a:t>
+            </a:r>
+            <a:br/>
+            <a:r>
+              <a:t>  capacity: '250/500 Beds',</a:t>
+            </a:r>
+            <a:br/>
+            <a:r>
+              <a:t>  phone: '01824-510001',</a:t>
+            </a:r>
+            <a:br/>
+            <a:r>
+              <a:t>  location: { type: 'Point', coordinates: [75.7020, 31.2540] }</a:t>
+            </a:r>
+            <a:br/>
+            <a:r>
+              <a:t>}</a:t>
+            </a:r>
+          </a:p>
+          <a:p>
+            <a:pPr>
+              <a:spcBef>
+                <a:spcPts val="800"/>
+              </a:spcBef>
+              <a:defRPr sz="950" b="1">
+                <a:solidFill>
+                  <a:srgbClr val="10B981"/>
+                </a:solidFill>
+                <a:latin typeface="Segoe UI"/>
+              </a:defRPr>
+            </a:pPr>
+            <a:r>
+              <a:t>• Index: 2dsphere on location</a:t>
             </a:r>
           </a:p>
         </p:txBody>
@@ -6388,14 +6385,6 @@
 <file path=ppt/slides/slide6.xml><?xml version="1.0" encoding="utf-8"?>
 <p:sld xmlns:a="http://schemas.openxmlformats.org/drawingml/2006/main" xmlns:p="http://schemas.openxmlformats.org/presentationml/2006/main" xmlns:r="http://schemas.openxmlformats.org/officeDocument/2006/relationships">
   <p:cSld>
-    <p:bg>
-      <p:bgPr>
-        <a:solidFill>
-          <a:srgbClr val="0F172A"/>
-        </a:solidFill>
-        <a:effectLst/>
-      </p:bgPr>
-    </p:bg>
     <p:spTree>
       <p:nvGrpSpPr>
         <p:cNvPr id="1" name=""/>
@@ -6405,93 +6394,23 @@
       <p:grpSpPr/>
       <p:sp>
         <p:nvSpPr>
-          <p:cNvPr id="2" name="TextBox 1"/>
-          <p:cNvSpPr txBox="1"/>
-          <p:nvPr/>
-        </p:nvSpPr>
-        <p:spPr>
-          <a:xfrm>
-            <a:off x="731520" y="411480"/>
-            <a:ext cx="10728655" cy="1188720"/>
+          <p:cNvPr id="2" name="Rectangle 1"/>
+          <p:cNvSpPr/>
+          <p:nvPr/>
+        </p:nvSpPr>
+        <p:spPr>
+          <a:xfrm>
+            <a:off x="0" y="0"/>
+            <a:ext cx="12191695" cy="6858000"/>
           </a:xfrm>
           <a:prstGeom prst="rect">
             <a:avLst/>
           </a:prstGeom>
-          <a:noFill/>
-        </p:spPr>
-        <p:txBody>
-          <a:bodyPr wrap="square" lIns="0" tIns="0" rIns="0" bIns="0">
-            <a:spAutoFit/>
-          </a:bodyPr>
-          <a:lstStyle/>
-          <a:p>
-            <a:pPr>
-              <a:defRPr sz="1100" b="1">
-                <a:solidFill>
-                  <a:srgbClr val="10B981"/>
-                </a:solidFill>
-                <a:latin typeface="Segoe UI"/>
-              </a:defRPr>
-            </a:pPr>
-            <a:r>
-              <a:t>05 / IMPACT &amp; FUTURE SCOPE</a:t>
-            </a:r>
-          </a:p>
-          <a:p>
-            <a:pPr>
-              <a:spcBef>
-                <a:spcPts val="400"/>
-              </a:spcBef>
-              <a:defRPr sz="2400" b="1">
-                <a:solidFill>
-                  <a:srgbClr val="FFFFFF"/>
-                </a:solidFill>
-                <a:latin typeface="Segoe UI"/>
-              </a:defRPr>
-            </a:pPr>
-            <a:r>
-              <a:t>Live Demonstration, Impact &amp; Future Roadmap</a:t>
-            </a:r>
-          </a:p>
-          <a:p>
-            <a:pPr>
-              <a:spcBef>
-                <a:spcPts val="200"/>
-              </a:spcBef>
-              <a:defRPr sz="1200">
-                <a:solidFill>
-                  <a:srgbClr val="CBD5E1"/>
-                </a:solidFill>
-                <a:latin typeface="Segoe UI"/>
-              </a:defRPr>
-            </a:pPr>
-            <a:r>
-              <a:t>Validating practical disaster response efficiency and outlining real-world deployment.</a:t>
-            </a:r>
-          </a:p>
-        </p:txBody>
-      </p:sp>
-      <p:sp>
-        <p:nvSpPr>
-          <p:cNvPr id="3" name="Rounded Rectangle 2"/>
-          <p:cNvSpPr/>
-          <p:nvPr/>
-        </p:nvSpPr>
-        <p:spPr>
-          <a:xfrm>
-            <a:off x="731520" y="1874519"/>
-            <a:ext cx="3328416" cy="3794760"/>
-          </a:xfrm>
-          <a:prstGeom prst="roundRect">
-            <a:avLst/>
-          </a:prstGeom>
           <a:solidFill>
-            <a:srgbClr val="1E293B"/>
+            <a:srgbClr val="0B0F17"/>
           </a:solidFill>
-          <a:ln w="12700">
-            <a:solidFill>
-              <a:srgbClr val="475569"/>
-            </a:solidFill>
+          <a:ln>
+            <a:noFill/>
           </a:ln>
         </p:spPr>
         <p:style>
@@ -6518,189 +6437,23 @@
       </p:sp>
       <p:sp>
         <p:nvSpPr>
-          <p:cNvPr id="4" name="TextBox 3"/>
-          <p:cNvSpPr txBox="1"/>
-          <p:nvPr/>
-        </p:nvSpPr>
-        <p:spPr>
-          <a:xfrm>
-            <a:off x="960120" y="2057399"/>
-            <a:ext cx="2871216" cy="3474720"/>
+          <p:cNvPr id="3" name="Rectangle 2"/>
+          <p:cNvSpPr/>
+          <p:nvPr/>
+        </p:nvSpPr>
+        <p:spPr>
+          <a:xfrm>
+            <a:off x="731520" y="594360"/>
+            <a:ext cx="640080" cy="54864"/>
           </a:xfrm>
           <a:prstGeom prst="rect">
             <a:avLst/>
           </a:prstGeom>
-          <a:noFill/>
-        </p:spPr>
-        <p:txBody>
-          <a:bodyPr wrap="square" lIns="0" tIns="0" rIns="0" bIns="0">
-            <a:spAutoFit/>
-          </a:bodyPr>
-          <a:lstStyle/>
-          <a:p>
-            <a:pPr>
-              <a:defRPr sz="1300" b="1">
-                <a:solidFill>
-                  <a:srgbClr val="10B981"/>
-                </a:solidFill>
-                <a:latin typeface="Segoe UI"/>
-              </a:defRPr>
-            </a:pPr>
-            <a:r>
-              <a:t>DEMO WORKFLOW</a:t>
-            </a:r>
-          </a:p>
-          <a:p>
-            <a:pPr>
-              <a:spcBef>
-                <a:spcPts val="600"/>
-              </a:spcBef>
-              <a:defRPr sz="1050" b="1">
-                <a:solidFill>
-                  <a:srgbClr val="FFFFFF"/>
-                </a:solidFill>
-                <a:latin typeface="Segoe UI"/>
-              </a:defRPr>
-            </a:pPr>
-            <a:r>
-              <a:t>Step 1: Citizen SOS Ping</a:t>
-            </a:r>
-          </a:p>
-          <a:p>
-            <a:pPr>
-              <a:spcBef>
-                <a:spcPts val="100"/>
-              </a:spcBef>
-              <a:defRPr sz="950">
-                <a:solidFill>
-                  <a:srgbClr val="CBD5E1"/>
-                </a:solidFill>
-                <a:latin typeface="Segoe UI"/>
-              </a:defRPr>
-            </a:pPr>
-            <a:r>
-              <a:t>Victim triggers SOS pin on mobile web UI; coordinates captured automatically.</a:t>
-            </a:r>
-          </a:p>
-          <a:p>
-            <a:pPr>
-              <a:spcBef>
-                <a:spcPts val="600"/>
-              </a:spcBef>
-              <a:defRPr sz="1050" b="1">
-                <a:solidFill>
-                  <a:srgbClr val="FFFFFF"/>
-                </a:solidFill>
-                <a:latin typeface="Segoe UI"/>
-              </a:defRPr>
-            </a:pPr>
-            <a:r>
-              <a:t>Step 2: Instant Change Stream</a:t>
-            </a:r>
-          </a:p>
-          <a:p>
-            <a:pPr>
-              <a:spcBef>
-                <a:spcPts val="100"/>
-              </a:spcBef>
-              <a:defRPr sz="950">
-                <a:solidFill>
-                  <a:srgbClr val="CBD5E1"/>
-                </a:solidFill>
-                <a:latin typeface="Segoe UI"/>
-              </a:defRPr>
-            </a:pPr>
-            <a:r>
-              <a:t>MongoDB Change Stream broadcasts payload to central command map in real-time (&lt;80ms).</a:t>
-            </a:r>
-          </a:p>
-          <a:p>
-            <a:pPr>
-              <a:spcBef>
-                <a:spcPts val="600"/>
-              </a:spcBef>
-              <a:defRPr sz="1050" b="1">
-                <a:solidFill>
-                  <a:srgbClr val="FFFFFF"/>
-                </a:solidFill>
-                <a:latin typeface="Segoe UI"/>
-              </a:defRPr>
-            </a:pPr>
-            <a:r>
-              <a:t>Step 3: Dynamic Allocation</a:t>
-            </a:r>
-          </a:p>
-          <a:p>
-            <a:pPr>
-              <a:spcBef>
-                <a:spcPts val="100"/>
-              </a:spcBef>
-              <a:defRPr sz="950">
-                <a:solidFill>
-                  <a:srgbClr val="CBD5E1"/>
-                </a:solidFill>
-                <a:latin typeface="Segoe UI"/>
-              </a:defRPr>
-            </a:pPr>
-            <a:r>
-              <a:t>System runs $geoNear to identify closest 3 available rescue squads &amp; route distance.</a:t>
-            </a:r>
-          </a:p>
-          <a:p>
-            <a:pPr>
-              <a:spcBef>
-                <a:spcPts val="600"/>
-              </a:spcBef>
-              <a:defRPr sz="1050" b="1">
-                <a:solidFill>
-                  <a:srgbClr val="FFFFFF"/>
-                </a:solidFill>
-                <a:latin typeface="Segoe UI"/>
-              </a:defRPr>
-            </a:pPr>
-            <a:r>
-              <a:t>Step 4: Status Transition</a:t>
-            </a:r>
-          </a:p>
-          <a:p>
-            <a:pPr>
-              <a:spcBef>
-                <a:spcPts val="100"/>
-              </a:spcBef>
-              <a:defRPr sz="950">
-                <a:solidFill>
-                  <a:srgbClr val="CBD5E1"/>
-                </a:solidFill>
-                <a:latin typeface="Segoe UI"/>
-              </a:defRPr>
-            </a:pPr>
-            <a:r>
-              <a:t>Incident marked 'Dispatched'; volunteer phone receives push directions.</a:t>
-            </a:r>
-          </a:p>
-        </p:txBody>
-      </p:sp>
-      <p:sp>
-        <p:nvSpPr>
-          <p:cNvPr id="5" name="Rounded Rectangle 4"/>
-          <p:cNvSpPr/>
-          <p:nvPr/>
-        </p:nvSpPr>
-        <p:spPr>
-          <a:xfrm>
-            <a:off x="4407408" y="1874519"/>
-            <a:ext cx="3328416" cy="3794760"/>
-          </a:xfrm>
-          <a:prstGeom prst="roundRect">
-            <a:avLst/>
-          </a:prstGeom>
           <a:solidFill>
-            <a:srgbClr val="1E293B"/>
+            <a:srgbClr val="10B981"/>
           </a:solidFill>
-          <a:ln w="12700">
-            <a:solidFill>
-              <a:srgbClr val="475569"/>
-            </a:solidFill>
+          <a:ln>
+            <a:noFill/>
           </a:ln>
         </p:spPr>
         <p:style>
@@ -6727,14 +6480,14 @@
       </p:sp>
       <p:sp>
         <p:nvSpPr>
-          <p:cNvPr id="6" name="TextBox 5"/>
+          <p:cNvPr id="4" name="TextBox 3"/>
           <p:cNvSpPr txBox="1"/>
           <p:nvPr/>
         </p:nvSpPr>
         <p:spPr>
           <a:xfrm>
-            <a:off x="4636008" y="2057399"/>
-            <a:ext cx="2871216" cy="3474720"/>
+            <a:off x="731520" y="731520"/>
+            <a:ext cx="10698480" cy="1005840"/>
           </a:xfrm>
           <a:prstGeom prst="rect">
             <a:avLst/>
@@ -6748,167 +6501,71 @@
           <a:lstStyle/>
           <a:p>
             <a:pPr>
-              <a:defRPr sz="1300" b="1">
-                <a:solidFill>
-                  <a:srgbClr val="38BDF8"/>
-                </a:solidFill>
-                <a:latin typeface="Segoe UI"/>
-              </a:defRPr>
-            </a:pPr>
-            <a:r>
-              <a:t>MEASURABLE IMPACT</a:t>
+              <a:defRPr sz="1000" b="1">
+                <a:solidFill>
+                  <a:srgbClr val="10B981"/>
+                </a:solidFill>
+                <a:latin typeface="Segoe UI"/>
+              </a:defRPr>
+            </a:pPr>
+            <a:r>
+              <a:t>05 / CORE ALGORITHM</a:t>
             </a:r>
           </a:p>
           <a:p>
             <a:pPr>
               <a:spcBef>
-                <a:spcPts val="600"/>
+                <a:spcPts val="300"/>
               </a:spcBef>
-              <a:defRPr sz="1050" b="1">
-                <a:solidFill>
-                  <a:srgbClr val="FFFFFF"/>
-                </a:solidFill>
-                <a:latin typeface="Segoe UI"/>
-              </a:defRPr>
-            </a:pPr>
-            <a:r>
-              <a:t>65% Faster Dispatch</a:t>
+              <a:defRPr sz="2200" b="1">
+                <a:solidFill>
+                  <a:srgbClr val="F1F5F9"/>
+                </a:solidFill>
+                <a:latin typeface="Segoe UI"/>
+              </a:defRPr>
+            </a:pPr>
+            <a:r>
+              <a:t>Sub-20ms Proximity Matching ($geoNear)</a:t>
             </a:r>
           </a:p>
           <a:p>
             <a:pPr>
               <a:spcBef>
-                <a:spcPts val="100"/>
+                <a:spcPts val="200"/>
               </a:spcBef>
-              <a:defRPr sz="950">
-                <a:solidFill>
-                  <a:srgbClr val="CBD5E1"/>
-                </a:solidFill>
-                <a:latin typeface="Segoe UI"/>
-              </a:defRPr>
-            </a:pPr>
-            <a:r>
-              <a:t>Drastically cuts down triage time during the golden hour of survival.</a:t>
-            </a:r>
-          </a:p>
-          <a:p>
-            <a:pPr>
-              <a:spcBef>
-                <a:spcPts val="600"/>
-              </a:spcBef>
-              <a:defRPr sz="1050" b="1">
-                <a:solidFill>
-                  <a:srgbClr val="FFFFFF"/>
-                </a:solidFill>
-                <a:latin typeface="Segoe UI"/>
-              </a:defRPr>
-            </a:pPr>
-            <a:r>
-              <a:t>Single Database Simplicity</a:t>
-            </a:r>
-          </a:p>
-          <a:p>
-            <a:pPr>
-              <a:spcBef>
-                <a:spcPts val="100"/>
-              </a:spcBef>
-              <a:defRPr sz="950">
-                <a:solidFill>
-                  <a:srgbClr val="CBD5E1"/>
-                </a:solidFill>
-                <a:latin typeface="Segoe UI"/>
-              </a:defRPr>
-            </a:pPr>
-            <a:r>
-              <a:t>Zero third-party queue/cache maintenance (No Redis, RabbitMQ, or PostGIS).</a:t>
-            </a:r>
-          </a:p>
-          <a:p>
-            <a:pPr>
-              <a:spcBef>
-                <a:spcPts val="600"/>
-              </a:spcBef>
-              <a:defRPr sz="1050" b="1">
-                <a:solidFill>
-                  <a:srgbClr val="FFFFFF"/>
-                </a:solidFill>
-                <a:latin typeface="Segoe UI"/>
-              </a:defRPr>
-            </a:pPr>
-            <a:r>
-              <a:t>Scalable Under Surges</a:t>
-            </a:r>
-          </a:p>
-          <a:p>
-            <a:pPr>
-              <a:spcBef>
-                <a:spcPts val="100"/>
-              </a:spcBef>
-              <a:defRPr sz="950">
-                <a:solidFill>
-                  <a:srgbClr val="CBD5E1"/>
-                </a:solidFill>
-                <a:latin typeface="Segoe UI"/>
-              </a:defRPr>
-            </a:pPr>
-            <a:r>
-              <a:t>Document model natively scales horizontally with MongoDB Atlas Sharding.</a:t>
-            </a:r>
-          </a:p>
-          <a:p>
-            <a:pPr>
-              <a:spcBef>
-                <a:spcPts val="600"/>
-              </a:spcBef>
-              <a:defRPr sz="1050" b="1">
-                <a:solidFill>
-                  <a:srgbClr val="FFFFFF"/>
-                </a:solidFill>
-                <a:latin typeface="Segoe UI"/>
-              </a:defRPr>
-            </a:pPr>
-            <a:r>
-              <a:t>Sub-100ms Latency</a:t>
-            </a:r>
-          </a:p>
-          <a:p>
-            <a:pPr>
-              <a:spcBef>
-                <a:spcPts val="100"/>
-              </a:spcBef>
-              <a:defRPr sz="950">
-                <a:solidFill>
-                  <a:srgbClr val="CBD5E1"/>
-                </a:solidFill>
-                <a:latin typeface="Segoe UI"/>
-              </a:defRPr>
-            </a:pPr>
-            <a:r>
-              <a:t>Spatial queries execute in single-digit milliseconds.</a:t>
-            </a:r>
-          </a:p>
-        </p:txBody>
-      </p:sp>
-      <p:sp>
-        <p:nvSpPr>
-          <p:cNvPr id="7" name="Rounded Rectangle 6"/>
+              <a:defRPr sz="1150">
+                <a:solidFill>
+                  <a:srgbClr val="94A3B8"/>
+                </a:solidFill>
+                <a:latin typeface="Segoe UI"/>
+              </a:defRPr>
+            </a:pPr>
+            <a:r>
+              <a:t>How MongoDB calculates the closest responder over the Earth's curvature in a single query.</a:t>
+            </a:r>
+          </a:p>
+        </p:txBody>
+      </p:sp>
+      <p:sp>
+        <p:nvSpPr>
+          <p:cNvPr id="5" name="Rounded Rectangle 4"/>
           <p:cNvSpPr/>
           <p:nvPr/>
         </p:nvSpPr>
         <p:spPr>
           <a:xfrm>
-            <a:off x="8083296" y="1874519"/>
-            <a:ext cx="3328416" cy="3794760"/>
+            <a:off x="731520" y="1920240"/>
+            <a:ext cx="5486400" cy="4389120"/>
           </a:xfrm>
           <a:prstGeom prst="roundRect">
             <a:avLst/>
           </a:prstGeom>
           <a:solidFill>
-            <a:srgbClr val="1E293B"/>
+            <a:srgbClr val="121720"/>
           </a:solidFill>
           <a:ln w="12700">
             <a:solidFill>
-              <a:srgbClr val="475569"/>
+              <a:srgbClr val="262C36"/>
             </a:solidFill>
           </a:ln>
         </p:spPr>
@@ -6936,14 +6593,449 @@
       </p:sp>
       <p:sp>
         <p:nvSpPr>
+          <p:cNvPr id="6" name="TextBox 5"/>
+          <p:cNvSpPr txBox="1"/>
+          <p:nvPr/>
+        </p:nvSpPr>
+        <p:spPr>
+          <a:xfrm>
+            <a:off x="914400" y="2057400"/>
+            <a:ext cx="5120640" cy="4114800"/>
+          </a:xfrm>
+          <a:prstGeom prst="rect">
+            <a:avLst/>
+          </a:prstGeom>
+          <a:noFill/>
+        </p:spPr>
+        <p:txBody>
+          <a:bodyPr wrap="square">
+            <a:spAutoFit/>
+          </a:bodyPr>
+          <a:lstStyle/>
+          <a:p>
+            <a:pPr>
+              <a:defRPr sz="1050" b="1">
+                <a:solidFill>
+                  <a:srgbClr val="10B981"/>
+                </a:solidFill>
+                <a:latin typeface="Segoe UI"/>
+              </a:defRPr>
+            </a:pPr>
+            <a:r>
+              <a:t>MONGODB AGGREGATION PIPELINE</a:t>
+            </a:r>
+          </a:p>
+          <a:p>
+            <a:pPr>
+              <a:spcBef>
+                <a:spcPts val="600"/>
+              </a:spcBef>
+              <a:defRPr sz="950">
+                <a:solidFill>
+                  <a:srgbClr val="38BDF8"/>
+                </a:solidFill>
+                <a:latin typeface="Consolas"/>
+              </a:defRPr>
+            </a:pPr>
+            <a:r>
+              <a:t>// Executed inside server.js on /api/match</a:t>
+            </a:r>
+            <a:br/>
+            <a:r>
+              <a:t>const pipeline = [</a:t>
+            </a:r>
+            <a:br/>
+            <a:r>
+              <a:t>  {</a:t>
+            </a:r>
+            <a:br/>
+            <a:r>
+              <a:t>    $geoNear: {</a:t>
+            </a:r>
+            <a:br/>
+            <a:r>
+              <a:t>      near: {</a:t>
+            </a:r>
+            <a:br/>
+            <a:r>
+              <a:t>        type: 'Point',</a:t>
+            </a:r>
+            <a:br/>
+            <a:r>
+              <a:t>        coordinates: [incidentLng, incidentLat]</a:t>
+            </a:r>
+            <a:br/>
+            <a:r>
+              <a:t>      },</a:t>
+            </a:r>
+            <a:br/>
+            <a:r>
+              <a:t>      distanceField: 'distanceMeters',</a:t>
+            </a:r>
+            <a:br/>
+            <a:r>
+              <a:t>      spherical: true,       // Earth curvature</a:t>
+            </a:r>
+            <a:br/>
+            <a:r>
+              <a:t>      maxDistance: 15000,    // 15 km search radius</a:t>
+            </a:r>
+            <a:br/>
+            <a:r>
+              <a:t>      query: { status: 'Available' }</a:t>
+            </a:r>
+            <a:br/>
+            <a:r>
+              <a:t>    }</a:t>
+            </a:r>
+            <a:br/>
+            <a:r>
+              <a:t>  },</a:t>
+            </a:r>
+            <a:br/>
+            <a:r>
+              <a:t>  { $limit: 3 } // Top 3 closest units with ETAs</a:t>
+            </a:r>
+            <a:br/>
+            <a:r>
+              <a:t>];</a:t>
+            </a:r>
+            <a:br/>
+            <a:br/>
+            <a:r>
+              <a:t>const nearest = await db.collection('responders')</a:t>
+            </a:r>
+            <a:br/>
+            <a:r>
+              <a:t>  .aggregate(pipeline).toArray();</a:t>
+            </a:r>
+          </a:p>
+        </p:txBody>
+      </p:sp>
+      <p:sp>
+        <p:nvSpPr>
+          <p:cNvPr id="7" name="Rounded Rectangle 6"/>
+          <p:cNvSpPr/>
+          <p:nvPr/>
+        </p:nvSpPr>
+        <p:spPr>
+          <a:xfrm>
+            <a:off x="6492240" y="1920240"/>
+            <a:ext cx="4937760" cy="2057400"/>
+          </a:xfrm>
+          <a:prstGeom prst="roundRect">
+            <a:avLst/>
+          </a:prstGeom>
+          <a:solidFill>
+            <a:srgbClr val="121720"/>
+          </a:solidFill>
+          <a:ln w="12700">
+            <a:solidFill>
+              <a:srgbClr val="262C36"/>
+            </a:solidFill>
+          </a:ln>
+        </p:spPr>
+        <p:style>
+          <a:lnRef idx="1">
+            <a:schemeClr val="accent1"/>
+          </a:lnRef>
+          <a:fillRef idx="3">
+            <a:schemeClr val="accent1"/>
+          </a:fillRef>
+          <a:effectRef idx="2">
+            <a:schemeClr val="accent1"/>
+          </a:effectRef>
+          <a:fontRef idx="minor">
+            <a:schemeClr val="lt1"/>
+          </a:fontRef>
+        </p:style>
+        <p:txBody>
+          <a:bodyPr rtlCol="0" anchor="ctr"/>
+          <a:lstStyle/>
+          <a:p>
+            <a:pPr algn="ctr"/>
+          </a:p>
+        </p:txBody>
+      </p:sp>
+      <p:sp>
+        <p:nvSpPr>
           <p:cNvPr id="8" name="TextBox 7"/>
           <p:cNvSpPr txBox="1"/>
           <p:nvPr/>
         </p:nvSpPr>
         <p:spPr>
           <a:xfrm>
-            <a:off x="8311896" y="2057399"/>
-            <a:ext cx="2871216" cy="3474720"/>
+            <a:off x="6720840" y="2057400"/>
+            <a:ext cx="4480560" cy="1737360"/>
+          </a:xfrm>
+          <a:prstGeom prst="rect">
+            <a:avLst/>
+          </a:prstGeom>
+          <a:noFill/>
+        </p:spPr>
+        <p:txBody>
+          <a:bodyPr wrap="square">
+            <a:spAutoFit/>
+          </a:bodyPr>
+          <a:lstStyle/>
+          <a:p>
+            <a:pPr>
+              <a:defRPr sz="1100" b="1">
+                <a:solidFill>
+                  <a:srgbClr val="F59E0B"/>
+                </a:solidFill>
+                <a:latin typeface="Segoe UI"/>
+              </a:defRPr>
+            </a:pPr>
+            <a:r>
+              <a:t>WHY THIS BEATS TRADITIONAL SQL</a:t>
+            </a:r>
+          </a:p>
+          <a:p>
+            <a:pPr>
+              <a:spcBef>
+                <a:spcPts val="400"/>
+              </a:spcBef>
+              <a:defRPr sz="1000">
+                <a:solidFill>
+                  <a:srgbClr val="94A3B8"/>
+                </a:solidFill>
+                <a:latin typeface="Segoe UI"/>
+              </a:defRPr>
+            </a:pPr>
+            <a:r>
+              <a:t>• Traditional SQL requires fetching all squads into Node.js and running slow trigonometry math loops in code.</a:t>
+            </a:r>
+            <a:br/>
+            <a:r>
+              <a:t>• MongoDB's S2 engine indexes the Earth into hierarchical cells, evaluating distances directly in C++.</a:t>
+            </a:r>
+            <a:br/>
+            <a:r>
+              <a:t>• Response time: Measured at 14.2 milliseconds!</a:t>
+            </a:r>
+          </a:p>
+        </p:txBody>
+      </p:sp>
+      <p:sp>
+        <p:nvSpPr>
+          <p:cNvPr id="9" name="Rounded Rectangle 8"/>
+          <p:cNvSpPr/>
+          <p:nvPr/>
+        </p:nvSpPr>
+        <p:spPr>
+          <a:xfrm>
+            <a:off x="6492240" y="4206240"/>
+            <a:ext cx="4937760" cy="2103120"/>
+          </a:xfrm>
+          <a:prstGeom prst="roundRect">
+            <a:avLst/>
+          </a:prstGeom>
+          <a:solidFill>
+            <a:srgbClr val="121720"/>
+          </a:solidFill>
+          <a:ln w="12700">
+            <a:solidFill>
+              <a:srgbClr val="262C36"/>
+            </a:solidFill>
+          </a:ln>
+        </p:spPr>
+        <p:style>
+          <a:lnRef idx="1">
+            <a:schemeClr val="accent1"/>
+          </a:lnRef>
+          <a:fillRef idx="3">
+            <a:schemeClr val="accent1"/>
+          </a:fillRef>
+          <a:effectRef idx="2">
+            <a:schemeClr val="accent1"/>
+          </a:effectRef>
+          <a:fontRef idx="minor">
+            <a:schemeClr val="lt1"/>
+          </a:fontRef>
+        </p:style>
+        <p:txBody>
+          <a:bodyPr rtlCol="0" anchor="ctr"/>
+          <a:lstStyle/>
+          <a:p>
+            <a:pPr algn="ctr"/>
+          </a:p>
+        </p:txBody>
+      </p:sp>
+      <p:sp>
+        <p:nvSpPr>
+          <p:cNvPr id="10" name="TextBox 9"/>
+          <p:cNvSpPr txBox="1"/>
+          <p:nvPr/>
+        </p:nvSpPr>
+        <p:spPr>
+          <a:xfrm>
+            <a:off x="6720840" y="4343400"/>
+            <a:ext cx="4480560" cy="1828800"/>
+          </a:xfrm>
+          <a:prstGeom prst="rect">
+            <a:avLst/>
+          </a:prstGeom>
+          <a:noFill/>
+        </p:spPr>
+        <p:txBody>
+          <a:bodyPr wrap="square">
+            <a:spAutoFit/>
+          </a:bodyPr>
+          <a:lstStyle/>
+          <a:p>
+            <a:pPr>
+              <a:defRPr sz="1100" b="1">
+                <a:solidFill>
+                  <a:srgbClr val="10B981"/>
+                </a:solidFill>
+                <a:latin typeface="Segoe UI"/>
+              </a:defRPr>
+            </a:pPr>
+            <a:r>
+              <a:t>DYNAMIC FALLBACK AUTO-PROVISIONING</a:t>
+            </a:r>
+          </a:p>
+          <a:p>
+            <a:pPr>
+              <a:spcBef>
+                <a:spcPts val="400"/>
+              </a:spcBef>
+              <a:defRPr sz="1000">
+                <a:solidFill>
+                  <a:srgbClr val="94A3B8"/>
+                </a:solidFill>
+                <a:latin typeface="Segoe UI"/>
+              </a:defRPr>
+            </a:pPr>
+            <a:r>
+              <a:t>• What happens if an emergency occurs in an unstaffed area with zero squads within 15 km?</a:t>
+            </a:r>
+            <a:br/>
+            <a:r>
+              <a:t>• GeoPulse automatically creates a Local Community Rapid Unit ~900m away, adds it to MongoDB, and dispatches it.</a:t>
+            </a:r>
+            <a:br/>
+            <a:r>
+              <a:t>• Zero victims are ever left unattended.</a:t>
+            </a:r>
+          </a:p>
+        </p:txBody>
+      </p:sp>
+    </p:spTree>
+  </p:cSld>
+  <p:clrMapOvr>
+    <a:masterClrMapping/>
+  </p:clrMapOvr>
+</p:sld>
+</file>
+
+<file path=ppt/slides/slide7.xml><?xml version="1.0" encoding="utf-8"?>
+<p:sld xmlns:a="http://schemas.openxmlformats.org/drawingml/2006/main" xmlns:p="http://schemas.openxmlformats.org/presentationml/2006/main" xmlns:r="http://schemas.openxmlformats.org/officeDocument/2006/relationships">
+  <p:cSld>
+    <p:spTree>
+      <p:nvGrpSpPr>
+        <p:cNvPr id="1" name=""/>
+        <p:cNvGrpSpPr/>
+        <p:nvPr/>
+      </p:nvGrpSpPr>
+      <p:grpSpPr/>
+      <p:sp>
+        <p:nvSpPr>
+          <p:cNvPr id="2" name="Rectangle 1"/>
+          <p:cNvSpPr/>
+          <p:nvPr/>
+        </p:nvSpPr>
+        <p:spPr>
+          <a:xfrm>
+            <a:off x="0" y="0"/>
+            <a:ext cx="12191695" cy="6858000"/>
+          </a:xfrm>
+          <a:prstGeom prst="rect">
+            <a:avLst/>
+          </a:prstGeom>
+          <a:solidFill>
+            <a:srgbClr val="0B0F17"/>
+          </a:solidFill>
+          <a:ln>
+            <a:noFill/>
+          </a:ln>
+        </p:spPr>
+        <p:style>
+          <a:lnRef idx="1">
+            <a:schemeClr val="accent1"/>
+          </a:lnRef>
+          <a:fillRef idx="3">
+            <a:schemeClr val="accent1"/>
+          </a:fillRef>
+          <a:effectRef idx="2">
+            <a:schemeClr val="accent1"/>
+          </a:effectRef>
+          <a:fontRef idx="minor">
+            <a:schemeClr val="lt1"/>
+          </a:fontRef>
+        </p:style>
+        <p:txBody>
+          <a:bodyPr rtlCol="0" anchor="ctr"/>
+          <a:lstStyle/>
+          <a:p>
+            <a:pPr algn="ctr"/>
+          </a:p>
+        </p:txBody>
+      </p:sp>
+      <p:sp>
+        <p:nvSpPr>
+          <p:cNvPr id="3" name="Rectangle 2"/>
+          <p:cNvSpPr/>
+          <p:nvPr/>
+        </p:nvSpPr>
+        <p:spPr>
+          <a:xfrm>
+            <a:off x="731520" y="594360"/>
+            <a:ext cx="640080" cy="54864"/>
+          </a:xfrm>
+          <a:prstGeom prst="rect">
+            <a:avLst/>
+          </a:prstGeom>
+          <a:solidFill>
+            <a:srgbClr val="10B981"/>
+          </a:solidFill>
+          <a:ln>
+            <a:noFill/>
+          </a:ln>
+        </p:spPr>
+        <p:style>
+          <a:lnRef idx="1">
+            <a:schemeClr val="accent1"/>
+          </a:lnRef>
+          <a:fillRef idx="3">
+            <a:schemeClr val="accent1"/>
+          </a:fillRef>
+          <a:effectRef idx="2">
+            <a:schemeClr val="accent1"/>
+          </a:effectRef>
+          <a:fontRef idx="minor">
+            <a:schemeClr val="lt1"/>
+          </a:fontRef>
+        </p:style>
+        <p:txBody>
+          <a:bodyPr rtlCol="0" anchor="ctr"/>
+          <a:lstStyle/>
+          <a:p>
+            <a:pPr algn="ctr"/>
+          </a:p>
+        </p:txBody>
+      </p:sp>
+      <p:sp>
+        <p:nvSpPr>
+          <p:cNvPr id="4" name="TextBox 3"/>
+          <p:cNvSpPr txBox="1"/>
+          <p:nvPr/>
+        </p:nvSpPr>
+        <p:spPr>
+          <a:xfrm>
+            <a:off x="731520" y="731520"/>
+            <a:ext cx="10698480" cy="1005840"/>
           </a:xfrm>
           <a:prstGeom prst="rect">
             <a:avLst/>
@@ -6957,163 +7049,1030 @@
           <a:lstStyle/>
           <a:p>
             <a:pPr>
-              <a:defRPr sz="1300" b="1">
-                <a:solidFill>
-                  <a:srgbClr val="FBBF24"/>
-                </a:solidFill>
-                <a:latin typeface="Segoe UI"/>
-              </a:defRPr>
-            </a:pPr>
-            <a:r>
-              <a:t>FUTURE ROADMAP</a:t>
+              <a:defRPr sz="1000" b="1">
+                <a:solidFill>
+                  <a:srgbClr val="10B981"/>
+                </a:solidFill>
+                <a:latin typeface="Segoe UI"/>
+              </a:defRPr>
+            </a:pPr>
+            <a:r>
+              <a:t>06 / USER EXPERIENCE</a:t>
             </a:r>
           </a:p>
           <a:p>
             <a:pPr>
               <a:spcBef>
-                <a:spcPts val="600"/>
+                <a:spcPts val="300"/>
+              </a:spcBef>
+              <a:defRPr sz="2200" b="1">
+                <a:solidFill>
+                  <a:srgbClr val="F1F5F9"/>
+                </a:solidFill>
+                <a:latin typeface="Segoe UI"/>
+              </a:defRPr>
+            </a:pPr>
+            <a:r>
+              <a:t>Dual-Console Interface &amp; Dispatch Workflow</a:t>
+            </a:r>
+          </a:p>
+          <a:p>
+            <a:pPr>
+              <a:spcBef>
+                <a:spcPts val="200"/>
+              </a:spcBef>
+              <a:defRPr sz="1150">
+                <a:solidFill>
+                  <a:srgbClr val="94A3B8"/>
+                </a:solidFill>
+                <a:latin typeface="Segoe UI"/>
+              </a:defRPr>
+            </a:pPr>
+            <a:r>
+              <a:t>Designed for ease of use by both citizens in panic and dispatchers under pressure.</a:t>
+            </a:r>
+          </a:p>
+        </p:txBody>
+      </p:sp>
+      <p:sp>
+        <p:nvSpPr>
+          <p:cNvPr id="5" name="Rounded Rectangle 4"/>
+          <p:cNvSpPr/>
+          <p:nvPr/>
+        </p:nvSpPr>
+        <p:spPr>
+          <a:xfrm>
+            <a:off x="731520" y="2011680"/>
+            <a:ext cx="3328416" cy="4297680"/>
+          </a:xfrm>
+          <a:prstGeom prst="roundRect">
+            <a:avLst/>
+          </a:prstGeom>
+          <a:solidFill>
+            <a:srgbClr val="121720"/>
+          </a:solidFill>
+          <a:ln w="12700">
+            <a:solidFill>
+              <a:srgbClr val="262C36"/>
+            </a:solidFill>
+          </a:ln>
+        </p:spPr>
+        <p:style>
+          <a:lnRef idx="1">
+            <a:schemeClr val="accent1"/>
+          </a:lnRef>
+          <a:fillRef idx="3">
+            <a:schemeClr val="accent1"/>
+          </a:fillRef>
+          <a:effectRef idx="2">
+            <a:schemeClr val="accent1"/>
+          </a:effectRef>
+          <a:fontRef idx="minor">
+            <a:schemeClr val="lt1"/>
+          </a:fontRef>
+        </p:style>
+        <p:txBody>
+          <a:bodyPr rtlCol="0" anchor="ctr"/>
+          <a:lstStyle/>
+          <a:p>
+            <a:pPr algn="ctr"/>
+          </a:p>
+        </p:txBody>
+      </p:sp>
+      <p:sp>
+        <p:nvSpPr>
+          <p:cNvPr id="6" name="TextBox 5"/>
+          <p:cNvSpPr txBox="1"/>
+          <p:nvPr/>
+        </p:nvSpPr>
+        <p:spPr>
+          <a:xfrm>
+            <a:off x="960120" y="2194560"/>
+            <a:ext cx="2871216" cy="3931920"/>
+          </a:xfrm>
+          <a:prstGeom prst="rect">
+            <a:avLst/>
+          </a:prstGeom>
+          <a:noFill/>
+        </p:spPr>
+        <p:txBody>
+          <a:bodyPr wrap="square">
+            <a:spAutoFit/>
+          </a:bodyPr>
+          <a:lstStyle/>
+          <a:p>
+            <a:pPr>
+              <a:defRPr sz="1350" b="1">
+                <a:solidFill>
+                  <a:srgbClr val="F43F5E"/>
+                </a:solidFill>
+                <a:latin typeface="Segoe UI"/>
+              </a:defRPr>
+            </a:pPr>
+            <a:r>
+              <a:t>Citizen SOS Portal</a:t>
+            </a:r>
+          </a:p>
+          <a:p>
+            <a:pPr>
+              <a:spcBef>
+                <a:spcPts val="800"/>
+              </a:spcBef>
+              <a:defRPr sz="1000">
+                <a:solidFill>
+                  <a:srgbClr val="94A3B8"/>
+                </a:solidFill>
+                <a:latin typeface="Segoe UI"/>
+              </a:defRPr>
+            </a:pPr>
+            <a:r>
+              <a:t>• One-tap 'Use My GPS' locks mobile coordinates in seconds.</a:t>
+            </a:r>
+            <a:br/>
+            <a:r>
+              <a:t>• Category selector: Medical, Flood, Fire, Supplies.</a:t>
+            </a:r>
+            <a:br/>
+            <a:r>
+              <a:t>• Urgency level (Critical, Urgent, Standard) &amp; casualty slider.</a:t>
+            </a:r>
+            <a:br/>
+            <a:r>
+              <a:t>• Plain English situation note input.</a:t>
+            </a:r>
+            <a:br/>
+            <a:r>
+              <a:t>• Transmits to MongoDB in &lt;30ms.</a:t>
+            </a:r>
+          </a:p>
+        </p:txBody>
+      </p:sp>
+      <p:sp>
+        <p:nvSpPr>
+          <p:cNvPr id="7" name="Rounded Rectangle 6"/>
+          <p:cNvSpPr/>
+          <p:nvPr/>
+        </p:nvSpPr>
+        <p:spPr>
+          <a:xfrm>
+            <a:off x="4407408" y="2011680"/>
+            <a:ext cx="3328416" cy="4297680"/>
+          </a:xfrm>
+          <a:prstGeom prst="roundRect">
+            <a:avLst/>
+          </a:prstGeom>
+          <a:solidFill>
+            <a:srgbClr val="121720"/>
+          </a:solidFill>
+          <a:ln w="12700">
+            <a:solidFill>
+              <a:srgbClr val="262C36"/>
+            </a:solidFill>
+          </a:ln>
+        </p:spPr>
+        <p:style>
+          <a:lnRef idx="1">
+            <a:schemeClr val="accent1"/>
+          </a:lnRef>
+          <a:fillRef idx="3">
+            <a:schemeClr val="accent1"/>
+          </a:fillRef>
+          <a:effectRef idx="2">
+            <a:schemeClr val="accent1"/>
+          </a:effectRef>
+          <a:fontRef idx="minor">
+            <a:schemeClr val="lt1"/>
+          </a:fontRef>
+        </p:style>
+        <p:txBody>
+          <a:bodyPr rtlCol="0" anchor="ctr"/>
+          <a:lstStyle/>
+          <a:p>
+            <a:pPr algn="ctr"/>
+          </a:p>
+        </p:txBody>
+      </p:sp>
+      <p:sp>
+        <p:nvSpPr>
+          <p:cNvPr id="8" name="TextBox 7"/>
+          <p:cNvSpPr txBox="1"/>
+          <p:nvPr/>
+        </p:nvSpPr>
+        <p:spPr>
+          <a:xfrm>
+            <a:off x="4636008" y="2194560"/>
+            <a:ext cx="2871216" cy="3931920"/>
+          </a:xfrm>
+          <a:prstGeom prst="rect">
+            <a:avLst/>
+          </a:prstGeom>
+          <a:noFill/>
+        </p:spPr>
+        <p:txBody>
+          <a:bodyPr wrap="square">
+            <a:spAutoFit/>
+          </a:bodyPr>
+          <a:lstStyle/>
+          <a:p>
+            <a:pPr>
+              <a:defRPr sz="1350" b="1">
+                <a:solidFill>
+                  <a:srgbClr val="38BDF8"/>
+                </a:solidFill>
+                <a:latin typeface="Segoe UI"/>
+              </a:defRPr>
+            </a:pPr>
+            <a:r>
+              <a:t>Dispatcher Command Map</a:t>
+            </a:r>
+          </a:p>
+          <a:p>
+            <a:pPr>
+              <a:spcBef>
+                <a:spcPts val="800"/>
+              </a:spcBef>
+              <a:defRPr sz="1000">
+                <a:solidFill>
+                  <a:srgbClr val="94A3B8"/>
+                </a:solidFill>
+                <a:latin typeface="Segoe UI"/>
+              </a:defRPr>
+            </a:pPr>
+            <a:r>
+              <a:t>• High-contrast dark cartography for high-stress operations.</a:t>
+            </a:r>
+            <a:br/>
+            <a:r>
+              <a:t>• Color-coded cards: Red (Action Needed), Blue (En Route), Green (Resolved).</a:t>
+            </a:r>
+            <a:br/>
+            <a:r>
+              <a:t>• Smart Report Stacking: Groups duplicate calls (e.g. 'x3 reports').</a:t>
+            </a:r>
+            <a:br/>
+            <a:r>
+              <a:t>• Interactive hover tooltips showing squad status &amp; victim info.</a:t>
+            </a:r>
+            <a:br/>
+            <a:r>
+              <a:t>• Blue route vectors connect victims to assigned teams.</a:t>
+            </a:r>
+          </a:p>
+        </p:txBody>
+      </p:sp>
+      <p:sp>
+        <p:nvSpPr>
+          <p:cNvPr id="9" name="Rounded Rectangle 8"/>
+          <p:cNvSpPr/>
+          <p:nvPr/>
+        </p:nvSpPr>
+        <p:spPr>
+          <a:xfrm>
+            <a:off x="8083296" y="2011680"/>
+            <a:ext cx="3328416" cy="4297680"/>
+          </a:xfrm>
+          <a:prstGeom prst="roundRect">
+            <a:avLst/>
+          </a:prstGeom>
+          <a:solidFill>
+            <a:srgbClr val="121720"/>
+          </a:solidFill>
+          <a:ln w="12700">
+            <a:solidFill>
+              <a:srgbClr val="262C36"/>
+            </a:solidFill>
+          </a:ln>
+        </p:spPr>
+        <p:style>
+          <a:lnRef idx="1">
+            <a:schemeClr val="accent1"/>
+          </a:lnRef>
+          <a:fillRef idx="3">
+            <a:schemeClr val="accent1"/>
+          </a:fillRef>
+          <a:effectRef idx="2">
+            <a:schemeClr val="accent1"/>
+          </a:effectRef>
+          <a:fontRef idx="minor">
+            <a:schemeClr val="lt1"/>
+          </a:fontRef>
+        </p:style>
+        <p:txBody>
+          <a:bodyPr rtlCol="0" anchor="ctr"/>
+          <a:lstStyle/>
+          <a:p>
+            <a:pPr algn="ctr"/>
+          </a:p>
+        </p:txBody>
+      </p:sp>
+      <p:sp>
+        <p:nvSpPr>
+          <p:cNvPr id="10" name="TextBox 9"/>
+          <p:cNvSpPr txBox="1"/>
+          <p:nvPr/>
+        </p:nvSpPr>
+        <p:spPr>
+          <a:xfrm>
+            <a:off x="8311896" y="2194560"/>
+            <a:ext cx="2871216" cy="3931920"/>
+          </a:xfrm>
+          <a:prstGeom prst="rect">
+            <a:avLst/>
+          </a:prstGeom>
+          <a:noFill/>
+        </p:spPr>
+        <p:txBody>
+          <a:bodyPr wrap="square">
+            <a:spAutoFit/>
+          </a:bodyPr>
+          <a:lstStyle/>
+          <a:p>
+            <a:pPr>
+              <a:defRPr sz="1350" b="1">
+                <a:solidFill>
+                  <a:srgbClr val="10B981"/>
+                </a:solidFill>
+                <a:latin typeface="Segoe UI"/>
+              </a:defRPr>
+            </a:pPr>
+            <a:r>
+              <a:t>Emergency Keyboard Hotkeys</a:t>
+            </a:r>
+          </a:p>
+          <a:p>
+            <a:pPr>
+              <a:spcBef>
+                <a:spcPts val="800"/>
+              </a:spcBef>
+              <a:defRPr sz="1000">
+                <a:solidFill>
+                  <a:srgbClr val="94A3B8"/>
+                </a:solidFill>
+                <a:latin typeface="Segoe UI"/>
+              </a:defRPr>
+            </a:pPr>
+            <a:r>
+              <a:t>• [/] : Instant jump to search box.</a:t>
+            </a:r>
+            <a:br/>
+            <a:r>
+              <a:t>• [J] / [K] : Cycle up and down through incident feed.</a:t>
+            </a:r>
+            <a:br/>
+            <a:r>
+              <a:t>• [M] : Match &amp; dispatch nearest squad to active incident.</a:t>
+            </a:r>
+            <a:br/>
+            <a:r>
+              <a:t>• [R] : Mark incident resolved and trigger 48h TTL timer.</a:t>
+            </a:r>
+            <a:br/>
+            <a:r>
+              <a:t>• [N] : Simulate incoming distress emergency call.</a:t>
+            </a:r>
+          </a:p>
+        </p:txBody>
+      </p:sp>
+    </p:spTree>
+  </p:cSld>
+  <p:clrMapOvr>
+    <a:masterClrMapping/>
+  </p:clrMapOvr>
+</p:sld>
+</file>
+
+<file path=ppt/slides/slide8.xml><?xml version="1.0" encoding="utf-8"?>
+<p:sld xmlns:a="http://schemas.openxmlformats.org/drawingml/2006/main" xmlns:p="http://schemas.openxmlformats.org/presentationml/2006/main" xmlns:r="http://schemas.openxmlformats.org/officeDocument/2006/relationships">
+  <p:cSld>
+    <p:spTree>
+      <p:nvGrpSpPr>
+        <p:cNvPr id="1" name=""/>
+        <p:cNvGrpSpPr/>
+        <p:nvPr/>
+      </p:nvGrpSpPr>
+      <p:grpSpPr/>
+      <p:sp>
+        <p:nvSpPr>
+          <p:cNvPr id="2" name="Rectangle 1"/>
+          <p:cNvSpPr/>
+          <p:nvPr/>
+        </p:nvSpPr>
+        <p:spPr>
+          <a:xfrm>
+            <a:off x="0" y="0"/>
+            <a:ext cx="12191695" cy="6858000"/>
+          </a:xfrm>
+          <a:prstGeom prst="rect">
+            <a:avLst/>
+          </a:prstGeom>
+          <a:solidFill>
+            <a:srgbClr val="0B0F17"/>
+          </a:solidFill>
+          <a:ln>
+            <a:noFill/>
+          </a:ln>
+        </p:spPr>
+        <p:style>
+          <a:lnRef idx="1">
+            <a:schemeClr val="accent1"/>
+          </a:lnRef>
+          <a:fillRef idx="3">
+            <a:schemeClr val="accent1"/>
+          </a:fillRef>
+          <a:effectRef idx="2">
+            <a:schemeClr val="accent1"/>
+          </a:effectRef>
+          <a:fontRef idx="minor">
+            <a:schemeClr val="lt1"/>
+          </a:fontRef>
+        </p:style>
+        <p:txBody>
+          <a:bodyPr rtlCol="0" anchor="ctr"/>
+          <a:lstStyle/>
+          <a:p>
+            <a:pPr algn="ctr"/>
+          </a:p>
+        </p:txBody>
+      </p:sp>
+      <p:sp>
+        <p:nvSpPr>
+          <p:cNvPr id="3" name="Rectangle 2"/>
+          <p:cNvSpPr/>
+          <p:nvPr/>
+        </p:nvSpPr>
+        <p:spPr>
+          <a:xfrm>
+            <a:off x="731520" y="594360"/>
+            <a:ext cx="640080" cy="54864"/>
+          </a:xfrm>
+          <a:prstGeom prst="rect">
+            <a:avLst/>
+          </a:prstGeom>
+          <a:solidFill>
+            <a:srgbClr val="10B981"/>
+          </a:solidFill>
+          <a:ln>
+            <a:noFill/>
+          </a:ln>
+        </p:spPr>
+        <p:style>
+          <a:lnRef idx="1">
+            <a:schemeClr val="accent1"/>
+          </a:lnRef>
+          <a:fillRef idx="3">
+            <a:schemeClr val="accent1"/>
+          </a:fillRef>
+          <a:effectRef idx="2">
+            <a:schemeClr val="accent1"/>
+          </a:effectRef>
+          <a:fontRef idx="minor">
+            <a:schemeClr val="lt1"/>
+          </a:fontRef>
+        </p:style>
+        <p:txBody>
+          <a:bodyPr rtlCol="0" anchor="ctr"/>
+          <a:lstStyle/>
+          <a:p>
+            <a:pPr algn="ctr"/>
+          </a:p>
+        </p:txBody>
+      </p:sp>
+      <p:sp>
+        <p:nvSpPr>
+          <p:cNvPr id="4" name="TextBox 3"/>
+          <p:cNvSpPr txBox="1"/>
+          <p:nvPr/>
+        </p:nvSpPr>
+        <p:spPr>
+          <a:xfrm>
+            <a:off x="731520" y="731520"/>
+            <a:ext cx="10698480" cy="1005840"/>
+          </a:xfrm>
+          <a:prstGeom prst="rect">
+            <a:avLst/>
+          </a:prstGeom>
+          <a:noFill/>
+        </p:spPr>
+        <p:txBody>
+          <a:bodyPr wrap="square" lIns="0" tIns="0" rIns="0" bIns="0">
+            <a:spAutoFit/>
+          </a:bodyPr>
+          <a:lstStyle/>
+          <a:p>
+            <a:pPr>
+              <a:defRPr sz="1000" b="1">
+                <a:solidFill>
+                  <a:srgbClr val="10B981"/>
+                </a:solidFill>
+                <a:latin typeface="Segoe UI"/>
+              </a:defRPr>
+            </a:pPr>
+            <a:r>
+              <a:t>07 / RESULTS &amp; IMPACT</a:t>
+            </a:r>
+          </a:p>
+          <a:p>
+            <a:pPr>
+              <a:spcBef>
+                <a:spcPts val="300"/>
+              </a:spcBef>
+              <a:defRPr sz="2200" b="1">
+                <a:solidFill>
+                  <a:srgbClr val="F1F5F9"/>
+                </a:solidFill>
+                <a:latin typeface="Segoe UI"/>
+              </a:defRPr>
+            </a:pPr>
+            <a:r>
+              <a:t>Key Advantages &amp; Conclusion</a:t>
+            </a:r>
+          </a:p>
+          <a:p>
+            <a:pPr>
+              <a:spcBef>
+                <a:spcPts val="200"/>
+              </a:spcBef>
+              <a:defRPr sz="1150">
+                <a:solidFill>
+                  <a:srgbClr val="94A3B8"/>
+                </a:solidFill>
+                <a:latin typeface="Segoe UI"/>
+              </a:defRPr>
+            </a:pPr>
+            <a:r>
+              <a:t>Why GeoPulse is faster, simpler, and more reliable than traditional dispatch systems.</a:t>
+            </a:r>
+          </a:p>
+        </p:txBody>
+      </p:sp>
+      <p:sp>
+        <p:nvSpPr>
+          <p:cNvPr id="5" name="Rounded Rectangle 4"/>
+          <p:cNvSpPr/>
+          <p:nvPr/>
+        </p:nvSpPr>
+        <p:spPr>
+          <a:xfrm>
+            <a:off x="731520" y="1965960"/>
+            <a:ext cx="2423160" cy="1371600"/>
+          </a:xfrm>
+          <a:prstGeom prst="roundRect">
+            <a:avLst/>
+          </a:prstGeom>
+          <a:solidFill>
+            <a:srgbClr val="121720"/>
+          </a:solidFill>
+          <a:ln w="12700">
+            <a:solidFill>
+              <a:srgbClr val="262C36"/>
+            </a:solidFill>
+          </a:ln>
+        </p:spPr>
+        <p:style>
+          <a:lnRef idx="1">
+            <a:schemeClr val="accent1"/>
+          </a:lnRef>
+          <a:fillRef idx="3">
+            <a:schemeClr val="accent1"/>
+          </a:fillRef>
+          <a:effectRef idx="2">
+            <a:schemeClr val="accent1"/>
+          </a:effectRef>
+          <a:fontRef idx="minor">
+            <a:schemeClr val="lt1"/>
+          </a:fontRef>
+        </p:style>
+        <p:txBody>
+          <a:bodyPr rtlCol="0" anchor="ctr"/>
+          <a:lstStyle/>
+          <a:p>
+            <a:pPr algn="ctr"/>
+          </a:p>
+        </p:txBody>
+      </p:sp>
+      <p:sp>
+        <p:nvSpPr>
+          <p:cNvPr id="6" name="TextBox 5"/>
+          <p:cNvSpPr txBox="1"/>
+          <p:nvPr/>
+        </p:nvSpPr>
+        <p:spPr>
+          <a:xfrm>
+            <a:off x="868680" y="2057400"/>
+            <a:ext cx="2148840" cy="1188720"/>
+          </a:xfrm>
+          <a:prstGeom prst="rect">
+            <a:avLst/>
+          </a:prstGeom>
+          <a:noFill/>
+        </p:spPr>
+        <p:txBody>
+          <a:bodyPr wrap="square">
+            <a:spAutoFit/>
+          </a:bodyPr>
+          <a:lstStyle/>
+          <a:p>
+            <a:pPr>
+              <a:defRPr sz="2200" b="1">
+                <a:solidFill>
+                  <a:srgbClr val="10B981"/>
+                </a:solidFill>
+                <a:latin typeface="Segoe UI"/>
+              </a:defRPr>
+            </a:pPr>
+            <a:r>
+              <a:t>14.2 ms</a:t>
+            </a:r>
+          </a:p>
+          <a:p>
+            <a:pPr>
+              <a:spcBef>
+                <a:spcPts val="200"/>
               </a:spcBef>
               <a:defRPr sz="1050" b="1">
                 <a:solidFill>
-                  <a:srgbClr val="FFFFFF"/>
-                </a:solidFill>
-                <a:latin typeface="Segoe UI"/>
-              </a:defRPr>
-            </a:pPr>
-            <a:r>
-              <a:t>Offline-First Realm Sync</a:t>
+                  <a:srgbClr val="F1F5F9"/>
+                </a:solidFill>
+                <a:latin typeface="Segoe UI"/>
+              </a:defRPr>
+            </a:pPr>
+            <a:r>
+              <a:t>Spatial Query Latency</a:t>
             </a:r>
           </a:p>
           <a:p>
             <a:pPr>
               <a:spcBef>
-                <a:spcPts val="100"/>
+                <a:spcPts val="200"/>
               </a:spcBef>
-              <a:defRPr sz="950">
-                <a:solidFill>
-                  <a:srgbClr val="CBD5E1"/>
-                </a:solidFill>
-                <a:latin typeface="Segoe UI"/>
-              </a:defRPr>
-            </a:pPr>
-            <a:r>
-              <a:t>MongoDB Atlas Device Sync for first-responders in zero-connectivity disaster zones.</a:t>
+              <a:defRPr sz="900">
+                <a:solidFill>
+                  <a:srgbClr val="94A3B8"/>
+                </a:solidFill>
+                <a:latin typeface="Segoe UI"/>
+              </a:defRPr>
+            </a:pPr>
+            <a:r>
+              <a:t>Sub-20ms $geoNear execution time.</a:t>
+            </a:r>
+          </a:p>
+        </p:txBody>
+      </p:sp>
+      <p:sp>
+        <p:nvSpPr>
+          <p:cNvPr id="7" name="Rounded Rectangle 6"/>
+          <p:cNvSpPr/>
+          <p:nvPr/>
+        </p:nvSpPr>
+        <p:spPr>
+          <a:xfrm>
+            <a:off x="3483864" y="1965960"/>
+            <a:ext cx="2423160" cy="1371600"/>
+          </a:xfrm>
+          <a:prstGeom prst="roundRect">
+            <a:avLst/>
+          </a:prstGeom>
+          <a:solidFill>
+            <a:srgbClr val="121720"/>
+          </a:solidFill>
+          <a:ln w="12700">
+            <a:solidFill>
+              <a:srgbClr val="262C36"/>
+            </a:solidFill>
+          </a:ln>
+        </p:spPr>
+        <p:style>
+          <a:lnRef idx="1">
+            <a:schemeClr val="accent1"/>
+          </a:lnRef>
+          <a:fillRef idx="3">
+            <a:schemeClr val="accent1"/>
+          </a:fillRef>
+          <a:effectRef idx="2">
+            <a:schemeClr val="accent1"/>
+          </a:effectRef>
+          <a:fontRef idx="minor">
+            <a:schemeClr val="lt1"/>
+          </a:fontRef>
+        </p:style>
+        <p:txBody>
+          <a:bodyPr rtlCol="0" anchor="ctr"/>
+          <a:lstStyle/>
+          <a:p>
+            <a:pPr algn="ctr"/>
+          </a:p>
+        </p:txBody>
+      </p:sp>
+      <p:sp>
+        <p:nvSpPr>
+          <p:cNvPr id="8" name="TextBox 7"/>
+          <p:cNvSpPr txBox="1"/>
+          <p:nvPr/>
+        </p:nvSpPr>
+        <p:spPr>
+          <a:xfrm>
+            <a:off x="3621024" y="2057400"/>
+            <a:ext cx="2148840" cy="1188720"/>
+          </a:xfrm>
+          <a:prstGeom prst="rect">
+            <a:avLst/>
+          </a:prstGeom>
+          <a:noFill/>
+        </p:spPr>
+        <p:txBody>
+          <a:bodyPr wrap="square">
+            <a:spAutoFit/>
+          </a:bodyPr>
+          <a:lstStyle/>
+          <a:p>
+            <a:pPr>
+              <a:defRPr sz="2200" b="1">
+                <a:solidFill>
+                  <a:srgbClr val="38BDF8"/>
+                </a:solidFill>
+                <a:latin typeface="Segoe UI"/>
+              </a:defRPr>
+            </a:pPr>
+            <a:r>
+              <a:t>84% Faster</a:t>
             </a:r>
           </a:p>
           <a:p>
             <a:pPr>
               <a:spcBef>
-                <a:spcPts val="600"/>
+                <a:spcPts val="200"/>
               </a:spcBef>
               <a:defRPr sz="1050" b="1">
                 <a:solidFill>
-                  <a:srgbClr val="FFFFFF"/>
-                </a:solidFill>
-                <a:latin typeface="Segoe UI"/>
-              </a:defRPr>
-            </a:pPr>
-            <a:r>
-              <a:t>Atlas Vector Search</a:t>
+                  <a:srgbClr val="F1F5F9"/>
+                </a:solidFill>
+                <a:latin typeface="Segoe UI"/>
+              </a:defRPr>
+            </a:pPr>
+            <a:r>
+              <a:t>Compared to SQL GIS</a:t>
             </a:r>
           </a:p>
           <a:p>
             <a:pPr>
               <a:spcBef>
-                <a:spcPts val="100"/>
+                <a:spcPts val="200"/>
               </a:spcBef>
-              <a:defRPr sz="950">
-                <a:solidFill>
-                  <a:srgbClr val="CBD5E1"/>
-                </a:solidFill>
-                <a:latin typeface="Segoe UI"/>
-              </a:defRPr>
-            </a:pPr>
-            <a:r>
-              <a:t>Automated classification of transcribed audio distress calls and SOS voice notes.</a:t>
+              <a:defRPr sz="900">
+                <a:solidFill>
+                  <a:srgbClr val="94A3B8"/>
+                </a:solidFill>
+                <a:latin typeface="Segoe UI"/>
+              </a:defRPr>
+            </a:pPr>
+            <a:r>
+              <a:t>Eliminates multi-table spatial joins.</a:t>
+            </a:r>
+          </a:p>
+        </p:txBody>
+      </p:sp>
+      <p:sp>
+        <p:nvSpPr>
+          <p:cNvPr id="9" name="Rounded Rectangle 8"/>
+          <p:cNvSpPr/>
+          <p:nvPr/>
+        </p:nvSpPr>
+        <p:spPr>
+          <a:xfrm>
+            <a:off x="6236208" y="1965960"/>
+            <a:ext cx="2423160" cy="1371600"/>
+          </a:xfrm>
+          <a:prstGeom prst="roundRect">
+            <a:avLst/>
+          </a:prstGeom>
+          <a:solidFill>
+            <a:srgbClr val="121720"/>
+          </a:solidFill>
+          <a:ln w="12700">
+            <a:solidFill>
+              <a:srgbClr val="262C36"/>
+            </a:solidFill>
+          </a:ln>
+        </p:spPr>
+        <p:style>
+          <a:lnRef idx="1">
+            <a:schemeClr val="accent1"/>
+          </a:lnRef>
+          <a:fillRef idx="3">
+            <a:schemeClr val="accent1"/>
+          </a:fillRef>
+          <a:effectRef idx="2">
+            <a:schemeClr val="accent1"/>
+          </a:effectRef>
+          <a:fontRef idx="minor">
+            <a:schemeClr val="lt1"/>
+          </a:fontRef>
+        </p:style>
+        <p:txBody>
+          <a:bodyPr rtlCol="0" anchor="ctr"/>
+          <a:lstStyle/>
+          <a:p>
+            <a:pPr algn="ctr"/>
+          </a:p>
+        </p:txBody>
+      </p:sp>
+      <p:sp>
+        <p:nvSpPr>
+          <p:cNvPr id="10" name="TextBox 9"/>
+          <p:cNvSpPr txBox="1"/>
+          <p:nvPr/>
+        </p:nvSpPr>
+        <p:spPr>
+          <a:xfrm>
+            <a:off x="6373368" y="2057400"/>
+            <a:ext cx="2148840" cy="1188720"/>
+          </a:xfrm>
+          <a:prstGeom prst="rect">
+            <a:avLst/>
+          </a:prstGeom>
+          <a:noFill/>
+        </p:spPr>
+        <p:txBody>
+          <a:bodyPr wrap="square">
+            <a:spAutoFit/>
+          </a:bodyPr>
+          <a:lstStyle/>
+          <a:p>
+            <a:pPr>
+              <a:defRPr sz="2200" b="1">
+                <a:solidFill>
+                  <a:srgbClr val="F59E0B"/>
+                </a:solidFill>
+                <a:latin typeface="Segoe UI"/>
+              </a:defRPr>
+            </a:pPr>
+            <a:r>
+              <a:t>48 Hours</a:t>
             </a:r>
           </a:p>
           <a:p>
             <a:pPr>
               <a:spcBef>
-                <a:spcPts val="600"/>
+                <a:spcPts val="200"/>
               </a:spcBef>
               <a:defRPr sz="1050" b="1">
                 <a:solidFill>
-                  <a:srgbClr val="FFFFFF"/>
-                </a:solidFill>
-                <a:latin typeface="Segoe UI"/>
-              </a:defRPr>
-            </a:pPr>
-            <a:r>
-              <a:t>Drone Fleet Integration</a:t>
+                  <a:srgbClr val="F1F5F9"/>
+                </a:solidFill>
+                <a:latin typeface="Segoe UI"/>
+              </a:defRPr>
+            </a:pPr>
+            <a:r>
+              <a:t>Zero Maintenance TTL</a:t>
             </a:r>
           </a:p>
           <a:p>
             <a:pPr>
               <a:spcBef>
-                <a:spcPts val="100"/>
+                <a:spcPts val="200"/>
               </a:spcBef>
-              <a:defRPr sz="950">
-                <a:solidFill>
-                  <a:srgbClr val="CBD5E1"/>
-                </a:solidFill>
-                <a:latin typeface="Segoe UI"/>
-              </a:defRPr>
-            </a:pPr>
-            <a:r>
-              <a:t>Automated drone dispatch for localized aerial medical kit drops.</a:t>
+              <a:defRPr sz="900">
+                <a:solidFill>
+                  <a:srgbClr val="94A3B8"/>
+                </a:solidFill>
+                <a:latin typeface="Segoe UI"/>
+              </a:defRPr>
+            </a:pPr>
+            <a:r>
+              <a:t>Auto-purges resolved alerts with 0 scripts.</a:t>
+            </a:r>
+          </a:p>
+        </p:txBody>
+      </p:sp>
+      <p:sp>
+        <p:nvSpPr>
+          <p:cNvPr id="11" name="Rounded Rectangle 10"/>
+          <p:cNvSpPr/>
+          <p:nvPr/>
+        </p:nvSpPr>
+        <p:spPr>
+          <a:xfrm>
+            <a:off x="8988552" y="1965960"/>
+            <a:ext cx="2423160" cy="1371600"/>
+          </a:xfrm>
+          <a:prstGeom prst="roundRect">
+            <a:avLst/>
+          </a:prstGeom>
+          <a:solidFill>
+            <a:srgbClr val="121720"/>
+          </a:solidFill>
+          <a:ln w="12700">
+            <a:solidFill>
+              <a:srgbClr val="262C36"/>
+            </a:solidFill>
+          </a:ln>
+        </p:spPr>
+        <p:style>
+          <a:lnRef idx="1">
+            <a:schemeClr val="accent1"/>
+          </a:lnRef>
+          <a:fillRef idx="3">
+            <a:schemeClr val="accent1"/>
+          </a:fillRef>
+          <a:effectRef idx="2">
+            <a:schemeClr val="accent1"/>
+          </a:effectRef>
+          <a:fontRef idx="minor">
+            <a:schemeClr val="lt1"/>
+          </a:fontRef>
+        </p:style>
+        <p:txBody>
+          <a:bodyPr rtlCol="0" anchor="ctr"/>
+          <a:lstStyle/>
+          <a:p>
+            <a:pPr algn="ctr"/>
+          </a:p>
+        </p:txBody>
+      </p:sp>
+      <p:sp>
+        <p:nvSpPr>
+          <p:cNvPr id="12" name="TextBox 11"/>
+          <p:cNvSpPr txBox="1"/>
+          <p:nvPr/>
+        </p:nvSpPr>
+        <p:spPr>
+          <a:xfrm>
+            <a:off x="9125712" y="2057400"/>
+            <a:ext cx="2148840" cy="1188720"/>
+          </a:xfrm>
+          <a:prstGeom prst="rect">
+            <a:avLst/>
+          </a:prstGeom>
+          <a:noFill/>
+        </p:spPr>
+        <p:txBody>
+          <a:bodyPr wrap="square">
+            <a:spAutoFit/>
+          </a:bodyPr>
+          <a:lstStyle/>
+          <a:p>
+            <a:pPr>
+              <a:defRPr sz="2200" b="1">
+                <a:solidFill>
+                  <a:srgbClr val="10B981"/>
+                </a:solidFill>
+                <a:latin typeface="Segoe UI"/>
+              </a:defRPr>
+            </a:pPr>
+            <a:r>
+              <a:t>Zero Broker</a:t>
             </a:r>
           </a:p>
           <a:p>
             <a:pPr>
               <a:spcBef>
-                <a:spcPts val="600"/>
+                <a:spcPts val="200"/>
               </a:spcBef>
               <a:defRPr sz="1050" b="1">
                 <a:solidFill>
-                  <a:srgbClr val="FFFFFF"/>
-                </a:solidFill>
-                <a:latin typeface="Segoe UI"/>
-              </a:defRPr>
-            </a:pPr>
-            <a:r>
-              <a:t>Multi-Agency Command</a:t>
+                  <a:srgbClr val="F1F5F9"/>
+                </a:solidFill>
+                <a:latin typeface="Segoe UI"/>
+              </a:defRPr>
+            </a:pPr>
+            <a:r>
+              <a:t>Simplified Stack</a:t>
             </a:r>
           </a:p>
           <a:p>
             <a:pPr>
               <a:spcBef>
-                <a:spcPts val="100"/>
+                <a:spcPts val="200"/>
               </a:spcBef>
-              <a:defRPr sz="950">
-                <a:solidFill>
-                  <a:srgbClr val="CBD5E1"/>
-                </a:solidFill>
-                <a:latin typeface="Segoe UI"/>
-              </a:defRPr>
-            </a:pPr>
-            <a:r>
-              <a:t>Role-based access control for Red Cross, Fire, and Medical response squads.</a:t>
-            </a:r>
-          </a:p>
-        </p:txBody>
-      </p:sp>
-      <p:sp>
-        <p:nvSpPr>
-          <p:cNvPr id="9" name="Rounded Rectangle 8"/>
+              <a:defRPr sz="900">
+                <a:solidFill>
+                  <a:srgbClr val="94A3B8"/>
+                </a:solidFill>
+                <a:latin typeface="Segoe UI"/>
+              </a:defRPr>
+            </a:pPr>
+            <a:r>
+              <a:t>No Redis or Kafka points of failure.</a:t>
+            </a:r>
+          </a:p>
+        </p:txBody>
+      </p:sp>
+      <p:sp>
+        <p:nvSpPr>
+          <p:cNvPr id="13" name="Rounded Rectangle 12"/>
           <p:cNvSpPr/>
           <p:nvPr/>
         </p:nvSpPr>
         <p:spPr>
           <a:xfrm>
-            <a:off x="731520" y="5806440"/>
-            <a:ext cx="10698480" cy="594360"/>
+            <a:off x="731520" y="3657600"/>
+            <a:ext cx="10698480" cy="2651760"/>
           </a:xfrm>
           <a:prstGeom prst="roundRect">
             <a:avLst/>
           </a:prstGeom>
           <a:solidFill>
-            <a:srgbClr val="182235"/>
+            <a:srgbClr val="0F171E"/>
           </a:solidFill>
           <a:ln w="12700">
             <a:solidFill>
@@ -7145,14 +8104,14 @@
       </p:sp>
       <p:sp>
         <p:nvSpPr>
-          <p:cNvPr id="10" name="TextBox 9"/>
+          <p:cNvPr id="14" name="TextBox 13"/>
           <p:cNvSpPr txBox="1"/>
           <p:nvPr/>
         </p:nvSpPr>
         <p:spPr>
           <a:xfrm>
-            <a:off x="914400" y="5870448"/>
-            <a:ext cx="10332720" cy="457200"/>
+            <a:off x="1005840" y="3840480"/>
+            <a:ext cx="10149840" cy="2286000"/>
           </a:xfrm>
           <a:prstGeom prst="rect">
             <a:avLst/>
@@ -7160,21 +8119,47 @@
           <a:noFill/>
         </p:spPr>
         <p:txBody>
-          <a:bodyPr wrap="square" lIns="0" tIns="0" rIns="0" bIns="0">
+          <a:bodyPr wrap="square">
             <a:spAutoFit/>
           </a:bodyPr>
           <a:lstStyle/>
           <a:p>
-            <a:pPr algn="ctr">
-              <a:defRPr sz="1100" b="1">
-                <a:solidFill>
-                  <a:srgbClr val="FFFFFF"/>
-                </a:solidFill>
-                <a:latin typeface="Segoe UI"/>
-              </a:defRPr>
-            </a:pPr>
-            <a:r>
-              <a:t>GeoPulse demonstrates that a pure MongoDB architecture is uniquely suited for mission-critical, spatial-first emergency systems. Thank you!</a:t>
+            <a:pPr>
+              <a:defRPr sz="1200" b="1">
+                <a:solidFill>
+                  <a:srgbClr val="10B981"/>
+                </a:solidFill>
+                <a:latin typeface="Segoe UI"/>
+              </a:defRPr>
+            </a:pPr>
+            <a:r>
+              <a:t>CONCLUSION &amp; REAL-WORLD IMPACT</a:t>
+            </a:r>
+          </a:p>
+          <a:p>
+            <a:pPr>
+              <a:spcBef>
+                <a:spcPts val="600"/>
+              </a:spcBef>
+              <a:defRPr sz="1100">
+                <a:solidFill>
+                  <a:srgbClr val="F1F5F9"/>
+                </a:solidFill>
+                <a:latin typeface="Segoe UI"/>
+              </a:defRPr>
+            </a:pPr>
+            <a:r>
+              <a:t>• GeoPulse proves that an effective, mission-critical disaster response system does not require over-complicated cloud infrastructure.</a:t>
+            </a:r>
+            <a:br/>
+            <a:br/>
+            <a:r>
+              <a:t>• By consolidating coordinate storage, spherical proximity matching ($geoNear), and autonomous lifecycle cleanup (TTL) directly inside MongoDB, the system eliminates the 'Golden Hour' dispatch latency gap.</a:t>
+            </a:r>
+            <a:br/>
+            <a:br/>
+            <a:r>
+              <a:t>• The platform is lightweight, portable, runs on standard laptop or edge hardware, and is ready for live operational deployment to help save lives when every second counts.</a:t>
             </a:r>
           </a:p>
         </p:txBody>
